--- a/Content (2).pptx
+++ b/Content (2).pptx
@@ -1,66 +1,63 @@
 
 <file path=ppt/presentation.xml><?xml version="1.0" encoding="utf-8"?>
-<p:presentation xmlns:a="http://schemas.openxmlformats.org/drawingml/2006/main" xmlns:r="http://schemas.openxmlformats.org/officeDocument/2006/relationships" xmlns:p="http://schemas.openxmlformats.org/presentationml/2006/main" saveSubsetFonts="1" embedTrueTypeFonts="true">
+<p:presentation xmlns:a="http://schemas.openxmlformats.org/drawingml/2006/main" xmlns:r="http://schemas.openxmlformats.org/officeDocument/2006/relationships" xmlns:p="http://schemas.openxmlformats.org/presentationml/2006/main" embedTrueTypeFonts="1" saveSubsetFonts="1">
   <p:sldMasterIdLst>
     <p:sldMasterId id="2147483648" r:id="rId1"/>
   </p:sldMasterIdLst>
   <p:sldIdLst>
-    <p:sldId id="256" r:id="rId6"/>
-    <p:sldId id="257" r:id="rId7"/>
-    <p:sldId id="258" r:id="rId8"/>
-    <p:sldId id="259" r:id="rId9"/>
-    <p:sldId id="260" r:id="rId10"/>
-    <p:sldId id="261" r:id="rId11"/>
-    <p:sldId id="262" r:id="rId12"/>
-    <p:sldId id="263" r:id="rId13"/>
-    <p:sldId id="264" r:id="rId14"/>
-    <p:sldId id="265" r:id="rId15"/>
-    <p:sldId id="266" r:id="rId16"/>
-    <p:sldId id="267" r:id="rId17"/>
-    <p:sldId id="268" r:id="rId18"/>
-    <p:sldId id="269" r:id="rId19"/>
-    <p:sldId id="270" r:id="rId20"/>
-    <p:sldId id="271" r:id="rId21"/>
-    <p:sldId id="272" r:id="rId22"/>
-    <p:sldId id="273" r:id="rId23"/>
-    <p:sldId id="274" r:id="rId24"/>
-    <p:sldId id="275" r:id="rId25"/>
-    <p:sldId id="276" r:id="rId26"/>
+    <p:sldId id="256" r:id="rId2"/>
+    <p:sldId id="257" r:id="rId3"/>
+    <p:sldId id="258" r:id="rId4"/>
+    <p:sldId id="259" r:id="rId5"/>
+    <p:sldId id="260" r:id="rId6"/>
+    <p:sldId id="261" r:id="rId7"/>
+    <p:sldId id="262" r:id="rId8"/>
+    <p:sldId id="263" r:id="rId9"/>
+    <p:sldId id="264" r:id="rId10"/>
+    <p:sldId id="265" r:id="rId11"/>
+    <p:sldId id="266" r:id="rId12"/>
+    <p:sldId id="267" r:id="rId13"/>
+    <p:sldId id="268" r:id="rId14"/>
+    <p:sldId id="269" r:id="rId15"/>
+    <p:sldId id="270" r:id="rId16"/>
+    <p:sldId id="271" r:id="rId17"/>
+    <p:sldId id="272" r:id="rId18"/>
+    <p:sldId id="273" r:id="rId19"/>
+    <p:sldId id="274" r:id="rId20"/>
+    <p:sldId id="275" r:id="rId21"/>
+    <p:sldId id="276" r:id="rId22"/>
   </p:sldIdLst>
   <p:sldSz cx="18288000" cy="10287000"/>
   <p:notesSz cx="6858000" cy="9144000"/>
   <p:embeddedFontLst>
     <p:embeddedFont>
-      <p:font typeface="Times New Roman Bold" charset="1" panose="02030802070405020303"/>
+      <p:font typeface="Canva Sans" panose="020B0604020202020204" charset="0"/>
+      <p:regular r:id="rId23"/>
+    </p:embeddedFont>
+    <p:embeddedFont>
+      <p:font typeface="Canva Sans Bold" panose="020B0604020202020204" charset="0"/>
+      <p:regular r:id="rId24"/>
+    </p:embeddedFont>
+    <p:embeddedFont>
+      <p:font typeface="IBM Plex Serif" panose="02060503050406000203" pitchFamily="18" charset="0"/>
+      <p:regular r:id="rId25"/>
+    </p:embeddedFont>
+    <p:embeddedFont>
+      <p:font typeface="IBM Plex Serif Bold" panose="020B0604020202020204" charset="0"/>
+      <p:regular r:id="rId26"/>
+    </p:embeddedFont>
+    <p:embeddedFont>
+      <p:font typeface="IBM Plex Serif Italics" panose="020B0604020202020204" charset="0"/>
       <p:regular r:id="rId27"/>
     </p:embeddedFont>
     <p:embeddedFont>
-      <p:font typeface="Times New Roman" charset="1" panose="02030502070405020303"/>
+      <p:font typeface="Open Sans Bold" panose="020B0604020202020204" charset="0"/>
       <p:regular r:id="rId28"/>
     </p:embeddedFont>
     <p:embeddedFont>
-      <p:font typeface="Canva Sans Bold" charset="1" panose="020B0803030501040103"/>
+      <p:font typeface="Times New Roman Bold" panose="02020803070505020304" pitchFamily="18" charset="0"/>
       <p:regular r:id="rId29"/>
-    </p:embeddedFont>
-    <p:embeddedFont>
-      <p:font typeface="IBM Plex Serif Italics" charset="1" panose="02060503050406000203"/>
-      <p:regular r:id="rId30"/>
-    </p:embeddedFont>
-    <p:embeddedFont>
-      <p:font typeface="Open Sans Bold" charset="1" panose="020B0806030504020204"/>
-      <p:regular r:id="rId31"/>
-    </p:embeddedFont>
-    <p:embeddedFont>
-      <p:font typeface="IBM Plex Serif" charset="1" panose="02060503050406000203"/>
-      <p:regular r:id="rId32"/>
-    </p:embeddedFont>
-    <p:embeddedFont>
-      <p:font typeface="Canva Sans" charset="1" panose="020B0503030501040103"/>
-      <p:regular r:id="rId33"/>
-    </p:embeddedFont>
-    <p:embeddedFont>
-      <p:font typeface="IBM Plex Serif Bold" charset="1" panose="02060803050406000203"/>
-      <p:regular r:id="rId34"/>
+      <p:bold r:id="rId30"/>
     </p:embeddedFont>
   </p:embeddedFontLst>
   <p:defaultTextStyle>
@@ -158,6 +155,22 @@
       </a:defRPr>
     </a:lvl9pPr>
   </p:defaultTextStyle>
+  <p:extLst>
+    <p:ext uri="{EFAFB233-063F-42B5-8137-9DF3F51BA10A}">
+      <p15:sldGuideLst xmlns:p15="http://schemas.microsoft.com/office/powerpoint/2012/main">
+        <p15:guide id="1" orient="horz" pos="2160">
+          <p15:clr>
+            <a:srgbClr val="A4A3A4"/>
+          </p15:clr>
+        </p15:guide>
+        <p15:guide id="2" pos="2880">
+          <p15:clr>
+            <a:srgbClr val="A4A3A4"/>
+          </p15:clr>
+        </p15:guide>
+      </p15:sldGuideLst>
+    </p:ext>
+  </p:extLst>
 </p:presentation>
 </file>
 
@@ -199,10 +212,9 @@
           <a:lstStyle/>
           <a:p>
             <a:r>
-              <a:rPr lang="en-US" smtClean="0"/>
+              <a:rPr lang="en-US"/>
               <a:t>Click to edit Master title style</a:t>
             </a:r>
-            <a:endParaRPr lang="en-US"/>
           </a:p>
         </p:txBody>
       </p:sp>
@@ -318,10 +330,9 @@
           </a:lstStyle>
           <a:p>
             <a:r>
-              <a:rPr lang="en-US" smtClean="0"/>
+              <a:rPr lang="en-US"/>
               <a:t>Click to edit Master subtitle style</a:t>
             </a:r>
-            <a:endParaRPr lang="en-US"/>
           </a:p>
         </p:txBody>
       </p:sp>
@@ -343,7 +354,7 @@
             <a:fld id="{1D8BD707-D9CF-40AE-B4C6-C98DA3205C09}" type="datetimeFigureOut">
               <a:rPr lang="en-US" smtClean="0"/>
               <a:pPr/>
-              <a:t>8/1/2011</a:t>
+              <a:t>4/29/2026</a:t>
             </a:fld>
             <a:endParaRPr lang="en-US"/>
           </a:p>
@@ -433,10 +444,9 @@
           <a:lstStyle/>
           <a:p>
             <a:r>
-              <a:rPr lang="en-US" smtClean="0"/>
+              <a:rPr lang="en-US"/>
               <a:t>Click to edit Master title style</a:t>
             </a:r>
-            <a:endParaRPr lang="en-US"/>
           </a:p>
         </p:txBody>
       </p:sp>
@@ -457,38 +467,37 @@
           <a:p>
             <a:pPr lvl="0"/>
             <a:r>
-              <a:rPr lang="en-US" smtClean="0"/>
+              <a:rPr lang="en-US"/>
               <a:t>Click to edit Master text styles</a:t>
             </a:r>
           </a:p>
           <a:p>
             <a:pPr lvl="1"/>
             <a:r>
-              <a:rPr lang="en-US" smtClean="0"/>
+              <a:rPr lang="en-US"/>
               <a:t>Second level</a:t>
             </a:r>
           </a:p>
           <a:p>
             <a:pPr lvl="2"/>
             <a:r>
-              <a:rPr lang="en-US" smtClean="0"/>
+              <a:rPr lang="en-US"/>
               <a:t>Third level</a:t>
             </a:r>
           </a:p>
           <a:p>
             <a:pPr lvl="3"/>
             <a:r>
-              <a:rPr lang="en-US" smtClean="0"/>
+              <a:rPr lang="en-US"/>
               <a:t>Fourth level</a:t>
             </a:r>
           </a:p>
           <a:p>
             <a:pPr lvl="4"/>
             <a:r>
-              <a:rPr lang="en-US" smtClean="0"/>
+              <a:rPr lang="en-US"/>
               <a:t>Fifth level</a:t>
             </a:r>
-            <a:endParaRPr lang="en-US"/>
           </a:p>
         </p:txBody>
       </p:sp>
@@ -510,7 +519,7 @@
             <a:fld id="{1D8BD707-D9CF-40AE-B4C6-C98DA3205C09}" type="datetimeFigureOut">
               <a:rPr lang="en-US" smtClean="0"/>
               <a:pPr/>
-              <a:t>8/1/2011</a:t>
+              <a:t>4/29/2026</a:t>
             </a:fld>
             <a:endParaRPr lang="en-US"/>
           </a:p>
@@ -605,10 +614,9 @@
           <a:lstStyle/>
           <a:p>
             <a:r>
-              <a:rPr lang="en-US" smtClean="0"/>
+              <a:rPr lang="en-US"/>
               <a:t>Click to edit Master title style</a:t>
             </a:r>
-            <a:endParaRPr lang="en-US"/>
           </a:p>
         </p:txBody>
       </p:sp>
@@ -634,38 +642,37 @@
           <a:p>
             <a:pPr lvl="0"/>
             <a:r>
-              <a:rPr lang="en-US" smtClean="0"/>
+              <a:rPr lang="en-US"/>
               <a:t>Click to edit Master text styles</a:t>
             </a:r>
           </a:p>
           <a:p>
             <a:pPr lvl="1"/>
             <a:r>
-              <a:rPr lang="en-US" smtClean="0"/>
+              <a:rPr lang="en-US"/>
               <a:t>Second level</a:t>
             </a:r>
           </a:p>
           <a:p>
             <a:pPr lvl="2"/>
             <a:r>
-              <a:rPr lang="en-US" smtClean="0"/>
+              <a:rPr lang="en-US"/>
               <a:t>Third level</a:t>
             </a:r>
           </a:p>
           <a:p>
             <a:pPr lvl="3"/>
             <a:r>
-              <a:rPr lang="en-US" smtClean="0"/>
+              <a:rPr lang="en-US"/>
               <a:t>Fourth level</a:t>
             </a:r>
           </a:p>
           <a:p>
             <a:pPr lvl="4"/>
             <a:r>
-              <a:rPr lang="en-US" smtClean="0"/>
+              <a:rPr lang="en-US"/>
               <a:t>Fifth level</a:t>
             </a:r>
-            <a:endParaRPr lang="en-US"/>
           </a:p>
         </p:txBody>
       </p:sp>
@@ -687,7 +694,7 @@
             <a:fld id="{1D8BD707-D9CF-40AE-B4C6-C98DA3205C09}" type="datetimeFigureOut">
               <a:rPr lang="en-US" smtClean="0"/>
               <a:pPr/>
-              <a:t>8/1/2011</a:t>
+              <a:t>4/29/2026</a:t>
             </a:fld>
             <a:endParaRPr lang="en-US"/>
           </a:p>
@@ -777,10 +784,9 @@
           <a:lstStyle/>
           <a:p>
             <a:r>
-              <a:rPr lang="en-US" smtClean="0"/>
+              <a:rPr lang="en-US"/>
               <a:t>Click to edit Master title style</a:t>
             </a:r>
-            <a:endParaRPr lang="en-US"/>
           </a:p>
         </p:txBody>
       </p:sp>
@@ -801,38 +807,37 @@
           <a:p>
             <a:pPr lvl="0"/>
             <a:r>
-              <a:rPr lang="en-US" smtClean="0"/>
+              <a:rPr lang="en-US"/>
               <a:t>Click to edit Master text styles</a:t>
             </a:r>
           </a:p>
           <a:p>
             <a:pPr lvl="1"/>
             <a:r>
-              <a:rPr lang="en-US" smtClean="0"/>
+              <a:rPr lang="en-US"/>
               <a:t>Second level</a:t>
             </a:r>
           </a:p>
           <a:p>
             <a:pPr lvl="2"/>
             <a:r>
-              <a:rPr lang="en-US" smtClean="0"/>
+              <a:rPr lang="en-US"/>
               <a:t>Third level</a:t>
             </a:r>
           </a:p>
           <a:p>
             <a:pPr lvl="3"/>
             <a:r>
-              <a:rPr lang="en-US" smtClean="0"/>
+              <a:rPr lang="en-US"/>
               <a:t>Fourth level</a:t>
             </a:r>
           </a:p>
           <a:p>
             <a:pPr lvl="4"/>
             <a:r>
-              <a:rPr lang="en-US" smtClean="0"/>
+              <a:rPr lang="en-US"/>
               <a:t>Fifth level</a:t>
             </a:r>
-            <a:endParaRPr lang="en-US"/>
           </a:p>
         </p:txBody>
       </p:sp>
@@ -854,7 +859,7 @@
             <a:fld id="{1D8BD707-D9CF-40AE-B4C6-C98DA3205C09}" type="datetimeFigureOut">
               <a:rPr lang="en-US" smtClean="0"/>
               <a:pPr/>
-              <a:t>8/1/2011</a:t>
+              <a:t>4/29/2026</a:t>
             </a:fld>
             <a:endParaRPr lang="en-US"/>
           </a:p>
@@ -953,10 +958,9 @@
           </a:lstStyle>
           <a:p>
             <a:r>
-              <a:rPr lang="en-US" smtClean="0"/>
+              <a:rPr lang="en-US"/>
               <a:t>Click to edit Master title style</a:t>
             </a:r>
-            <a:endParaRPr lang="en-US"/>
           </a:p>
         </p:txBody>
       </p:sp>
@@ -1073,7 +1077,7 @@
           <a:p>
             <a:pPr lvl="0"/>
             <a:r>
-              <a:rPr lang="en-US" smtClean="0"/>
+              <a:rPr lang="en-US"/>
               <a:t>Click to edit Master text styles</a:t>
             </a:r>
           </a:p>
@@ -1097,7 +1101,7 @@
             <a:fld id="{1D8BD707-D9CF-40AE-B4C6-C98DA3205C09}" type="datetimeFigureOut">
               <a:rPr lang="en-US" smtClean="0"/>
               <a:pPr/>
-              <a:t>8/1/2011</a:t>
+              <a:t>4/29/2026</a:t>
             </a:fld>
             <a:endParaRPr lang="en-US"/>
           </a:p>
@@ -1187,10 +1191,9 @@
           <a:lstStyle/>
           <a:p>
             <a:r>
-              <a:rPr lang="en-US" smtClean="0"/>
+              <a:rPr lang="en-US"/>
               <a:t>Click to edit Master title style</a:t>
             </a:r>
-            <a:endParaRPr lang="en-US"/>
           </a:p>
         </p:txBody>
       </p:sp>
@@ -1244,38 +1247,37 @@
           <a:p>
             <a:pPr lvl="0"/>
             <a:r>
-              <a:rPr lang="en-US" smtClean="0"/>
+              <a:rPr lang="en-US"/>
               <a:t>Click to edit Master text styles</a:t>
             </a:r>
           </a:p>
           <a:p>
             <a:pPr lvl="1"/>
             <a:r>
-              <a:rPr lang="en-US" smtClean="0"/>
+              <a:rPr lang="en-US"/>
               <a:t>Second level</a:t>
             </a:r>
           </a:p>
           <a:p>
             <a:pPr lvl="2"/>
             <a:r>
-              <a:rPr lang="en-US" smtClean="0"/>
+              <a:rPr lang="en-US"/>
               <a:t>Third level</a:t>
             </a:r>
           </a:p>
           <a:p>
             <a:pPr lvl="3"/>
             <a:r>
-              <a:rPr lang="en-US" smtClean="0"/>
+              <a:rPr lang="en-US"/>
               <a:t>Fourth level</a:t>
             </a:r>
           </a:p>
           <a:p>
             <a:pPr lvl="4"/>
             <a:r>
-              <a:rPr lang="en-US" smtClean="0"/>
+              <a:rPr lang="en-US"/>
               <a:t>Fifth level</a:t>
             </a:r>
-            <a:endParaRPr lang="en-US"/>
           </a:p>
         </p:txBody>
       </p:sp>
@@ -1329,38 +1331,37 @@
           <a:p>
             <a:pPr lvl="0"/>
             <a:r>
-              <a:rPr lang="en-US" smtClean="0"/>
+              <a:rPr lang="en-US"/>
               <a:t>Click to edit Master text styles</a:t>
             </a:r>
           </a:p>
           <a:p>
             <a:pPr lvl="1"/>
             <a:r>
-              <a:rPr lang="en-US" smtClean="0"/>
+              <a:rPr lang="en-US"/>
               <a:t>Second level</a:t>
             </a:r>
           </a:p>
           <a:p>
             <a:pPr lvl="2"/>
             <a:r>
-              <a:rPr lang="en-US" smtClean="0"/>
+              <a:rPr lang="en-US"/>
               <a:t>Third level</a:t>
             </a:r>
           </a:p>
           <a:p>
             <a:pPr lvl="3"/>
             <a:r>
-              <a:rPr lang="en-US" smtClean="0"/>
+              <a:rPr lang="en-US"/>
               <a:t>Fourth level</a:t>
             </a:r>
           </a:p>
           <a:p>
             <a:pPr lvl="4"/>
             <a:r>
-              <a:rPr lang="en-US" smtClean="0"/>
+              <a:rPr lang="en-US"/>
               <a:t>Fifth level</a:t>
             </a:r>
-            <a:endParaRPr lang="en-US"/>
           </a:p>
         </p:txBody>
       </p:sp>
@@ -1382,7 +1383,7 @@
             <a:fld id="{1D8BD707-D9CF-40AE-B4C6-C98DA3205C09}" type="datetimeFigureOut">
               <a:rPr lang="en-US" smtClean="0"/>
               <a:pPr/>
-              <a:t>8/1/2011</a:t>
+              <a:t>4/29/2026</a:t>
             </a:fld>
             <a:endParaRPr lang="en-US"/>
           </a:p>
@@ -1476,10 +1477,9 @@
           </a:lstStyle>
           <a:p>
             <a:r>
-              <a:rPr lang="en-US" smtClean="0"/>
+              <a:rPr lang="en-US"/>
               <a:t>Click to edit Master title style</a:t>
             </a:r>
-            <a:endParaRPr lang="en-US"/>
           </a:p>
         </p:txBody>
       </p:sp>
@@ -1542,7 +1542,7 @@
           <a:p>
             <a:pPr lvl="0"/>
             <a:r>
-              <a:rPr lang="en-US" smtClean="0"/>
+              <a:rPr lang="en-US"/>
               <a:t>Click to edit Master text styles</a:t>
             </a:r>
           </a:p>
@@ -1598,38 +1598,37 @@
           <a:p>
             <a:pPr lvl="0"/>
             <a:r>
-              <a:rPr lang="en-US" smtClean="0"/>
+              <a:rPr lang="en-US"/>
               <a:t>Click to edit Master text styles</a:t>
             </a:r>
           </a:p>
           <a:p>
             <a:pPr lvl="1"/>
             <a:r>
-              <a:rPr lang="en-US" smtClean="0"/>
+              <a:rPr lang="en-US"/>
               <a:t>Second level</a:t>
             </a:r>
           </a:p>
           <a:p>
             <a:pPr lvl="2"/>
             <a:r>
-              <a:rPr lang="en-US" smtClean="0"/>
+              <a:rPr lang="en-US"/>
               <a:t>Third level</a:t>
             </a:r>
           </a:p>
           <a:p>
             <a:pPr lvl="3"/>
             <a:r>
-              <a:rPr lang="en-US" smtClean="0"/>
+              <a:rPr lang="en-US"/>
               <a:t>Fourth level</a:t>
             </a:r>
           </a:p>
           <a:p>
             <a:pPr lvl="4"/>
             <a:r>
-              <a:rPr lang="en-US" smtClean="0"/>
+              <a:rPr lang="en-US"/>
               <a:t>Fifth level</a:t>
             </a:r>
-            <a:endParaRPr lang="en-US"/>
           </a:p>
         </p:txBody>
       </p:sp>
@@ -1692,7 +1691,7 @@
           <a:p>
             <a:pPr lvl="0"/>
             <a:r>
-              <a:rPr lang="en-US" smtClean="0"/>
+              <a:rPr lang="en-US"/>
               <a:t>Click to edit Master text styles</a:t>
             </a:r>
           </a:p>
@@ -1748,38 +1747,37 @@
           <a:p>
             <a:pPr lvl="0"/>
             <a:r>
-              <a:rPr lang="en-US" smtClean="0"/>
+              <a:rPr lang="en-US"/>
               <a:t>Click to edit Master text styles</a:t>
             </a:r>
           </a:p>
           <a:p>
             <a:pPr lvl="1"/>
             <a:r>
-              <a:rPr lang="en-US" smtClean="0"/>
+              <a:rPr lang="en-US"/>
               <a:t>Second level</a:t>
             </a:r>
           </a:p>
           <a:p>
             <a:pPr lvl="2"/>
             <a:r>
-              <a:rPr lang="en-US" smtClean="0"/>
+              <a:rPr lang="en-US"/>
               <a:t>Third level</a:t>
             </a:r>
           </a:p>
           <a:p>
             <a:pPr lvl="3"/>
             <a:r>
-              <a:rPr lang="en-US" smtClean="0"/>
+              <a:rPr lang="en-US"/>
               <a:t>Fourth level</a:t>
             </a:r>
           </a:p>
           <a:p>
             <a:pPr lvl="4"/>
             <a:r>
-              <a:rPr lang="en-US" smtClean="0"/>
+              <a:rPr lang="en-US"/>
               <a:t>Fifth level</a:t>
             </a:r>
-            <a:endParaRPr lang="en-US"/>
           </a:p>
         </p:txBody>
       </p:sp>
@@ -1801,7 +1799,7 @@
             <a:fld id="{1D8BD707-D9CF-40AE-B4C6-C98DA3205C09}" type="datetimeFigureOut">
               <a:rPr lang="en-US" smtClean="0"/>
               <a:pPr/>
-              <a:t>8/1/2011</a:t>
+              <a:t>4/29/2026</a:t>
             </a:fld>
             <a:endParaRPr lang="en-US"/>
           </a:p>
@@ -1891,10 +1889,9 @@
           <a:lstStyle/>
           <a:p>
             <a:r>
-              <a:rPr lang="en-US" smtClean="0"/>
+              <a:rPr lang="en-US"/>
               <a:t>Click to edit Master title style</a:t>
             </a:r>
-            <a:endParaRPr lang="en-US"/>
           </a:p>
         </p:txBody>
       </p:sp>
@@ -1916,7 +1913,7 @@
             <a:fld id="{1D8BD707-D9CF-40AE-B4C6-C98DA3205C09}" type="datetimeFigureOut">
               <a:rPr lang="en-US" smtClean="0"/>
               <a:pPr/>
-              <a:t>8/1/2011</a:t>
+              <a:t>4/29/2026</a:t>
             </a:fld>
             <a:endParaRPr lang="en-US"/>
           </a:p>
@@ -2008,7 +2005,7 @@
             <a:fld id="{1D8BD707-D9CF-40AE-B4C6-C98DA3205C09}" type="datetimeFigureOut">
               <a:rPr lang="en-US" smtClean="0"/>
               <a:pPr/>
-              <a:t>8/1/2011</a:t>
+              <a:t>4/29/2026</a:t>
             </a:fld>
             <a:endParaRPr lang="en-US"/>
           </a:p>
@@ -2107,10 +2104,9 @@
           </a:lstStyle>
           <a:p>
             <a:r>
-              <a:rPr lang="en-US" smtClean="0"/>
+              <a:rPr lang="en-US"/>
               <a:t>Click to edit Master title style</a:t>
             </a:r>
-            <a:endParaRPr lang="en-US"/>
           </a:p>
         </p:txBody>
       </p:sp>
@@ -2164,38 +2160,37 @@
           <a:p>
             <a:pPr lvl="0"/>
             <a:r>
-              <a:rPr lang="en-US" smtClean="0"/>
+              <a:rPr lang="en-US"/>
               <a:t>Click to edit Master text styles</a:t>
             </a:r>
           </a:p>
           <a:p>
             <a:pPr lvl="1"/>
             <a:r>
-              <a:rPr lang="en-US" smtClean="0"/>
+              <a:rPr lang="en-US"/>
               <a:t>Second level</a:t>
             </a:r>
           </a:p>
           <a:p>
             <a:pPr lvl="2"/>
             <a:r>
-              <a:rPr lang="en-US" smtClean="0"/>
+              <a:rPr lang="en-US"/>
               <a:t>Third level</a:t>
             </a:r>
           </a:p>
           <a:p>
             <a:pPr lvl="3"/>
             <a:r>
-              <a:rPr lang="en-US" smtClean="0"/>
+              <a:rPr lang="en-US"/>
               <a:t>Fourth level</a:t>
             </a:r>
           </a:p>
           <a:p>
             <a:pPr lvl="4"/>
             <a:r>
-              <a:rPr lang="en-US" smtClean="0"/>
+              <a:rPr lang="en-US"/>
               <a:t>Fifth level</a:t>
             </a:r>
-            <a:endParaRPr lang="en-US"/>
           </a:p>
         </p:txBody>
       </p:sp>
@@ -2258,7 +2253,7 @@
           <a:p>
             <a:pPr lvl="0"/>
             <a:r>
-              <a:rPr lang="en-US" smtClean="0"/>
+              <a:rPr lang="en-US"/>
               <a:t>Click to edit Master text styles</a:t>
             </a:r>
           </a:p>
@@ -2282,7 +2277,7 @@
             <a:fld id="{1D8BD707-D9CF-40AE-B4C6-C98DA3205C09}" type="datetimeFigureOut">
               <a:rPr lang="en-US" smtClean="0"/>
               <a:pPr/>
-              <a:t>8/1/2011</a:t>
+              <a:t>4/29/2026</a:t>
             </a:fld>
             <a:endParaRPr lang="en-US"/>
           </a:p>
@@ -2381,10 +2376,9 @@
           </a:lstStyle>
           <a:p>
             <a:r>
-              <a:rPr lang="en-US" smtClean="0"/>
+              <a:rPr lang="en-US"/>
               <a:t>Click to edit Master title style</a:t>
             </a:r>
-            <a:endParaRPr lang="en-US"/>
           </a:p>
         </p:txBody>
       </p:sp>
@@ -2508,7 +2502,7 @@
           <a:p>
             <a:pPr lvl="0"/>
             <a:r>
-              <a:rPr lang="en-US" smtClean="0"/>
+              <a:rPr lang="en-US"/>
               <a:t>Click to edit Master text styles</a:t>
             </a:r>
           </a:p>
@@ -2532,7 +2526,7 @@
             <a:fld id="{1D8BD707-D9CF-40AE-B4C6-C98DA3205C09}" type="datetimeFigureOut">
               <a:rPr lang="en-US" smtClean="0"/>
               <a:pPr/>
-              <a:t>8/1/2011</a:t>
+              <a:t>4/29/2026</a:t>
             </a:fld>
             <a:endParaRPr lang="en-US"/>
           </a:p>
@@ -2637,10 +2631,9 @@
           <a:lstStyle/>
           <a:p>
             <a:r>
-              <a:rPr lang="en-US" smtClean="0"/>
+              <a:rPr lang="en-US"/>
               <a:t>Click to edit Master title style</a:t>
             </a:r>
-            <a:endParaRPr lang="en-US"/>
           </a:p>
         </p:txBody>
       </p:sp>
@@ -2671,38 +2664,37 @@
           <a:p>
             <a:pPr lvl="0"/>
             <a:r>
-              <a:rPr lang="en-US" smtClean="0"/>
+              <a:rPr lang="en-US"/>
               <a:t>Click to edit Master text styles</a:t>
             </a:r>
           </a:p>
           <a:p>
             <a:pPr lvl="1"/>
             <a:r>
-              <a:rPr lang="en-US" smtClean="0"/>
+              <a:rPr lang="en-US"/>
               <a:t>Second level</a:t>
             </a:r>
           </a:p>
           <a:p>
             <a:pPr lvl="2"/>
             <a:r>
-              <a:rPr lang="en-US" smtClean="0"/>
+              <a:rPr lang="en-US"/>
               <a:t>Third level</a:t>
             </a:r>
           </a:p>
           <a:p>
             <a:pPr lvl="3"/>
             <a:r>
-              <a:rPr lang="en-US" smtClean="0"/>
+              <a:rPr lang="en-US"/>
               <a:t>Fourth level</a:t>
             </a:r>
           </a:p>
           <a:p>
             <a:pPr lvl="4"/>
             <a:r>
-              <a:rPr lang="en-US" smtClean="0"/>
+              <a:rPr lang="en-US"/>
               <a:t>Fifth level</a:t>
             </a:r>
-            <a:endParaRPr lang="en-US"/>
           </a:p>
         </p:txBody>
       </p:sp>
@@ -2742,7 +2734,7 @@
             <a:fld id="{1D8BD707-D9CF-40AE-B4C6-C98DA3205C09}" type="datetimeFigureOut">
               <a:rPr lang="en-US" smtClean="0"/>
               <a:pPr/>
-              <a:t>8/1/2011</a:t>
+              <a:t>4/29/2026</a:t>
             </a:fld>
             <a:endParaRPr lang="en-US"/>
           </a:p>
@@ -3097,7 +3089,7 @@
 </file>
 
 <file path=ppt/slides/slide1.xml><?xml version="1.0" encoding="utf-8"?>
-<p:sld xmlns:p="http://schemas.openxmlformats.org/presentationml/2006/main" xmlns:a="http://schemas.openxmlformats.org/drawingml/2006/main" xmlns:r="http://schemas.openxmlformats.org/officeDocument/2006/relationships">
+<p:sld xmlns:a="http://schemas.openxmlformats.org/drawingml/2006/main" xmlns:r="http://schemas.openxmlformats.org/officeDocument/2006/relationships" xmlns:p="http://schemas.openxmlformats.org/presentationml/2006/main">
   <p:cSld>
     <p:spTree>
       <p:nvGrpSpPr>
@@ -3115,12 +3107,12 @@
       </p:grpSpPr>
       <p:sp>
         <p:nvSpPr>
-          <p:cNvPr name="Freeform 2" id="2"/>
+          <p:cNvPr id="2" name="Freeform 2"/>
           <p:cNvSpPr/>
           <p:nvPr/>
         </p:nvSpPr>
         <p:spPr>
-          <a:xfrm flipH="false" flipV="false" rot="0">
+          <a:xfrm>
             <a:off x="0" y="0"/>
             <a:ext cx="18288000" cy="10287000"/>
           </a:xfrm>
@@ -3129,9 +3121,9 @@
             <a:gdLst/>
             <a:ahLst/>
             <a:cxnLst/>
-            <a:rect r="r" b="b" t="t" l="l"/>
+            <a:rect l="l" t="t" r="r" b="b"/>
             <a:pathLst>
-              <a:path h="10287000" w="18288000">
+              <a:path w="18288000" h="10287000">
                 <a:moveTo>
                   <a:pt x="0" y="0"/>
                 </a:moveTo>
@@ -3152,27 +3144,27 @@
             </a:pathLst>
           </a:custGeom>
           <a:blipFill>
-            <a:blip r:embed="rId2">
+            <a:blip>
               <a:extLst>
                 <a:ext uri="{96DAC541-7B7A-43D3-8B79-37D633B846F1}">
-                  <asvg:svgBlip xmlns:asvg="http://schemas.microsoft.com/office/drawing/2016/SVG/main" r:embed="rId3"/>
+                  <asvg:svgBlip xmlns:asvg="http://schemas.microsoft.com/office/drawing/2016/SVG/main" r:embed="rId2"/>
                 </a:ext>
               </a:extLst>
             </a:blip>
             <a:stretch>
-              <a:fillRect l="0" t="0" r="0" b="0"/>
+              <a:fillRect/>
             </a:stretch>
           </a:blipFill>
         </p:spPr>
       </p:sp>
       <p:grpSp>
         <p:nvGrpSpPr>
-          <p:cNvPr name="Group 3" id="3"/>
+          <p:cNvPr id="3" name="Group 3"/>
           <p:cNvGrpSpPr/>
           <p:nvPr/>
         </p:nvGrpSpPr>
         <p:grpSpPr>
-          <a:xfrm rot="0">
+          <a:xfrm>
             <a:off x="0" y="3029214"/>
             <a:ext cx="18288000" cy="6158912"/>
             <a:chOff x="0" y="0"/>
@@ -3181,12 +3173,12 @@
         </p:grpSpPr>
         <p:sp>
           <p:nvSpPr>
-            <p:cNvPr name="Freeform 4" id="4"/>
+            <p:cNvPr id="4" name="Freeform 4"/>
             <p:cNvSpPr/>
             <p:nvPr/>
           </p:nvSpPr>
           <p:spPr>
-            <a:xfrm flipH="false" flipV="false" rot="0">
+            <a:xfrm>
               <a:off x="0" y="0"/>
               <a:ext cx="24384000" cy="8211820"/>
             </a:xfrm>
@@ -3195,9 +3187,9 @@
               <a:gdLst/>
               <a:ahLst/>
               <a:cxnLst/>
-              <a:rect r="r" b="b" t="t" l="l"/>
+              <a:rect l="l" t="t" r="r" b="b"/>
               <a:pathLst>
-                <a:path h="8211820" w="24384000">
+                <a:path w="24384000" h="8211820">
                   <a:moveTo>
                     <a:pt x="0" y="0"/>
                   </a:moveTo>
@@ -3214,7 +3206,7 @@
                 </a:path>
               </a:pathLst>
             </a:custGeom>
-            <a:gradFill rotWithShape="true">
+            <a:gradFill rotWithShape="1">
               <a:gsLst>
                 <a:gs pos="0">
                   <a:srgbClr val="DFDBD5">
@@ -3234,12 +3226,12 @@
       </p:grpSp>
       <p:sp>
         <p:nvSpPr>
-          <p:cNvPr name="Freeform 5" id="5"/>
+          <p:cNvPr id="5" name="Freeform 5"/>
           <p:cNvSpPr/>
           <p:nvPr/>
         </p:nvSpPr>
         <p:spPr>
-          <a:xfrm flipH="false" flipV="false" rot="0">
+          <a:xfrm>
             <a:off x="0" y="9189720"/>
             <a:ext cx="18288000" cy="1114425"/>
           </a:xfrm>
@@ -3248,9 +3240,9 @@
             <a:gdLst/>
             <a:ahLst/>
             <a:cxnLst/>
-            <a:rect r="r" b="b" t="t" l="l"/>
+            <a:rect l="l" t="t" r="r" b="b"/>
             <a:pathLst>
-              <a:path h="1114425" w="18288000">
+              <a:path w="18288000" h="1114425">
                 <a:moveTo>
                   <a:pt x="0" y="0"/>
                 </a:moveTo>
@@ -3271,16 +3263,16 @@
             </a:pathLst>
           </a:custGeom>
           <a:blipFill>
-            <a:blip r:embed="rId4"/>
+            <a:blip r:embed="rId3"/>
             <a:stretch>
-              <a:fillRect l="0" t="-1538" r="0" b="1537"/>
+              <a:fillRect t="-1538" b="1537"/>
             </a:stretch>
           </a:blipFill>
         </p:spPr>
       </p:sp>
       <p:sp>
         <p:nvSpPr>
-          <p:cNvPr name="AutoShape 6" id="6"/>
+          <p:cNvPr id="6" name="AutoShape 6"/>
           <p:cNvSpPr/>
           <p:nvPr/>
         </p:nvSpPr>
@@ -3292,21 +3284,21 @@
           <a:prstGeom prst="line">
             <a:avLst/>
           </a:prstGeom>
-          <a:ln cap="rnd" w="9525">
+          <a:ln w="9525" cap="rnd">
             <a:solidFill>
               <a:srgbClr val="000001">
                 <a:alpha val="19608"/>
               </a:srgbClr>
             </a:solidFill>
             <a:prstDash val="solid"/>
-            <a:headEnd type="none" len="sm" w="sm"/>
-            <a:tailEnd type="none" len="sm" w="sm"/>
+            <a:headEnd type="none" w="sm" len="sm"/>
+            <a:tailEnd type="none" w="sm" len="sm"/>
           </a:ln>
         </p:spPr>
       </p:sp>
       <p:sp>
         <p:nvSpPr>
-          <p:cNvPr name="AutoShape 7" id="7"/>
+          <p:cNvPr id="7" name="AutoShape 7"/>
           <p:cNvSpPr/>
           <p:nvPr/>
         </p:nvSpPr>
@@ -3318,24 +3310,24 @@
           <a:prstGeom prst="line">
             <a:avLst/>
           </a:prstGeom>
-          <a:ln cap="rnd" w="28575">
+          <a:ln w="28575" cap="rnd">
             <a:solidFill>
               <a:srgbClr val="B71E42"/>
             </a:solidFill>
             <a:prstDash val="solid"/>
-            <a:headEnd type="none" len="sm" w="sm"/>
-            <a:tailEnd type="none" len="sm" w="sm"/>
+            <a:headEnd type="none" w="sm" len="sm"/>
+            <a:tailEnd type="none" w="sm" len="sm"/>
           </a:ln>
         </p:spPr>
       </p:sp>
       <p:grpSp>
         <p:nvGrpSpPr>
-          <p:cNvPr name="Group 8" id="8"/>
+          <p:cNvPr id="8" name="Group 8"/>
           <p:cNvGrpSpPr/>
           <p:nvPr/>
         </p:nvGrpSpPr>
         <p:grpSpPr>
-          <a:xfrm rot="0">
+          <a:xfrm>
             <a:off x="1940482" y="788637"/>
             <a:ext cx="16849287" cy="1466433"/>
             <a:chOff x="0" y="0"/>
@@ -3344,12 +3336,12 @@
         </p:grpSpPr>
         <p:sp>
           <p:nvSpPr>
-            <p:cNvPr name="Freeform 9" id="9"/>
+            <p:cNvPr id="9" name="Freeform 9"/>
             <p:cNvSpPr/>
             <p:nvPr/>
           </p:nvSpPr>
           <p:spPr>
-            <a:xfrm flipH="false" flipV="false" rot="0">
+            <a:xfrm>
               <a:off x="0" y="0"/>
               <a:ext cx="22465716" cy="1955244"/>
             </a:xfrm>
@@ -3358,9 +3350,9 @@
               <a:gdLst/>
               <a:ahLst/>
               <a:cxnLst/>
-              <a:rect r="r" b="b" t="t" l="l"/>
+              <a:rect l="l" t="t" r="r" b="b"/>
               <a:pathLst>
-                <a:path h="1955244" w="22465716">
+                <a:path w="22465716" h="1955244">
                   <a:moveTo>
                     <a:pt x="0" y="0"/>
                   </a:moveTo>
@@ -3386,8 +3378,8 @@
         </p:sp>
         <p:sp>
           <p:nvSpPr>
-            <p:cNvPr name="TextBox 10" id="10"/>
-            <p:cNvSpPr txBox="true"/>
+            <p:cNvPr id="10" name="TextBox 10"/>
+            <p:cNvSpPr txBox="1"/>
             <p:nvPr/>
           </p:nvSpPr>
           <p:spPr>
@@ -3400,7 +3392,7 @@
             </a:prstGeom>
           </p:spPr>
           <p:txBody>
-            <a:bodyPr anchor="b" rtlCol="false" tIns="0" lIns="0" bIns="0" rIns="0"/>
+            <a:bodyPr lIns="0" tIns="0" rIns="0" bIns="0" rtlCol="0" anchor="b"/>
             <a:lstStyle/>
             <a:p>
               <a:pPr algn="ctr">
@@ -3409,7 +3401,7 @@
                 </a:lnSpc>
               </a:pPr>
               <a:r>
-                <a:rPr lang="en-US" sz="4800" b="true">
+                <a:rPr lang="en-US" sz="4800" b="1">
                   <a:solidFill>
                     <a:srgbClr val="000000"/>
                   </a:solidFill>
@@ -3428,7 +3420,7 @@
                 </a:lnSpc>
               </a:pPr>
               <a:r>
-                <a:rPr lang="en-US" sz="4800" b="true">
+                <a:rPr lang="en-US" sz="4800" b="1">
                   <a:solidFill>
                     <a:srgbClr val="000000"/>
                   </a:solidFill>
@@ -3445,12 +3437,12 @@
       </p:grpSp>
       <p:grpSp>
         <p:nvGrpSpPr>
-          <p:cNvPr name="Group 11" id="11"/>
+          <p:cNvPr id="11" name="Group 11"/>
           <p:cNvGrpSpPr/>
           <p:nvPr/>
         </p:nvGrpSpPr>
         <p:grpSpPr>
-          <a:xfrm rot="0">
+          <a:xfrm>
             <a:off x="795274" y="3488696"/>
             <a:ext cx="16951726" cy="2093214"/>
             <a:chOff x="0" y="0"/>
@@ -3459,12 +3451,12 @@
         </p:grpSpPr>
         <p:sp>
           <p:nvSpPr>
-            <p:cNvPr name="Freeform 12" id="12"/>
+            <p:cNvPr id="12" name="Freeform 12"/>
             <p:cNvSpPr/>
             <p:nvPr/>
           </p:nvSpPr>
           <p:spPr>
-            <a:xfrm flipH="false" flipV="false" rot="0">
+            <a:xfrm>
               <a:off x="0" y="0"/>
               <a:ext cx="22602303" cy="2790952"/>
             </a:xfrm>
@@ -3473,9 +3465,9 @@
               <a:gdLst/>
               <a:ahLst/>
               <a:cxnLst/>
-              <a:rect r="r" b="b" t="t" l="l"/>
+              <a:rect l="l" t="t" r="r" b="b"/>
               <a:pathLst>
-                <a:path h="2790952" w="22602303">
+                <a:path w="22602303" h="2790952">
                   <a:moveTo>
                     <a:pt x="0" y="0"/>
                   </a:moveTo>
@@ -3501,8 +3493,8 @@
         </p:sp>
         <p:sp>
           <p:nvSpPr>
-            <p:cNvPr name="TextBox 13" id="13"/>
-            <p:cNvSpPr txBox="true"/>
+            <p:cNvPr id="13" name="TextBox 13"/>
+            <p:cNvSpPr txBox="1"/>
             <p:nvPr/>
           </p:nvSpPr>
           <p:spPr>
@@ -3515,7 +3507,7 @@
             </a:prstGeom>
           </p:spPr>
           <p:txBody>
-            <a:bodyPr anchor="t" rtlCol="false" tIns="0" lIns="0" bIns="0" rIns="0"/>
+            <a:bodyPr lIns="0" tIns="0" rIns="0" bIns="0" rtlCol="0" anchor="t"/>
             <a:lstStyle/>
             <a:p>
               <a:pPr algn="ctr">
@@ -3524,7 +3516,7 @@
                 </a:lnSpc>
               </a:pPr>
               <a:r>
-                <a:rPr lang="en-US" sz="4200" b="true">
+                <a:rPr lang="en-US" sz="4200" b="1">
                   <a:solidFill>
                     <a:srgbClr val="000000"/>
                   </a:solidFill>
@@ -3543,7 +3535,7 @@
                 </a:lnSpc>
               </a:pPr>
               <a:r>
-                <a:rPr lang="en-US" sz="4200" b="true">
+                <a:rPr lang="en-US" sz="4200" b="1">
                   <a:solidFill>
                     <a:srgbClr val="000000"/>
                   </a:solidFill>
@@ -3561,18 +3553,27 @@
                   <a:spcPts val="5040"/>
                 </a:lnSpc>
               </a:pPr>
+              <a:endParaRPr lang="en-US" sz="4200" b="1">
+                <a:solidFill>
+                  <a:srgbClr val="000000"/>
+                </a:solidFill>
+                <a:latin typeface="Times New Roman Bold"/>
+                <a:ea typeface="Times New Roman Bold"/>
+                <a:cs typeface="Times New Roman Bold"/>
+                <a:sym typeface="Times New Roman Bold"/>
+              </a:endParaRPr>
             </a:p>
           </p:txBody>
         </p:sp>
       </p:grpSp>
       <p:grpSp>
         <p:nvGrpSpPr>
-          <p:cNvPr name="Group 14" id="14"/>
+          <p:cNvPr id="14" name="Group 14"/>
           <p:cNvGrpSpPr/>
           <p:nvPr/>
         </p:nvGrpSpPr>
         <p:grpSpPr>
-          <a:xfrm rot="0">
+          <a:xfrm>
             <a:off x="795274" y="5958531"/>
             <a:ext cx="7520985" cy="1854803"/>
             <a:chOff x="0" y="0"/>
@@ -3581,12 +3582,12 @@
         </p:grpSpPr>
         <p:sp>
           <p:nvSpPr>
-            <p:cNvPr name="Freeform 15" id="15"/>
+            <p:cNvPr id="15" name="Freeform 15"/>
             <p:cNvSpPr/>
             <p:nvPr/>
           </p:nvSpPr>
           <p:spPr>
-            <a:xfrm flipH="false" flipV="false" rot="0">
+            <a:xfrm>
               <a:off x="0" y="0"/>
               <a:ext cx="10027980" cy="2473071"/>
             </a:xfrm>
@@ -3595,9 +3596,9 @@
               <a:gdLst/>
               <a:ahLst/>
               <a:cxnLst/>
-              <a:rect r="r" b="b" t="t" l="l"/>
+              <a:rect l="l" t="t" r="r" b="b"/>
               <a:pathLst>
-                <a:path h="2473071" w="10027980">
+                <a:path w="10027980" h="2473071">
                   <a:moveTo>
                     <a:pt x="0" y="0"/>
                   </a:moveTo>
@@ -3623,8 +3624,8 @@
         </p:sp>
         <p:sp>
           <p:nvSpPr>
-            <p:cNvPr name="TextBox 16" id="16"/>
-            <p:cNvSpPr txBox="true"/>
+            <p:cNvPr id="16" name="TextBox 16"/>
+            <p:cNvSpPr txBox="1"/>
             <p:nvPr/>
           </p:nvSpPr>
           <p:spPr>
@@ -3637,7 +3638,7 @@
             </a:prstGeom>
           </p:spPr>
           <p:txBody>
-            <a:bodyPr anchor="t" rtlCol="false" tIns="0" lIns="0" bIns="0" rIns="0"/>
+            <a:bodyPr lIns="0" tIns="0" rIns="0" bIns="0" rtlCol="0" anchor="t"/>
             <a:lstStyle/>
             <a:p>
               <a:pPr algn="l">
@@ -3646,7 +3647,7 @@
                 </a:lnSpc>
               </a:pPr>
               <a:r>
-                <a:rPr lang="en-US" sz="3000" b="true">
+                <a:rPr lang="en-US" sz="3000" b="1">
                   <a:solidFill>
                     <a:srgbClr val="000000"/>
                   </a:solidFill>
@@ -3677,7 +3678,7 @@
                 <a:t>Miss. Talat Siddiqui</a:t>
               </a:r>
               <a:r>
-                <a:rPr lang="en-US" b="true" sz="3000">
+                <a:rPr lang="en-US" sz="3000" b="1">
                   <a:solidFill>
                     <a:srgbClr val="000000"/>
                   </a:solidFill>
@@ -3727,7 +3728,7 @@
                 </a:lnSpc>
               </a:pPr>
               <a:r>
-                <a:rPr lang="en-US" b="true" sz="2700">
+                <a:rPr lang="en-US" sz="2700" b="1">
                   <a:solidFill>
                     <a:srgbClr val="000000"/>
                   </a:solidFill>
@@ -3744,12 +3745,12 @@
       </p:grpSp>
       <p:grpSp>
         <p:nvGrpSpPr>
-          <p:cNvPr name="Group 17" id="17"/>
+          <p:cNvPr id="17" name="Group 17"/>
           <p:cNvGrpSpPr/>
           <p:nvPr/>
         </p:nvGrpSpPr>
         <p:grpSpPr>
-          <a:xfrm rot="0">
+          <a:xfrm>
             <a:off x="13036491" y="6212446"/>
             <a:ext cx="4456234" cy="1592744"/>
             <a:chOff x="0" y="0"/>
@@ -3758,12 +3759,12 @@
         </p:grpSpPr>
         <p:sp>
           <p:nvSpPr>
-            <p:cNvPr name="Freeform 18" id="18"/>
+            <p:cNvPr id="18" name="Freeform 18"/>
             <p:cNvSpPr/>
             <p:nvPr/>
           </p:nvSpPr>
           <p:spPr>
-            <a:xfrm flipH="false" flipV="false" rot="0">
+            <a:xfrm>
               <a:off x="0" y="0"/>
               <a:ext cx="5941646" cy="2123658"/>
             </a:xfrm>
@@ -3772,9 +3773,9 @@
               <a:gdLst/>
               <a:ahLst/>
               <a:cxnLst/>
-              <a:rect r="r" b="b" t="t" l="l"/>
+              <a:rect l="l" t="t" r="r" b="b"/>
               <a:pathLst>
-                <a:path h="2123658" w="5941646">
+                <a:path w="5941646" h="2123658">
                   <a:moveTo>
                     <a:pt x="0" y="0"/>
                   </a:moveTo>
@@ -3800,8 +3801,8 @@
         </p:sp>
         <p:sp>
           <p:nvSpPr>
-            <p:cNvPr name="TextBox 19" id="19"/>
-            <p:cNvSpPr txBox="true"/>
+            <p:cNvPr id="19" name="TextBox 19"/>
+            <p:cNvSpPr txBox="1"/>
             <p:nvPr/>
           </p:nvSpPr>
           <p:spPr>
@@ -3814,7 +3815,7 @@
             </a:prstGeom>
           </p:spPr>
           <p:txBody>
-            <a:bodyPr anchor="t" rtlCol="false" tIns="0" lIns="0" bIns="0" rIns="0"/>
+            <a:bodyPr lIns="0" tIns="0" rIns="0" bIns="0" rtlCol="0" anchor="t"/>
             <a:lstStyle/>
             <a:p>
               <a:pPr algn="l">
@@ -3823,7 +3824,7 @@
                 </a:lnSpc>
               </a:pPr>
               <a:r>
-                <a:rPr lang="en-US" sz="3150" b="true">
+                <a:rPr lang="en-US" sz="3150" b="1">
                   <a:solidFill>
                     <a:srgbClr val="000000"/>
                   </a:solidFill>
@@ -3860,18 +3861,27 @@
                   <a:spcPts val="3779"/>
                 </a:lnSpc>
               </a:pPr>
+              <a:endParaRPr lang="en-US" sz="3150">
+                <a:solidFill>
+                  <a:srgbClr val="000000"/>
+                </a:solidFill>
+                <a:latin typeface="Times New Roman"/>
+                <a:ea typeface="Times New Roman"/>
+                <a:cs typeface="Times New Roman"/>
+                <a:sym typeface="Times New Roman"/>
+              </a:endParaRPr>
             </a:p>
           </p:txBody>
         </p:sp>
       </p:grpSp>
       <p:sp>
         <p:nvSpPr>
-          <p:cNvPr name="Freeform 20" id="20"/>
+          <p:cNvPr id="20" name="Freeform 20"/>
           <p:cNvSpPr/>
           <p:nvPr/>
         </p:nvSpPr>
         <p:spPr>
-          <a:xfrm flipH="false" flipV="false" rot="0">
+          <a:xfrm>
             <a:off x="1346433" y="734673"/>
             <a:ext cx="1879132" cy="1746258"/>
           </a:xfrm>
@@ -3880,9 +3890,9 @@
             <a:gdLst/>
             <a:ahLst/>
             <a:cxnLst/>
-            <a:rect r="r" b="b" t="t" l="l"/>
+            <a:rect l="l" t="t" r="r" b="b"/>
             <a:pathLst>
-              <a:path h="1746258" w="1879132">
+              <a:path w="1879132" h="1746258">
                 <a:moveTo>
                   <a:pt x="0" y="0"/>
                 </a:moveTo>
@@ -3903,9 +3913,9 @@
             </a:pathLst>
           </a:custGeom>
           <a:blipFill>
-            <a:blip r:embed="rId5"/>
+            <a:blip r:embed="rId4"/>
             <a:stretch>
-              <a:fillRect l="0" t="-1549" r="0" b="-1549"/>
+              <a:fillRect t="-1549" b="-1549"/>
             </a:stretch>
           </a:blipFill>
         </p:spPr>
@@ -3919,13 +3929,14 @@
 </file>
 
 <file path=ppt/slides/slide10.xml><?xml version="1.0" encoding="utf-8"?>
-<p:sld xmlns:p="http://schemas.openxmlformats.org/presentationml/2006/main" xmlns:a="http://schemas.openxmlformats.org/drawingml/2006/main" xmlns:r="http://schemas.openxmlformats.org/officeDocument/2006/relationships">
+<p:sld xmlns:a="http://schemas.openxmlformats.org/drawingml/2006/main" xmlns:r="http://schemas.openxmlformats.org/officeDocument/2006/relationships" xmlns:p="http://schemas.openxmlformats.org/presentationml/2006/main">
   <p:cSld>
     <p:bg>
       <p:bgPr>
         <a:solidFill>
           <a:srgbClr val="E8E6E3"/>
         </a:solidFill>
+        <a:effectLst/>
       </p:bgPr>
     </p:bg>
     <p:spTree>
@@ -3944,12 +3955,12 @@
       </p:grpSpPr>
       <p:sp>
         <p:nvSpPr>
-          <p:cNvPr name="Freeform 2" id="2"/>
+          <p:cNvPr id="2" name="Freeform 2"/>
           <p:cNvSpPr/>
           <p:nvPr/>
         </p:nvSpPr>
         <p:spPr>
-          <a:xfrm flipH="false" flipV="false" rot="0">
+          <a:xfrm>
             <a:off x="0" y="0"/>
             <a:ext cx="18288000" cy="376223"/>
           </a:xfrm>
@@ -3958,9 +3969,9 @@
             <a:gdLst/>
             <a:ahLst/>
             <a:cxnLst/>
-            <a:rect r="r" b="b" t="t" l="l"/>
+            <a:rect l="l" t="t" r="r" b="b"/>
             <a:pathLst>
-              <a:path h="376223" w="18288000">
+              <a:path w="18288000" h="376223">
                 <a:moveTo>
                   <a:pt x="0" y="0"/>
                 </a:moveTo>
@@ -3983,19 +3994,19 @@
           <a:blipFill>
             <a:blip r:embed="rId2"/>
             <a:stretch>
-              <a:fillRect l="0" t="-1531929" r="0" b="-1102351"/>
+              <a:fillRect t="-1531929" b="-1102351"/>
             </a:stretch>
           </a:blipFill>
         </p:spPr>
       </p:sp>
       <p:sp>
         <p:nvSpPr>
-          <p:cNvPr name="TextBox 3" id="3"/>
-          <p:cNvSpPr txBox="true"/>
+          <p:cNvPr id="3" name="TextBox 3"/>
+          <p:cNvSpPr txBox="1"/>
           <p:nvPr/>
         </p:nvSpPr>
         <p:spPr>
-          <a:xfrm rot="0">
+          <a:xfrm>
             <a:off x="1028700" y="1717100"/>
             <a:ext cx="16040257" cy="1219836"/>
           </a:xfrm>
@@ -4004,7 +4015,7 @@
           </a:prstGeom>
         </p:spPr>
         <p:txBody>
-          <a:bodyPr anchor="t" rtlCol="false" tIns="0" lIns="0" bIns="0" rIns="0">
+          <a:bodyPr lIns="0" tIns="0" rIns="0" bIns="0" rtlCol="0" anchor="t">
             <a:spAutoFit/>
           </a:bodyPr>
           <a:lstStyle/>
@@ -4031,12 +4042,12 @@
       </p:sp>
       <p:sp>
         <p:nvSpPr>
-          <p:cNvPr name="TextBox 4" id="4"/>
-          <p:cNvSpPr txBox="true"/>
+          <p:cNvPr id="4" name="TextBox 4"/>
+          <p:cNvSpPr txBox="1"/>
           <p:nvPr/>
         </p:nvSpPr>
         <p:spPr>
-          <a:xfrm rot="0">
+          <a:xfrm>
             <a:off x="1658855" y="3659505"/>
             <a:ext cx="15147141" cy="4855210"/>
           </a:xfrm>
@@ -4045,12 +4056,12 @@
           </a:prstGeom>
         </p:spPr>
         <p:txBody>
-          <a:bodyPr anchor="t" rtlCol="false" tIns="0" lIns="0" bIns="0" rIns="0">
+          <a:bodyPr lIns="0" tIns="0" rIns="0" bIns="0" rtlCol="0" anchor="t">
             <a:spAutoFit/>
           </a:bodyPr>
           <a:lstStyle/>
           <a:p>
-            <a:pPr algn="just" marL="669286" indent="-334643" lvl="1">
+            <a:pPr marL="669286" lvl="1" indent="-334643" algn="just">
               <a:lnSpc>
                 <a:spcPts val="4339"/>
               </a:lnSpc>
@@ -4058,7 +4069,7 @@
               <a:buChar char="•"/>
             </a:pPr>
             <a:r>
-              <a:rPr lang="en-US" b="true" sz="3099">
+              <a:rPr lang="en-US" sz="3099" b="1">
                 <a:solidFill>
                   <a:srgbClr val="36211B"/>
                 </a:solidFill>
@@ -4067,23 +4078,11 @@
                 <a:cs typeface="Canva Sans Bold"/>
                 <a:sym typeface="Canva Sans Bold"/>
               </a:rPr>
-              <a:t>Environmen</a:t>
-            </a:r>
-            <a:r>
-              <a:rPr lang="en-US" b="true" sz="3099">
-                <a:solidFill>
-                  <a:srgbClr val="36211B"/>
-                </a:solidFill>
-                <a:latin typeface="Canva Sans Bold"/>
-                <a:ea typeface="Canva Sans Bold"/>
-                <a:cs typeface="Canva Sans Bold"/>
-                <a:sym typeface="Canva Sans Bold"/>
-              </a:rPr>
-              <a:t>t Setup: Initialized a Node.js project and configured the Express.js server.</a:t>
-            </a:r>
-          </a:p>
-          <a:p>
-            <a:pPr algn="just" marL="669286" indent="-334643" lvl="1">
+              <a:t>Environment Setup: Initialized a Node.js project and configured the Express.js server.</a:t>
+            </a:r>
+          </a:p>
+          <a:p>
+            <a:pPr marL="669286" lvl="1" indent="-334643" algn="just">
               <a:lnSpc>
                 <a:spcPts val="4339"/>
               </a:lnSpc>
@@ -4091,7 +4090,7 @@
               <a:buChar char="•"/>
             </a:pPr>
             <a:r>
-              <a:rPr lang="en-US" b="true" sz="3099">
+              <a:rPr lang="en-US" sz="3099" b="1">
                 <a:solidFill>
                   <a:srgbClr val="36211B"/>
                 </a:solidFill>
@@ -4100,23 +4099,11 @@
                 <a:cs typeface="Canva Sans Bold"/>
                 <a:sym typeface="Canva Sans Bold"/>
               </a:rPr>
-              <a:t>API E</a:t>
-            </a:r>
-            <a:r>
-              <a:rPr lang="en-US" b="true" sz="3099">
-                <a:solidFill>
-                  <a:srgbClr val="36211B"/>
-                </a:solidFill>
-                <a:latin typeface="Canva Sans Bold"/>
-                <a:ea typeface="Canva Sans Bold"/>
-                <a:cs typeface="Canva Sans Bold"/>
-                <a:sym typeface="Canva Sans Bold"/>
-              </a:rPr>
-              <a:t>ndpoints: Created RESTful API routes for user authentication (Register/Login), image upload, and fetching analysis history.</a:t>
-            </a:r>
-          </a:p>
-          <a:p>
-            <a:pPr algn="just" marL="669286" indent="-334643" lvl="1">
+              <a:t>API Endpoints: Created RESTful API routes for user authentication (Register/Login), image upload, and fetching analysis history.</a:t>
+            </a:r>
+          </a:p>
+          <a:p>
+            <a:pPr marL="669286" lvl="1" indent="-334643" algn="just">
               <a:lnSpc>
                 <a:spcPts val="4339"/>
               </a:lnSpc>
@@ -4124,7 +4111,7 @@
               <a:buChar char="•"/>
             </a:pPr>
             <a:r>
-              <a:rPr lang="en-US" b="true" sz="3099">
+              <a:rPr lang="en-US" sz="3099" b="1">
                 <a:solidFill>
                   <a:srgbClr val="36211B"/>
                 </a:solidFill>
@@ -4137,7 +4124,7 @@
             </a:r>
           </a:p>
           <a:p>
-            <a:pPr algn="just" marL="669286" indent="-334643" lvl="1">
+            <a:pPr marL="669286" lvl="1" indent="-334643" algn="just">
               <a:lnSpc>
                 <a:spcPts val="4339"/>
               </a:lnSpc>
@@ -4145,7 +4132,7 @@
               <a:buChar char="•"/>
             </a:pPr>
             <a:r>
-              <a:rPr lang="en-US" b="true" sz="3099">
+              <a:rPr lang="en-US" sz="3099" b="1">
                 <a:solidFill>
                   <a:srgbClr val="36211B"/>
                 </a:solidFill>
@@ -4163,6 +4150,15 @@
                 <a:spcPts val="4339"/>
               </a:lnSpc>
             </a:pPr>
+            <a:endParaRPr lang="en-US" sz="3099" b="1">
+              <a:solidFill>
+                <a:srgbClr val="36211B"/>
+              </a:solidFill>
+              <a:latin typeface="Canva Sans Bold"/>
+              <a:ea typeface="Canva Sans Bold"/>
+              <a:cs typeface="Canva Sans Bold"/>
+              <a:sym typeface="Canva Sans Bold"/>
+            </a:endParaRPr>
           </a:p>
         </p:txBody>
       </p:sp>
@@ -4175,13 +4171,14 @@
 </file>
 
 <file path=ppt/slides/slide11.xml><?xml version="1.0" encoding="utf-8"?>
-<p:sld xmlns:p="http://schemas.openxmlformats.org/presentationml/2006/main" xmlns:a="http://schemas.openxmlformats.org/drawingml/2006/main" xmlns:r="http://schemas.openxmlformats.org/officeDocument/2006/relationships">
+<p:sld xmlns:a="http://schemas.openxmlformats.org/drawingml/2006/main" xmlns:r="http://schemas.openxmlformats.org/officeDocument/2006/relationships" xmlns:p="http://schemas.openxmlformats.org/presentationml/2006/main">
   <p:cSld>
     <p:bg>
       <p:bgPr>
         <a:solidFill>
           <a:srgbClr val="E8E6E3"/>
         </a:solidFill>
+        <a:effectLst/>
       </p:bgPr>
     </p:bg>
     <p:spTree>
@@ -4200,12 +4197,12 @@
       </p:grpSpPr>
       <p:sp>
         <p:nvSpPr>
-          <p:cNvPr name="Freeform 2" id="2"/>
+          <p:cNvPr id="2" name="Freeform 2"/>
           <p:cNvSpPr/>
           <p:nvPr/>
         </p:nvSpPr>
         <p:spPr>
-          <a:xfrm flipH="false" flipV="false" rot="0">
+          <a:xfrm>
             <a:off x="0" y="0"/>
             <a:ext cx="18288000" cy="376223"/>
           </a:xfrm>
@@ -4214,9 +4211,9 @@
             <a:gdLst/>
             <a:ahLst/>
             <a:cxnLst/>
-            <a:rect r="r" b="b" t="t" l="l"/>
+            <a:rect l="l" t="t" r="r" b="b"/>
             <a:pathLst>
-              <a:path h="376223" w="18288000">
+              <a:path w="18288000" h="376223">
                 <a:moveTo>
                   <a:pt x="0" y="0"/>
                 </a:moveTo>
@@ -4239,19 +4236,19 @@
           <a:blipFill>
             <a:blip r:embed="rId2"/>
             <a:stretch>
-              <a:fillRect l="0" t="-1531929" r="0" b="-1102351"/>
+              <a:fillRect t="-1531929" b="-1102351"/>
             </a:stretch>
           </a:blipFill>
         </p:spPr>
       </p:sp>
       <p:sp>
         <p:nvSpPr>
-          <p:cNvPr name="TextBox 3" id="3"/>
-          <p:cNvSpPr txBox="true"/>
+          <p:cNvPr id="3" name="TextBox 3"/>
+          <p:cNvSpPr txBox="1"/>
           <p:nvPr/>
         </p:nvSpPr>
         <p:spPr>
-          <a:xfrm rot="0">
+          <a:xfrm>
             <a:off x="1028700" y="1717100"/>
             <a:ext cx="16040257" cy="1219836"/>
           </a:xfrm>
@@ -4260,7 +4257,7 @@
           </a:prstGeom>
         </p:spPr>
         <p:txBody>
-          <a:bodyPr anchor="t" rtlCol="false" tIns="0" lIns="0" bIns="0" rIns="0">
+          <a:bodyPr lIns="0" tIns="0" rIns="0" bIns="0" rtlCol="0" anchor="t">
             <a:spAutoFit/>
           </a:bodyPr>
           <a:lstStyle/>
@@ -4287,12 +4284,12 @@
       </p:sp>
       <p:sp>
         <p:nvSpPr>
-          <p:cNvPr name="TextBox 4" id="4"/>
-          <p:cNvSpPr txBox="true"/>
+          <p:cNvPr id="4" name="TextBox 4"/>
+          <p:cNvSpPr txBox="1"/>
           <p:nvPr/>
         </p:nvSpPr>
         <p:spPr>
-          <a:xfrm rot="0">
+          <a:xfrm>
             <a:off x="1475258" y="4044950"/>
             <a:ext cx="15147141" cy="4855210"/>
           </a:xfrm>
@@ -4301,12 +4298,12 @@
           </a:prstGeom>
         </p:spPr>
         <p:txBody>
-          <a:bodyPr anchor="t" rtlCol="false" tIns="0" lIns="0" bIns="0" rIns="0">
+          <a:bodyPr lIns="0" tIns="0" rIns="0" bIns="0" rtlCol="0" anchor="t">
             <a:spAutoFit/>
           </a:bodyPr>
           <a:lstStyle/>
           <a:p>
-            <a:pPr algn="just" marL="669286" indent="-334643" lvl="1">
+            <a:pPr marL="669286" lvl="1" indent="-334643" algn="just">
               <a:lnSpc>
                 <a:spcPts val="4339"/>
               </a:lnSpc>
@@ -4314,7 +4311,7 @@
               <a:buChar char="•"/>
             </a:pPr>
             <a:r>
-              <a:rPr lang="en-US" b="true" sz="3099">
+              <a:rPr lang="en-US" sz="3099" b="1">
                 <a:solidFill>
                   <a:srgbClr val="36211B"/>
                 </a:solidFill>
@@ -4323,23 +4320,11 @@
                 <a:cs typeface="Canva Sans Bold"/>
                 <a:sym typeface="Canva Sans Bold"/>
               </a:rPr>
-              <a:t>Model</a:t>
-            </a:r>
-            <a:r>
-              <a:rPr lang="en-US" b="true" sz="3099">
-                <a:solidFill>
-                  <a:srgbClr val="36211B"/>
-                </a:solidFill>
-                <a:latin typeface="Canva Sans Bold"/>
-                <a:ea typeface="Canva Sans Bold"/>
-                <a:cs typeface="Canva Sans Bold"/>
-                <a:sym typeface="Canva Sans Bold"/>
-              </a:rPr>
-              <a:t> Selection: Chose the pre-trained MobileNetV2 model for its balance of high accuracy and low computational cost.</a:t>
-            </a:r>
-          </a:p>
-          <a:p>
-            <a:pPr algn="just" marL="669286" indent="-334643" lvl="1">
+              <a:t>Model Selection: Chose the pre-trained MobileNetV2 model for its balance of high accuracy and low computational cost.</a:t>
+            </a:r>
+          </a:p>
+          <a:p>
+            <a:pPr marL="669286" lvl="1" indent="-334643" algn="just">
               <a:lnSpc>
                 <a:spcPts val="4339"/>
               </a:lnSpc>
@@ -4347,7 +4332,7 @@
               <a:buChar char="•"/>
             </a:pPr>
             <a:r>
-              <a:rPr lang="en-US" b="true" sz="3099">
+              <a:rPr lang="en-US" sz="3099" b="1">
                 <a:solidFill>
                   <a:srgbClr val="36211B"/>
                 </a:solidFill>
@@ -4356,23 +4341,11 @@
                 <a:cs typeface="Canva Sans Bold"/>
                 <a:sym typeface="Canva Sans Bold"/>
               </a:rPr>
-              <a:t>Fine-Tu</a:t>
-            </a:r>
-            <a:r>
-              <a:rPr lang="en-US" b="true" sz="3099">
-                <a:solidFill>
-                  <a:srgbClr val="36211B"/>
-                </a:solidFill>
-                <a:latin typeface="Canva Sans Bold"/>
-                <a:ea typeface="Canva Sans Bold"/>
-                <a:cs typeface="Canva Sans Bold"/>
-                <a:sym typeface="Canva Sans Bold"/>
-              </a:rPr>
-              <a:t>ning (Optional): The model was potentially fine-tuned on a custom dataset of skin conditions to improve its specificity.</a:t>
-            </a:r>
-          </a:p>
-          <a:p>
-            <a:pPr algn="just" marL="669286" indent="-334643" lvl="1">
+              <a:t>Fine-Tuning (Optional): The model was potentially fine-tuned on a custom dataset of skin conditions to improve its specificity.</a:t>
+            </a:r>
+          </a:p>
+          <a:p>
+            <a:pPr marL="669286" lvl="1" indent="-334643" algn="just">
               <a:lnSpc>
                 <a:spcPts val="4339"/>
               </a:lnSpc>
@@ -4380,7 +4353,7 @@
               <a:buChar char="•"/>
             </a:pPr>
             <a:r>
-              <a:rPr lang="en-US" b="true" sz="3099">
+              <a:rPr lang="en-US" sz="3099" b="1">
                 <a:solidFill>
                   <a:srgbClr val="36211B"/>
                 </a:solidFill>
@@ -4389,19 +4362,7 @@
                 <a:cs typeface="Canva Sans Bold"/>
                 <a:sym typeface="Canva Sans Bold"/>
               </a:rPr>
-              <a:t>API</a:t>
-            </a:r>
-            <a:r>
-              <a:rPr lang="en-US" b="true" sz="3099">
-                <a:solidFill>
-                  <a:srgbClr val="36211B"/>
-                </a:solidFill>
-                <a:latin typeface="Canva Sans Bold"/>
-                <a:ea typeface="Canva Sans Bold"/>
-                <a:cs typeface="Canva Sans Bold"/>
-                <a:sym typeface="Canva Sans Bold"/>
-              </a:rPr>
-              <a:t> Wrapping: Developed a lightweight Python service (using Flask or FastAPI) to "wrap" the TensorFlow/Keras model. This service exposes a simple API endpoint that accepts an image and returns a JSON object with the prediction.</a:t>
+              <a:t>API Wrapping: Developed a lightweight Python service (using Flask or FastAPI) to "wrap" the TensorFlow/Keras model. This service exposes a simple API endpoint that accepts an image and returns a JSON object with the prediction.</a:t>
             </a:r>
           </a:p>
           <a:p>
@@ -4410,6 +4371,15 @@
                 <a:spcPts val="4339"/>
               </a:lnSpc>
             </a:pPr>
+            <a:endParaRPr lang="en-US" sz="3099" b="1">
+              <a:solidFill>
+                <a:srgbClr val="36211B"/>
+              </a:solidFill>
+              <a:latin typeface="Canva Sans Bold"/>
+              <a:ea typeface="Canva Sans Bold"/>
+              <a:cs typeface="Canva Sans Bold"/>
+              <a:sym typeface="Canva Sans Bold"/>
+            </a:endParaRPr>
           </a:p>
         </p:txBody>
       </p:sp>
@@ -4422,13 +4392,14 @@
 </file>
 
 <file path=ppt/slides/slide12.xml><?xml version="1.0" encoding="utf-8"?>
-<p:sld xmlns:p="http://schemas.openxmlformats.org/presentationml/2006/main" xmlns:a="http://schemas.openxmlformats.org/drawingml/2006/main" xmlns:r="http://schemas.openxmlformats.org/officeDocument/2006/relationships">
+<p:sld xmlns:a="http://schemas.openxmlformats.org/drawingml/2006/main" xmlns:r="http://schemas.openxmlformats.org/officeDocument/2006/relationships" xmlns:p="http://schemas.openxmlformats.org/presentationml/2006/main">
   <p:cSld>
     <p:bg>
       <p:bgPr>
         <a:solidFill>
           <a:srgbClr val="E8E6E3"/>
         </a:solidFill>
+        <a:effectLst/>
       </p:bgPr>
     </p:bg>
     <p:spTree>
@@ -4447,12 +4418,12 @@
       </p:grpSpPr>
       <p:sp>
         <p:nvSpPr>
-          <p:cNvPr name="Freeform 2" id="2"/>
+          <p:cNvPr id="2" name="Freeform 2"/>
           <p:cNvSpPr/>
           <p:nvPr/>
         </p:nvSpPr>
         <p:spPr>
-          <a:xfrm flipH="false" flipV="false" rot="0">
+          <a:xfrm>
             <a:off x="0" y="0"/>
             <a:ext cx="18288000" cy="376223"/>
           </a:xfrm>
@@ -4461,9 +4432,9 @@
             <a:gdLst/>
             <a:ahLst/>
             <a:cxnLst/>
-            <a:rect r="r" b="b" t="t" l="l"/>
+            <a:rect l="l" t="t" r="r" b="b"/>
             <a:pathLst>
-              <a:path h="376223" w="18288000">
+              <a:path w="18288000" h="376223">
                 <a:moveTo>
                   <a:pt x="0" y="0"/>
                 </a:moveTo>
@@ -4486,19 +4457,19 @@
           <a:blipFill>
             <a:blip r:embed="rId2"/>
             <a:stretch>
-              <a:fillRect l="0" t="-1531929" r="0" b="-1102351"/>
+              <a:fillRect t="-1531929" b="-1102351"/>
             </a:stretch>
           </a:blipFill>
         </p:spPr>
       </p:sp>
       <p:sp>
         <p:nvSpPr>
-          <p:cNvPr name="TextBox 3" id="3"/>
-          <p:cNvSpPr txBox="true"/>
+          <p:cNvPr id="3" name="TextBox 3"/>
+          <p:cNvSpPr txBox="1"/>
           <p:nvPr/>
         </p:nvSpPr>
         <p:spPr>
-          <a:xfrm rot="0">
+          <a:xfrm>
             <a:off x="1028700" y="1717100"/>
             <a:ext cx="16040257" cy="1219836"/>
           </a:xfrm>
@@ -4507,7 +4478,7 @@
           </a:prstGeom>
         </p:spPr>
         <p:txBody>
-          <a:bodyPr anchor="t" rtlCol="false" tIns="0" lIns="0" bIns="0" rIns="0">
+          <a:bodyPr lIns="0" tIns="0" rIns="0" bIns="0" rtlCol="0" anchor="t">
             <a:spAutoFit/>
           </a:bodyPr>
           <a:lstStyle/>
@@ -4534,12 +4505,12 @@
       </p:sp>
       <p:sp>
         <p:nvSpPr>
-          <p:cNvPr name="TextBox 4" id="4"/>
-          <p:cNvSpPr txBox="true"/>
+          <p:cNvPr id="4" name="TextBox 4"/>
+          <p:cNvSpPr txBox="1"/>
           <p:nvPr/>
         </p:nvSpPr>
         <p:spPr>
-          <a:xfrm rot="0">
+          <a:xfrm>
             <a:off x="1475258" y="3502025"/>
             <a:ext cx="15147141" cy="5398135"/>
           </a:xfrm>
@@ -4548,12 +4519,12 @@
           </a:prstGeom>
         </p:spPr>
         <p:txBody>
-          <a:bodyPr anchor="t" rtlCol="false" tIns="0" lIns="0" bIns="0" rIns="0">
+          <a:bodyPr lIns="0" tIns="0" rIns="0" bIns="0" rtlCol="0" anchor="t">
             <a:spAutoFit/>
           </a:bodyPr>
           <a:lstStyle/>
           <a:p>
-            <a:pPr algn="just" marL="669286" indent="-334643" lvl="1">
+            <a:pPr marL="669286" lvl="1" indent="-334643" algn="just">
               <a:lnSpc>
                 <a:spcPts val="4339"/>
               </a:lnSpc>
@@ -4561,7 +4532,7 @@
               <a:buChar char="•"/>
             </a:pPr>
             <a:r>
-              <a:rPr lang="en-US" b="true" sz="3099">
+              <a:rPr lang="en-US" sz="3099" b="1">
                 <a:solidFill>
                   <a:srgbClr val="36211B"/>
                 </a:solidFill>
@@ -4570,23 +4541,11 @@
                 <a:cs typeface="Canva Sans Bold"/>
                 <a:sym typeface="Canva Sans Bold"/>
               </a:rPr>
-              <a:t>Component</a:t>
-            </a:r>
-            <a:r>
-              <a:rPr lang="en-US" b="true" sz="3099">
-                <a:solidFill>
-                  <a:srgbClr val="36211B"/>
-                </a:solidFill>
-                <a:latin typeface="Canva Sans Bold"/>
-                <a:ea typeface="Canva Sans Bold"/>
-                <a:cs typeface="Canva Sans Bold"/>
-                <a:sym typeface="Canva Sans Bold"/>
-              </a:rPr>
-              <a:t> Structure: Built the UI with reusable React components for the navigation bar, file upload module, results display card, and user dashboard.</a:t>
-            </a:r>
-          </a:p>
-          <a:p>
-            <a:pPr algn="just" marL="669286" indent="-334643" lvl="1">
+              <a:t>Component Structure: Built the UI with reusable React components for the navigation bar, file upload module, results display card, and user dashboard.</a:t>
+            </a:r>
+          </a:p>
+          <a:p>
+            <a:pPr marL="669286" lvl="1" indent="-334643" algn="just">
               <a:lnSpc>
                 <a:spcPts val="4339"/>
               </a:lnSpc>
@@ -4594,7 +4553,7 @@
               <a:buChar char="•"/>
             </a:pPr>
             <a:r>
-              <a:rPr lang="en-US" b="true" sz="3099">
+              <a:rPr lang="en-US" sz="3099" b="1">
                 <a:solidFill>
                   <a:srgbClr val="36211B"/>
                 </a:solidFill>
@@ -4603,35 +4562,11 @@
                 <a:cs typeface="Canva Sans Bold"/>
                 <a:sym typeface="Canva Sans Bold"/>
               </a:rPr>
-              <a:t>State Management: Used React Hooks (l</a:t>
-            </a:r>
-            <a:r>
-              <a:rPr lang="en-US" b="true" sz="3099">
-                <a:solidFill>
-                  <a:srgbClr val="36211B"/>
-                </a:solidFill>
-                <a:latin typeface="Canva Sans Bold"/>
-                <a:ea typeface="Canva Sans Bold"/>
-                <a:cs typeface="Canva Sans Bold"/>
-                <a:sym typeface="Canva Sans Bold"/>
-              </a:rPr>
-              <a:t>ike useState a</a:t>
-            </a:r>
-            <a:r>
-              <a:rPr lang="en-US" b="true" sz="3099">
-                <a:solidFill>
-                  <a:srgbClr val="36211B"/>
-                </a:solidFill>
-                <a:latin typeface="Canva Sans Bold"/>
-                <a:ea typeface="Canva Sans Bold"/>
-                <a:cs typeface="Canva Sans Bold"/>
-                <a:sym typeface="Canva Sans Bold"/>
-              </a:rPr>
-              <a:t>nd useEffect) to manage component state and handle asynchronous API calls.</a:t>
-            </a:r>
-          </a:p>
-          <a:p>
-            <a:pPr algn="just" marL="669286" indent="-334643" lvl="1">
+              <a:t>State Management: Used React Hooks (like useState and useEffect) to manage component state and handle asynchronous API calls.</a:t>
+            </a:r>
+          </a:p>
+          <a:p>
+            <a:pPr marL="669286" lvl="1" indent="-334643" algn="just">
               <a:lnSpc>
                 <a:spcPts val="4339"/>
               </a:lnSpc>
@@ -4639,7 +4574,7 @@
               <a:buChar char="•"/>
             </a:pPr>
             <a:r>
-              <a:rPr lang="en-US" b="true" sz="3099">
+              <a:rPr lang="en-US" sz="3099" b="1">
                 <a:solidFill>
                   <a:srgbClr val="36211B"/>
                 </a:solidFill>
@@ -4648,23 +4583,11 @@
                 <a:cs typeface="Canva Sans Bold"/>
                 <a:sym typeface="Canva Sans Bold"/>
               </a:rPr>
-              <a:t>API Connection: Integrated the axios library to communicate with</a:t>
-            </a:r>
-            <a:r>
-              <a:rPr lang="en-US" b="true" sz="3099">
-                <a:solidFill>
-                  <a:srgbClr val="36211B"/>
-                </a:solidFill>
-                <a:latin typeface="Canva Sans Bold"/>
-                <a:ea typeface="Canva Sans Bold"/>
-                <a:cs typeface="Canva Sans Bold"/>
-                <a:sym typeface="Canva Sans Bold"/>
-              </a:rPr>
-              <a:t> our backend, sending the uploaded image and receiving the analysis results.</a:t>
-            </a:r>
-          </a:p>
-          <a:p>
-            <a:pPr algn="just" marL="669286" indent="-334643" lvl="1">
+              <a:t>API Connection: Integrated the axios library to communicate with our backend, sending the uploaded image and receiving the analysis results.</a:t>
+            </a:r>
+          </a:p>
+          <a:p>
+            <a:pPr marL="669286" lvl="1" indent="-334643" algn="just">
               <a:lnSpc>
                 <a:spcPts val="4339"/>
               </a:lnSpc>
@@ -4672,7 +4595,7 @@
               <a:buChar char="•"/>
             </a:pPr>
             <a:r>
-              <a:rPr lang="en-US" b="true" sz="3099">
+              <a:rPr lang="en-US" sz="3099" b="1">
                 <a:solidFill>
                   <a:srgbClr val="36211B"/>
                 </a:solidFill>
@@ -4690,6 +4613,15 @@
                 <a:spcPts val="4339"/>
               </a:lnSpc>
             </a:pPr>
+            <a:endParaRPr lang="en-US" sz="3099" b="1">
+              <a:solidFill>
+                <a:srgbClr val="36211B"/>
+              </a:solidFill>
+              <a:latin typeface="Canva Sans Bold"/>
+              <a:ea typeface="Canva Sans Bold"/>
+              <a:cs typeface="Canva Sans Bold"/>
+              <a:sym typeface="Canva Sans Bold"/>
+            </a:endParaRPr>
           </a:p>
         </p:txBody>
       </p:sp>
@@ -4702,13 +4634,14 @@
 </file>
 
 <file path=ppt/slides/slide13.xml><?xml version="1.0" encoding="utf-8"?>
-<p:sld xmlns:p="http://schemas.openxmlformats.org/presentationml/2006/main" xmlns:a="http://schemas.openxmlformats.org/drawingml/2006/main" xmlns:r="http://schemas.openxmlformats.org/officeDocument/2006/relationships">
+<p:sld xmlns:a="http://schemas.openxmlformats.org/drawingml/2006/main" xmlns:r="http://schemas.openxmlformats.org/officeDocument/2006/relationships" xmlns:p="http://schemas.openxmlformats.org/presentationml/2006/main">
   <p:cSld>
     <p:bg>
       <p:bgPr>
         <a:solidFill>
           <a:srgbClr val="E8E6E3"/>
         </a:solidFill>
+        <a:effectLst/>
       </p:bgPr>
     </p:bg>
     <p:spTree>
@@ -4727,12 +4660,12 @@
       </p:grpSpPr>
       <p:sp>
         <p:nvSpPr>
-          <p:cNvPr name="TextBox 2" id="2"/>
-          <p:cNvSpPr txBox="true"/>
+          <p:cNvPr id="2" name="TextBox 2"/>
+          <p:cNvSpPr txBox="1"/>
           <p:nvPr/>
         </p:nvSpPr>
         <p:spPr>
-          <a:xfrm rot="0">
+          <a:xfrm>
             <a:off x="1028700" y="1800560"/>
             <a:ext cx="14034598" cy="955845"/>
           </a:xfrm>
@@ -4741,12 +4674,12 @@
           </a:prstGeom>
         </p:spPr>
         <p:txBody>
-          <a:bodyPr anchor="t" rtlCol="false" tIns="0" lIns="0" bIns="0" rIns="0">
+          <a:bodyPr lIns="0" tIns="0" rIns="0" bIns="0" rtlCol="0" anchor="t">
             <a:spAutoFit/>
           </a:bodyPr>
           <a:lstStyle/>
           <a:p>
-            <a:pPr algn="l" marL="0" indent="0" lvl="0">
+            <a:pPr marL="0" lvl="0" indent="0" algn="l">
               <a:lnSpc>
                 <a:spcPts val="7686"/>
               </a:lnSpc>
@@ -4768,12 +4701,12 @@
       </p:sp>
       <p:sp>
         <p:nvSpPr>
-          <p:cNvPr name="TextBox 3" id="3"/>
-          <p:cNvSpPr txBox="true"/>
+          <p:cNvPr id="3" name="TextBox 3"/>
+          <p:cNvSpPr txBox="1"/>
           <p:nvPr/>
         </p:nvSpPr>
         <p:spPr>
-          <a:xfrm rot="0">
+          <a:xfrm>
             <a:off x="1028700" y="981075"/>
             <a:ext cx="8091140" cy="389297"/>
           </a:xfrm>
@@ -4782,12 +4715,12 @@
           </a:prstGeom>
         </p:spPr>
         <p:txBody>
-          <a:bodyPr anchor="t" rtlCol="false" tIns="0" lIns="0" bIns="0" rIns="0">
+          <a:bodyPr lIns="0" tIns="0" rIns="0" bIns="0" rtlCol="0" anchor="t">
             <a:spAutoFit/>
           </a:bodyPr>
           <a:lstStyle/>
           <a:p>
-            <a:pPr algn="l" marL="0" indent="0" lvl="0">
+            <a:pPr marL="0" lvl="0" indent="0" algn="l">
               <a:lnSpc>
                 <a:spcPts val="3217"/>
               </a:lnSpc>
@@ -4796,7 +4729,7 @@
               </a:spcBef>
             </a:pPr>
             <a:r>
-              <a:rPr lang="en-US" b="true" sz="2298">
+              <a:rPr lang="en-US" sz="2298" b="1">
                 <a:solidFill>
                   <a:srgbClr val="36211B"/>
                 </a:solidFill>
@@ -4812,12 +4745,12 @@
       </p:sp>
       <p:sp>
         <p:nvSpPr>
-          <p:cNvPr name="AutoShape 4" id="4"/>
+          <p:cNvPr id="4" name="AutoShape 4"/>
           <p:cNvSpPr/>
           <p:nvPr/>
         </p:nvSpPr>
         <p:spPr>
-          <a:xfrm rot="0">
+          <a:xfrm>
             <a:off x="1028700" y="1515576"/>
             <a:ext cx="16230600" cy="64082"/>
           </a:xfrm>
@@ -4831,12 +4764,12 @@
       </p:sp>
       <p:sp>
         <p:nvSpPr>
-          <p:cNvPr name="Freeform 5" id="5"/>
+          <p:cNvPr id="5" name="Freeform 5"/>
           <p:cNvSpPr/>
           <p:nvPr/>
         </p:nvSpPr>
         <p:spPr>
-          <a:xfrm flipH="false" flipV="false" rot="0">
+          <a:xfrm>
             <a:off x="2961463" y="3285935"/>
             <a:ext cx="12377958" cy="5972365"/>
           </a:xfrm>
@@ -4845,9 +4778,9 @@
             <a:gdLst/>
             <a:ahLst/>
             <a:cxnLst/>
-            <a:rect r="r" b="b" t="t" l="l"/>
+            <a:rect l="l" t="t" r="r" b="b"/>
             <a:pathLst>
-              <a:path h="5972365" w="12377958">
+              <a:path w="12377958" h="5972365">
                 <a:moveTo>
                   <a:pt x="0" y="0"/>
                 </a:moveTo>
@@ -4870,7 +4803,7 @@
           <a:blipFill>
             <a:blip r:embed="rId2"/>
             <a:stretch>
-              <a:fillRect l="0" t="0" r="0" b="0"/>
+              <a:fillRect/>
             </a:stretch>
           </a:blipFill>
         </p:spPr>
@@ -4884,13 +4817,14 @@
 </file>
 
 <file path=ppt/slides/slide14.xml><?xml version="1.0" encoding="utf-8"?>
-<p:sld xmlns:p="http://schemas.openxmlformats.org/presentationml/2006/main" xmlns:a="http://schemas.openxmlformats.org/drawingml/2006/main" xmlns:r="http://schemas.openxmlformats.org/officeDocument/2006/relationships">
+<p:sld xmlns:a="http://schemas.openxmlformats.org/drawingml/2006/main" xmlns:r="http://schemas.openxmlformats.org/officeDocument/2006/relationships" xmlns:p="http://schemas.openxmlformats.org/presentationml/2006/main">
   <p:cSld>
     <p:bg>
       <p:bgPr>
         <a:solidFill>
           <a:srgbClr val="E8E6E3"/>
         </a:solidFill>
+        <a:effectLst/>
       </p:bgPr>
     </p:bg>
     <p:spTree>
@@ -4909,12 +4843,12 @@
       </p:grpSpPr>
       <p:sp>
         <p:nvSpPr>
-          <p:cNvPr name="AutoShape 2" id="2"/>
+          <p:cNvPr id="2" name="AutoShape 2"/>
           <p:cNvSpPr/>
           <p:nvPr/>
         </p:nvSpPr>
         <p:spPr>
-          <a:xfrm rot="0">
+          <a:xfrm>
             <a:off x="1028700" y="1515576"/>
             <a:ext cx="16230600" cy="64082"/>
           </a:xfrm>
@@ -4928,12 +4862,12 @@
       </p:sp>
       <p:sp>
         <p:nvSpPr>
-          <p:cNvPr name="Freeform 3" id="3"/>
+          <p:cNvPr id="3" name="Freeform 3"/>
           <p:cNvSpPr/>
           <p:nvPr/>
         </p:nvSpPr>
         <p:spPr>
-          <a:xfrm flipH="false" flipV="false" rot="0">
+          <a:xfrm>
             <a:off x="2894790" y="3616977"/>
             <a:ext cx="12168508" cy="5749620"/>
           </a:xfrm>
@@ -4942,9 +4876,9 @@
             <a:gdLst/>
             <a:ahLst/>
             <a:cxnLst/>
-            <a:rect r="r" b="b" t="t" l="l"/>
+            <a:rect l="l" t="t" r="r" b="b"/>
             <a:pathLst>
-              <a:path h="5749620" w="12168508">
+              <a:path w="12168508" h="5749620">
                 <a:moveTo>
                   <a:pt x="0" y="0"/>
                 </a:moveTo>
@@ -4967,19 +4901,19 @@
           <a:blipFill>
             <a:blip r:embed="rId2"/>
             <a:stretch>
-              <a:fillRect l="0" t="0" r="0" b="0"/>
+              <a:fillRect/>
             </a:stretch>
           </a:blipFill>
         </p:spPr>
       </p:sp>
       <p:sp>
         <p:nvSpPr>
-          <p:cNvPr name="TextBox 4" id="4"/>
-          <p:cNvSpPr txBox="true"/>
+          <p:cNvPr id="4" name="TextBox 4"/>
+          <p:cNvSpPr txBox="1"/>
           <p:nvPr/>
         </p:nvSpPr>
         <p:spPr>
-          <a:xfrm rot="0">
+          <a:xfrm>
             <a:off x="1028700" y="1800560"/>
             <a:ext cx="14034598" cy="955845"/>
           </a:xfrm>
@@ -4988,12 +4922,12 @@
           </a:prstGeom>
         </p:spPr>
         <p:txBody>
-          <a:bodyPr anchor="t" rtlCol="false" tIns="0" lIns="0" bIns="0" rIns="0">
+          <a:bodyPr lIns="0" tIns="0" rIns="0" bIns="0" rtlCol="0" anchor="t">
             <a:spAutoFit/>
           </a:bodyPr>
           <a:lstStyle/>
           <a:p>
-            <a:pPr algn="l" marL="0" indent="0" lvl="0">
+            <a:pPr marL="0" lvl="0" indent="0" algn="l">
               <a:lnSpc>
                 <a:spcPts val="7686"/>
               </a:lnSpc>
@@ -5015,12 +4949,12 @@
       </p:sp>
       <p:sp>
         <p:nvSpPr>
-          <p:cNvPr name="TextBox 5" id="5"/>
-          <p:cNvSpPr txBox="true"/>
+          <p:cNvPr id="5" name="TextBox 5"/>
+          <p:cNvSpPr txBox="1"/>
           <p:nvPr/>
         </p:nvSpPr>
         <p:spPr>
-          <a:xfrm rot="0">
+          <a:xfrm>
             <a:off x="1028700" y="981075"/>
             <a:ext cx="8091140" cy="389297"/>
           </a:xfrm>
@@ -5029,12 +4963,12 @@
           </a:prstGeom>
         </p:spPr>
         <p:txBody>
-          <a:bodyPr anchor="t" rtlCol="false" tIns="0" lIns="0" bIns="0" rIns="0">
+          <a:bodyPr lIns="0" tIns="0" rIns="0" bIns="0" rtlCol="0" anchor="t">
             <a:spAutoFit/>
           </a:bodyPr>
           <a:lstStyle/>
           <a:p>
-            <a:pPr algn="l" marL="0" indent="0" lvl="0">
+            <a:pPr marL="0" lvl="0" indent="0" algn="l">
               <a:lnSpc>
                 <a:spcPts val="3217"/>
               </a:lnSpc>
@@ -5043,7 +4977,7 @@
               </a:spcBef>
             </a:pPr>
             <a:r>
-              <a:rPr lang="en-US" b="true" sz="2298">
+              <a:rPr lang="en-US" sz="2298" b="1">
                 <a:solidFill>
                   <a:srgbClr val="36211B"/>
                 </a:solidFill>
@@ -5066,13 +5000,14 @@
 </file>
 
 <file path=ppt/slides/slide15.xml><?xml version="1.0" encoding="utf-8"?>
-<p:sld xmlns:p="http://schemas.openxmlformats.org/presentationml/2006/main" xmlns:a="http://schemas.openxmlformats.org/drawingml/2006/main" xmlns:r="http://schemas.openxmlformats.org/officeDocument/2006/relationships">
+<p:sld xmlns:a="http://schemas.openxmlformats.org/drawingml/2006/main" xmlns:r="http://schemas.openxmlformats.org/officeDocument/2006/relationships" xmlns:p="http://schemas.openxmlformats.org/presentationml/2006/main">
   <p:cSld>
     <p:bg>
       <p:bgPr>
         <a:solidFill>
           <a:srgbClr val="E8E6E3"/>
         </a:solidFill>
+        <a:effectLst/>
       </p:bgPr>
     </p:bg>
     <p:spTree>
@@ -5091,12 +5026,12 @@
       </p:grpSpPr>
       <p:sp>
         <p:nvSpPr>
-          <p:cNvPr name="AutoShape 2" id="2"/>
+          <p:cNvPr id="2" name="AutoShape 2"/>
           <p:cNvSpPr/>
           <p:nvPr/>
         </p:nvSpPr>
         <p:spPr>
-          <a:xfrm rot="0">
+          <a:xfrm>
             <a:off x="1028700" y="1515576"/>
             <a:ext cx="16230600" cy="64082"/>
           </a:xfrm>
@@ -5110,12 +5045,12 @@
       </p:sp>
       <p:sp>
         <p:nvSpPr>
-          <p:cNvPr name="Freeform 3" id="3"/>
+          <p:cNvPr id="3" name="Freeform 3"/>
           <p:cNvSpPr/>
           <p:nvPr/>
         </p:nvSpPr>
         <p:spPr>
-          <a:xfrm flipH="false" flipV="false" rot="0">
+          <a:xfrm>
             <a:off x="3493371" y="3223131"/>
             <a:ext cx="11301259" cy="5353971"/>
           </a:xfrm>
@@ -5124,9 +5059,9 @@
             <a:gdLst/>
             <a:ahLst/>
             <a:cxnLst/>
-            <a:rect r="r" b="b" t="t" l="l"/>
+            <a:rect l="l" t="t" r="r" b="b"/>
             <a:pathLst>
-              <a:path h="5353971" w="11301259">
+              <a:path w="11301259" h="5353971">
                 <a:moveTo>
                   <a:pt x="0" y="0"/>
                 </a:moveTo>
@@ -5149,19 +5084,19 @@
           <a:blipFill>
             <a:blip r:embed="rId2"/>
             <a:stretch>
-              <a:fillRect l="0" t="0" r="0" b="0"/>
+              <a:fillRect/>
             </a:stretch>
           </a:blipFill>
         </p:spPr>
       </p:sp>
       <p:sp>
         <p:nvSpPr>
-          <p:cNvPr name="TextBox 4" id="4"/>
-          <p:cNvSpPr txBox="true"/>
+          <p:cNvPr id="4" name="TextBox 4"/>
+          <p:cNvSpPr txBox="1"/>
           <p:nvPr/>
         </p:nvSpPr>
         <p:spPr>
-          <a:xfrm rot="0">
+          <a:xfrm>
             <a:off x="1028700" y="1800560"/>
             <a:ext cx="14034598" cy="955845"/>
           </a:xfrm>
@@ -5170,12 +5105,12 @@
           </a:prstGeom>
         </p:spPr>
         <p:txBody>
-          <a:bodyPr anchor="t" rtlCol="false" tIns="0" lIns="0" bIns="0" rIns="0">
+          <a:bodyPr lIns="0" tIns="0" rIns="0" bIns="0" rtlCol="0" anchor="t">
             <a:spAutoFit/>
           </a:bodyPr>
           <a:lstStyle/>
           <a:p>
-            <a:pPr algn="l" marL="0" indent="0" lvl="0">
+            <a:pPr marL="0" lvl="0" indent="0" algn="l">
               <a:lnSpc>
                 <a:spcPts val="7686"/>
               </a:lnSpc>
@@ -5197,12 +5132,12 @@
       </p:sp>
       <p:sp>
         <p:nvSpPr>
-          <p:cNvPr name="TextBox 5" id="5"/>
-          <p:cNvSpPr txBox="true"/>
+          <p:cNvPr id="5" name="TextBox 5"/>
+          <p:cNvSpPr txBox="1"/>
           <p:nvPr/>
         </p:nvSpPr>
         <p:spPr>
-          <a:xfrm rot="0">
+          <a:xfrm>
             <a:off x="1028700" y="981075"/>
             <a:ext cx="8091140" cy="389297"/>
           </a:xfrm>
@@ -5211,12 +5146,12 @@
           </a:prstGeom>
         </p:spPr>
         <p:txBody>
-          <a:bodyPr anchor="t" rtlCol="false" tIns="0" lIns="0" bIns="0" rIns="0">
+          <a:bodyPr lIns="0" tIns="0" rIns="0" bIns="0" rtlCol="0" anchor="t">
             <a:spAutoFit/>
           </a:bodyPr>
           <a:lstStyle/>
           <a:p>
-            <a:pPr algn="l" marL="0" indent="0" lvl="0">
+            <a:pPr marL="0" lvl="0" indent="0" algn="l">
               <a:lnSpc>
                 <a:spcPts val="3217"/>
               </a:lnSpc>
@@ -5225,7 +5160,7 @@
               </a:spcBef>
             </a:pPr>
             <a:r>
-              <a:rPr lang="en-US" b="true" sz="2298">
+              <a:rPr lang="en-US" sz="2298" b="1">
                 <a:solidFill>
                   <a:srgbClr val="36211B"/>
                 </a:solidFill>
@@ -5234,19 +5169,7 @@
                 <a:cs typeface="Canva Sans Bold"/>
                 <a:sym typeface="Canva Sans Bold"/>
               </a:rPr>
-              <a:t>Login </a:t>
-            </a:r>
-            <a:r>
-              <a:rPr lang="en-US" b="true" sz="2298">
-                <a:solidFill>
-                  <a:srgbClr val="36211B"/>
-                </a:solidFill>
-                <a:latin typeface="Canva Sans Bold"/>
-                <a:ea typeface="Canva Sans Bold"/>
-                <a:cs typeface="Canva Sans Bold"/>
-                <a:sym typeface="Canva Sans Bold"/>
-              </a:rPr>
-              <a:t>Page</a:t>
+              <a:t>Login Page</a:t>
             </a:r>
           </a:p>
         </p:txBody>
@@ -5260,13 +5183,14 @@
 </file>
 
 <file path=ppt/slides/slide16.xml><?xml version="1.0" encoding="utf-8"?>
-<p:sld xmlns:p="http://schemas.openxmlformats.org/presentationml/2006/main" xmlns:a="http://schemas.openxmlformats.org/drawingml/2006/main" xmlns:r="http://schemas.openxmlformats.org/officeDocument/2006/relationships">
+<p:sld xmlns:a="http://schemas.openxmlformats.org/drawingml/2006/main" xmlns:r="http://schemas.openxmlformats.org/officeDocument/2006/relationships" xmlns:p="http://schemas.openxmlformats.org/presentationml/2006/main">
   <p:cSld>
     <p:bg>
       <p:bgPr>
         <a:solidFill>
           <a:srgbClr val="E8E6E3"/>
         </a:solidFill>
+        <a:effectLst/>
       </p:bgPr>
     </p:bg>
     <p:spTree>
@@ -5285,12 +5209,12 @@
       </p:grpSpPr>
       <p:sp>
         <p:nvSpPr>
-          <p:cNvPr name="AutoShape 2" id="2"/>
+          <p:cNvPr id="2" name="AutoShape 2"/>
           <p:cNvSpPr/>
           <p:nvPr/>
         </p:nvSpPr>
         <p:spPr>
-          <a:xfrm rot="0">
+          <a:xfrm>
             <a:off x="1028700" y="1515576"/>
             <a:ext cx="16230600" cy="64082"/>
           </a:xfrm>
@@ -5304,12 +5228,12 @@
       </p:sp>
       <p:sp>
         <p:nvSpPr>
-          <p:cNvPr name="Freeform 3" id="3"/>
+          <p:cNvPr id="3" name="Freeform 3"/>
           <p:cNvSpPr/>
           <p:nvPr/>
         </p:nvSpPr>
         <p:spPr>
-          <a:xfrm flipH="false" flipV="false" rot="0">
+          <a:xfrm>
             <a:off x="3762039" y="4183560"/>
             <a:ext cx="11301259" cy="5537617"/>
           </a:xfrm>
@@ -5318,9 +5242,9 @@
             <a:gdLst/>
             <a:ahLst/>
             <a:cxnLst/>
-            <a:rect r="r" b="b" t="t" l="l"/>
+            <a:rect l="l" t="t" r="r" b="b"/>
             <a:pathLst>
-              <a:path h="5537617" w="11301259">
+              <a:path w="11301259" h="5537617">
                 <a:moveTo>
                   <a:pt x="0" y="0"/>
                 </a:moveTo>
@@ -5343,19 +5267,19 @@
           <a:blipFill>
             <a:blip r:embed="rId2"/>
             <a:stretch>
-              <a:fillRect l="0" t="0" r="0" b="0"/>
+              <a:fillRect/>
             </a:stretch>
           </a:blipFill>
         </p:spPr>
       </p:sp>
       <p:sp>
         <p:nvSpPr>
-          <p:cNvPr name="TextBox 4" id="4"/>
-          <p:cNvSpPr txBox="true"/>
+          <p:cNvPr id="4" name="TextBox 4"/>
+          <p:cNvSpPr txBox="1"/>
           <p:nvPr/>
         </p:nvSpPr>
         <p:spPr>
-          <a:xfrm rot="0">
+          <a:xfrm>
             <a:off x="1028700" y="1800560"/>
             <a:ext cx="14034598" cy="955845"/>
           </a:xfrm>
@@ -5364,12 +5288,12 @@
           </a:prstGeom>
         </p:spPr>
         <p:txBody>
-          <a:bodyPr anchor="t" rtlCol="false" tIns="0" lIns="0" bIns="0" rIns="0">
+          <a:bodyPr lIns="0" tIns="0" rIns="0" bIns="0" rtlCol="0" anchor="t">
             <a:spAutoFit/>
           </a:bodyPr>
           <a:lstStyle/>
           <a:p>
-            <a:pPr algn="l" marL="0" indent="0" lvl="0">
+            <a:pPr marL="0" lvl="0" indent="0" algn="l">
               <a:lnSpc>
                 <a:spcPts val="7686"/>
               </a:lnSpc>
@@ -5391,12 +5315,12 @@
       </p:sp>
       <p:sp>
         <p:nvSpPr>
-          <p:cNvPr name="TextBox 5" id="5"/>
-          <p:cNvSpPr txBox="true"/>
+          <p:cNvPr id="5" name="TextBox 5"/>
+          <p:cNvSpPr txBox="1"/>
           <p:nvPr/>
         </p:nvSpPr>
         <p:spPr>
-          <a:xfrm rot="0">
+          <a:xfrm>
             <a:off x="1028700" y="981075"/>
             <a:ext cx="8091140" cy="389297"/>
           </a:xfrm>
@@ -5405,12 +5329,12 @@
           </a:prstGeom>
         </p:spPr>
         <p:txBody>
-          <a:bodyPr anchor="t" rtlCol="false" tIns="0" lIns="0" bIns="0" rIns="0">
+          <a:bodyPr lIns="0" tIns="0" rIns="0" bIns="0" rtlCol="0" anchor="t">
             <a:spAutoFit/>
           </a:bodyPr>
           <a:lstStyle/>
           <a:p>
-            <a:pPr algn="l" marL="0" indent="0" lvl="0">
+            <a:pPr marL="0" lvl="0" indent="0" algn="l">
               <a:lnSpc>
                 <a:spcPts val="3217"/>
               </a:lnSpc>
@@ -5419,7 +5343,7 @@
               </a:spcBef>
             </a:pPr>
             <a:r>
-              <a:rPr lang="en-US" b="true" sz="2298">
+              <a:rPr lang="en-US" sz="2298" b="1">
                 <a:solidFill>
                   <a:srgbClr val="36211B"/>
                 </a:solidFill>
@@ -5428,19 +5352,7 @@
                 <a:cs typeface="Canva Sans Bold"/>
                 <a:sym typeface="Canva Sans Bold"/>
               </a:rPr>
-              <a:t>Contact Us </a:t>
-            </a:r>
-            <a:r>
-              <a:rPr lang="en-US" b="true" sz="2298">
-                <a:solidFill>
-                  <a:srgbClr val="36211B"/>
-                </a:solidFill>
-                <a:latin typeface="Canva Sans Bold"/>
-                <a:ea typeface="Canva Sans Bold"/>
-                <a:cs typeface="Canva Sans Bold"/>
-                <a:sym typeface="Canva Sans Bold"/>
-              </a:rPr>
-              <a:t>Page</a:t>
+              <a:t>Contact Us Page</a:t>
             </a:r>
           </a:p>
         </p:txBody>
@@ -5454,13 +5366,14 @@
 </file>
 
 <file path=ppt/slides/slide17.xml><?xml version="1.0" encoding="utf-8"?>
-<p:sld xmlns:p="http://schemas.openxmlformats.org/presentationml/2006/main" xmlns:a="http://schemas.openxmlformats.org/drawingml/2006/main" xmlns:r="http://schemas.openxmlformats.org/officeDocument/2006/relationships">
+<p:sld xmlns:a="http://schemas.openxmlformats.org/drawingml/2006/main" xmlns:r="http://schemas.openxmlformats.org/officeDocument/2006/relationships" xmlns:p="http://schemas.openxmlformats.org/presentationml/2006/main">
   <p:cSld>
     <p:bg>
       <p:bgPr>
         <a:solidFill>
           <a:srgbClr val="E8E6E3"/>
         </a:solidFill>
+        <a:effectLst/>
       </p:bgPr>
     </p:bg>
     <p:spTree>
@@ -5479,12 +5392,12 @@
       </p:grpSpPr>
       <p:sp>
         <p:nvSpPr>
-          <p:cNvPr name="AutoShape 2" id="2"/>
+          <p:cNvPr id="2" name="AutoShape 2"/>
           <p:cNvSpPr/>
           <p:nvPr/>
         </p:nvSpPr>
         <p:spPr>
-          <a:xfrm rot="0">
+          <a:xfrm>
             <a:off x="1028700" y="1515576"/>
             <a:ext cx="16230600" cy="64082"/>
           </a:xfrm>
@@ -5498,12 +5411,12 @@
       </p:sp>
       <p:sp>
         <p:nvSpPr>
-          <p:cNvPr name="Freeform 3" id="3"/>
+          <p:cNvPr id="3" name="Freeform 3"/>
           <p:cNvSpPr/>
           <p:nvPr/>
         </p:nvSpPr>
         <p:spPr>
-          <a:xfrm flipH="false" flipV="false" rot="0">
+          <a:xfrm>
             <a:off x="3762039" y="3570115"/>
             <a:ext cx="11301259" cy="5424604"/>
           </a:xfrm>
@@ -5512,9 +5425,9 @@
             <a:gdLst/>
             <a:ahLst/>
             <a:cxnLst/>
-            <a:rect r="r" b="b" t="t" l="l"/>
+            <a:rect l="l" t="t" r="r" b="b"/>
             <a:pathLst>
-              <a:path h="5424604" w="11301259">
+              <a:path w="11301259" h="5424604">
                 <a:moveTo>
                   <a:pt x="0" y="0"/>
                 </a:moveTo>
@@ -5537,19 +5450,19 @@
           <a:blipFill>
             <a:blip r:embed="rId2"/>
             <a:stretch>
-              <a:fillRect l="0" t="0" r="0" b="0"/>
+              <a:fillRect/>
             </a:stretch>
           </a:blipFill>
         </p:spPr>
       </p:sp>
       <p:sp>
         <p:nvSpPr>
-          <p:cNvPr name="TextBox 4" id="4"/>
-          <p:cNvSpPr txBox="true"/>
+          <p:cNvPr id="4" name="TextBox 4"/>
+          <p:cNvSpPr txBox="1"/>
           <p:nvPr/>
         </p:nvSpPr>
         <p:spPr>
-          <a:xfrm rot="0">
+          <a:xfrm>
             <a:off x="1028700" y="1800560"/>
             <a:ext cx="14034598" cy="955845"/>
           </a:xfrm>
@@ -5558,12 +5471,12 @@
           </a:prstGeom>
         </p:spPr>
         <p:txBody>
-          <a:bodyPr anchor="t" rtlCol="false" tIns="0" lIns="0" bIns="0" rIns="0">
+          <a:bodyPr lIns="0" tIns="0" rIns="0" bIns="0" rtlCol="0" anchor="t">
             <a:spAutoFit/>
           </a:bodyPr>
           <a:lstStyle/>
           <a:p>
-            <a:pPr algn="l" marL="0" indent="0" lvl="0">
+            <a:pPr marL="0" lvl="0" indent="0" algn="l">
               <a:lnSpc>
                 <a:spcPts val="7686"/>
               </a:lnSpc>
@@ -5585,12 +5498,12 @@
       </p:sp>
       <p:sp>
         <p:nvSpPr>
-          <p:cNvPr name="TextBox 5" id="5"/>
-          <p:cNvSpPr txBox="true"/>
+          <p:cNvPr id="5" name="TextBox 5"/>
+          <p:cNvSpPr txBox="1"/>
           <p:nvPr/>
         </p:nvSpPr>
         <p:spPr>
-          <a:xfrm rot="0">
+          <a:xfrm>
             <a:off x="1028700" y="981075"/>
             <a:ext cx="8091140" cy="389297"/>
           </a:xfrm>
@@ -5599,12 +5512,12 @@
           </a:prstGeom>
         </p:spPr>
         <p:txBody>
-          <a:bodyPr anchor="t" rtlCol="false" tIns="0" lIns="0" bIns="0" rIns="0">
+          <a:bodyPr lIns="0" tIns="0" rIns="0" bIns="0" rtlCol="0" anchor="t">
             <a:spAutoFit/>
           </a:bodyPr>
           <a:lstStyle/>
           <a:p>
-            <a:pPr algn="l" marL="0" indent="0" lvl="0">
+            <a:pPr marL="0" lvl="0" indent="0" algn="l">
               <a:lnSpc>
                 <a:spcPts val="3217"/>
               </a:lnSpc>
@@ -5613,7 +5526,7 @@
               </a:spcBef>
             </a:pPr>
             <a:r>
-              <a:rPr lang="en-US" b="true" sz="2298">
+              <a:rPr lang="en-US" sz="2298" b="1">
                 <a:solidFill>
                   <a:srgbClr val="36211B"/>
                 </a:solidFill>
@@ -5622,19 +5535,7 @@
                 <a:cs typeface="Canva Sans Bold"/>
                 <a:sym typeface="Canva Sans Bold"/>
               </a:rPr>
-              <a:t>Bloom skin Guide  </a:t>
-            </a:r>
-            <a:r>
-              <a:rPr lang="en-US" b="true" sz="2298">
-                <a:solidFill>
-                  <a:srgbClr val="36211B"/>
-                </a:solidFill>
-                <a:latin typeface="Canva Sans Bold"/>
-                <a:ea typeface="Canva Sans Bold"/>
-                <a:cs typeface="Canva Sans Bold"/>
-                <a:sym typeface="Canva Sans Bold"/>
-              </a:rPr>
-              <a:t>Page</a:t>
+              <a:t>Bloom skin Guide  Page</a:t>
             </a:r>
           </a:p>
         </p:txBody>
@@ -5648,13 +5549,14 @@
 </file>
 
 <file path=ppt/slides/slide18.xml><?xml version="1.0" encoding="utf-8"?>
-<p:sld xmlns:p="http://schemas.openxmlformats.org/presentationml/2006/main" xmlns:a="http://schemas.openxmlformats.org/drawingml/2006/main" xmlns:r="http://schemas.openxmlformats.org/officeDocument/2006/relationships">
+<p:sld xmlns:a="http://schemas.openxmlformats.org/drawingml/2006/main" xmlns:r="http://schemas.openxmlformats.org/officeDocument/2006/relationships" xmlns:p="http://schemas.openxmlformats.org/presentationml/2006/main">
   <p:cSld>
     <p:bg>
       <p:bgPr>
         <a:solidFill>
           <a:srgbClr val="E8E6E3"/>
         </a:solidFill>
+        <a:effectLst/>
       </p:bgPr>
     </p:bg>
     <p:spTree>
@@ -5673,12 +5575,12 @@
       </p:grpSpPr>
       <p:sp>
         <p:nvSpPr>
-          <p:cNvPr name="Freeform 2" id="2"/>
+          <p:cNvPr id="2" name="Freeform 2"/>
           <p:cNvSpPr/>
           <p:nvPr/>
         </p:nvSpPr>
         <p:spPr>
-          <a:xfrm flipH="false" flipV="false" rot="0">
+          <a:xfrm>
             <a:off x="0" y="0"/>
             <a:ext cx="18288000" cy="376223"/>
           </a:xfrm>
@@ -5687,9 +5589,9 @@
             <a:gdLst/>
             <a:ahLst/>
             <a:cxnLst/>
-            <a:rect r="r" b="b" t="t" l="l"/>
+            <a:rect l="l" t="t" r="r" b="b"/>
             <a:pathLst>
-              <a:path h="376223" w="18288000">
+              <a:path w="18288000" h="376223">
                 <a:moveTo>
                   <a:pt x="0" y="0"/>
                 </a:moveTo>
@@ -5712,19 +5614,19 @@
           <a:blipFill>
             <a:blip r:embed="rId2"/>
             <a:stretch>
-              <a:fillRect l="0" t="-1531929" r="0" b="-1102351"/>
+              <a:fillRect t="-1531929" b="-1102351"/>
             </a:stretch>
           </a:blipFill>
         </p:spPr>
       </p:sp>
       <p:sp>
         <p:nvSpPr>
-          <p:cNvPr name="TextBox 3" id="3"/>
-          <p:cNvSpPr txBox="true"/>
+          <p:cNvPr id="3" name="TextBox 3"/>
+          <p:cNvSpPr txBox="1"/>
           <p:nvPr/>
         </p:nvSpPr>
         <p:spPr>
-          <a:xfrm rot="0">
+          <a:xfrm>
             <a:off x="1028700" y="1302816"/>
             <a:ext cx="16230600" cy="1094740"/>
           </a:xfrm>
@@ -5733,7 +5635,7 @@
           </a:prstGeom>
         </p:spPr>
         <p:txBody>
-          <a:bodyPr anchor="t" rtlCol="false" tIns="0" lIns="0" bIns="0" rIns="0">
+          <a:bodyPr lIns="0" tIns="0" rIns="0" bIns="0" rtlCol="0" anchor="t">
             <a:spAutoFit/>
           </a:bodyPr>
           <a:lstStyle/>
@@ -5760,12 +5662,12 @@
       </p:sp>
       <p:sp>
         <p:nvSpPr>
-          <p:cNvPr name="TextBox 4" id="4"/>
-          <p:cNvSpPr txBox="true"/>
+          <p:cNvPr id="4" name="TextBox 4"/>
+          <p:cNvSpPr txBox="1"/>
           <p:nvPr/>
         </p:nvSpPr>
         <p:spPr>
-          <a:xfrm rot="0">
+          <a:xfrm>
             <a:off x="1475258" y="3502025"/>
             <a:ext cx="15147141" cy="5941060"/>
           </a:xfrm>
@@ -5774,12 +5676,12 @@
           </a:prstGeom>
         </p:spPr>
         <p:txBody>
-          <a:bodyPr anchor="t" rtlCol="false" tIns="0" lIns="0" bIns="0" rIns="0">
+          <a:bodyPr lIns="0" tIns="0" rIns="0" bIns="0" rtlCol="0" anchor="t">
             <a:spAutoFit/>
           </a:bodyPr>
           <a:lstStyle/>
           <a:p>
-            <a:pPr algn="just" marL="669286" indent="-334643" lvl="1">
+            <a:pPr marL="669286" lvl="1" indent="-334643" algn="just">
               <a:lnSpc>
                 <a:spcPts val="4339"/>
               </a:lnSpc>
@@ -5787,7 +5689,7 @@
               <a:buChar char="•"/>
             </a:pPr>
             <a:r>
-              <a:rPr lang="en-US" b="true" sz="3099">
+              <a:rPr lang="en-US" sz="3099" b="1">
                 <a:solidFill>
                   <a:srgbClr val="36211B"/>
                 </a:solidFill>
@@ -5796,23 +5698,11 @@
                 <a:cs typeface="Canva Sans Bold"/>
                 <a:sym typeface="Canva Sans Bold"/>
               </a:rPr>
-              <a:t>Advanced Condition Dete</a:t>
-            </a:r>
-            <a:r>
-              <a:rPr lang="en-US" b="true" sz="3099">
-                <a:solidFill>
-                  <a:srgbClr val="36211B"/>
-                </a:solidFill>
-                <a:latin typeface="Canva Sans Bold"/>
-                <a:ea typeface="Canva Sans Bold"/>
-                <a:cs typeface="Canva Sans Bold"/>
-                <a:sym typeface="Canva Sans Bold"/>
-              </a:rPr>
-              <a:t>ction: Expand the model to recognize a wider range of dermatological conditions, including moles, rosacea, and eczema.</a:t>
-            </a:r>
-          </a:p>
-          <a:p>
-            <a:pPr algn="just" marL="669286" indent="-334643" lvl="1">
+              <a:t>Advanced Condition Detection: Expand the model to recognize a wider range of dermatological conditions, including moles, rosacea, and eczema.</a:t>
+            </a:r>
+          </a:p>
+          <a:p>
+            <a:pPr marL="669286" lvl="1" indent="-334643" algn="just">
               <a:lnSpc>
                 <a:spcPts val="4339"/>
               </a:lnSpc>
@@ -5820,7 +5710,7 @@
               <a:buChar char="•"/>
             </a:pPr>
             <a:r>
-              <a:rPr lang="en-US" b="true" sz="3099">
+              <a:rPr lang="en-US" sz="3099" b="1">
                 <a:solidFill>
                   <a:srgbClr val="36211B"/>
                 </a:solidFill>
@@ -5829,35 +5719,11 @@
                 <a:cs typeface="Canva Sans Bold"/>
                 <a:sym typeface="Canva Sans Bold"/>
               </a:rPr>
-              <a:t>Progress Tracking: Allow users to upload images over time to create a visual timeline of their skin's h</a:t>
-            </a:r>
-            <a:r>
-              <a:rPr lang="en-US" b="true" sz="3099">
-                <a:solidFill>
-                  <a:srgbClr val="36211B"/>
-                </a:solidFill>
-                <a:latin typeface="Canva Sans Bold"/>
-                <a:ea typeface="Canva Sans Bold"/>
-                <a:cs typeface="Canva Sans Bold"/>
-                <a:sym typeface="Canva Sans Bold"/>
-              </a:rPr>
-              <a:t>ealth a</a:t>
-            </a:r>
-            <a:r>
-              <a:rPr lang="en-US" b="true" sz="3099">
-                <a:solidFill>
-                  <a:srgbClr val="36211B"/>
-                </a:solidFill>
-                <a:latin typeface="Canva Sans Bold"/>
-                <a:ea typeface="Canva Sans Bold"/>
-                <a:cs typeface="Canva Sans Bold"/>
-                <a:sym typeface="Canva Sans Bold"/>
-              </a:rPr>
-              <a:t>nd track the effectiveness of their routine.</a:t>
-            </a:r>
-          </a:p>
-          <a:p>
-            <a:pPr algn="just" marL="669286" indent="-334643" lvl="1">
+              <a:t>Progress Tracking: Allow users to upload images over time to create a visual timeline of their skin's health and track the effectiveness of their routine.</a:t>
+            </a:r>
+          </a:p>
+          <a:p>
+            <a:pPr marL="669286" lvl="1" indent="-334643" algn="just">
               <a:lnSpc>
                 <a:spcPts val="4339"/>
               </a:lnSpc>
@@ -5865,7 +5731,7 @@
               <a:buChar char="•"/>
             </a:pPr>
             <a:r>
-              <a:rPr lang="en-US" b="true" sz="3099">
+              <a:rPr lang="en-US" sz="3099" b="1">
                 <a:solidFill>
                   <a:srgbClr val="36211B"/>
                 </a:solidFill>
@@ -5874,23 +5740,11 @@
                 <a:cs typeface="Canva Sans Bold"/>
                 <a:sym typeface="Canva Sans Bold"/>
               </a:rPr>
-              <a:t>Personalised Product Recommendations: Integrate with e-commerce APIs to suggest specific, t</a:t>
-            </a:r>
-            <a:r>
-              <a:rPr lang="en-US" b="true" sz="3099">
-                <a:solidFill>
-                  <a:srgbClr val="36211B"/>
-                </a:solidFill>
-                <a:latin typeface="Canva Sans Bold"/>
-                <a:ea typeface="Canva Sans Bold"/>
-                <a:cs typeface="Canva Sans Bold"/>
-                <a:sym typeface="Canva Sans Bold"/>
-              </a:rPr>
-              <a:t>op-rated skincare products based on the analysis results.</a:t>
-            </a:r>
-          </a:p>
-          <a:p>
-            <a:pPr algn="just" marL="669286" indent="-334643" lvl="1">
+              <a:t>Personalised Product Recommendations: Integrate with e-commerce APIs to suggest specific, top-rated skincare products based on the analysis results.</a:t>
+            </a:r>
+          </a:p>
+          <a:p>
+            <a:pPr marL="669286" lvl="1" indent="-334643" algn="just">
               <a:lnSpc>
                 <a:spcPts val="4339"/>
               </a:lnSpc>
@@ -5898,7 +5752,7 @@
               <a:buChar char="•"/>
             </a:pPr>
             <a:r>
-              <a:rPr lang="en-US" b="true" sz="3099">
+              <a:rPr lang="en-US" sz="3099" b="1">
                 <a:solidFill>
                   <a:srgbClr val="36211B"/>
                 </a:solidFill>
@@ -5907,19 +5761,7 @@
                 <a:cs typeface="Canva Sans Bold"/>
                 <a:sym typeface="Canva Sans Bold"/>
               </a:rPr>
-              <a:t>T</a:t>
-            </a:r>
-            <a:r>
-              <a:rPr lang="en-US" b="true" sz="3099">
-                <a:solidFill>
-                  <a:srgbClr val="36211B"/>
-                </a:solidFill>
-                <a:latin typeface="Canva Sans Bold"/>
-                <a:ea typeface="Canva Sans Bold"/>
-                <a:cs typeface="Canva Sans Bold"/>
-                <a:sym typeface="Canva Sans Bold"/>
-              </a:rPr>
-              <a:t>ele-Dermatology Link: Create a feature to connect users with certified dermatologists for a professional consultation directly through the platform.</a:t>
+              <a:t>Tele-Dermatology Link: Create a feature to connect users with certified dermatologists for a professional consultation directly through the platform.</a:t>
             </a:r>
           </a:p>
           <a:p>
@@ -5928,6 +5770,15 @@
                 <a:spcPts val="4339"/>
               </a:lnSpc>
             </a:pPr>
+            <a:endParaRPr lang="en-US" sz="3099" b="1">
+              <a:solidFill>
+                <a:srgbClr val="36211B"/>
+              </a:solidFill>
+              <a:latin typeface="Canva Sans Bold"/>
+              <a:ea typeface="Canva Sans Bold"/>
+              <a:cs typeface="Canva Sans Bold"/>
+              <a:sym typeface="Canva Sans Bold"/>
+            </a:endParaRPr>
           </a:p>
         </p:txBody>
       </p:sp>
@@ -5940,13 +5791,14 @@
 </file>
 
 <file path=ppt/slides/slide19.xml><?xml version="1.0" encoding="utf-8"?>
-<p:sld xmlns:p="http://schemas.openxmlformats.org/presentationml/2006/main" xmlns:a="http://schemas.openxmlformats.org/drawingml/2006/main" xmlns:r="http://schemas.openxmlformats.org/officeDocument/2006/relationships">
+<p:sld xmlns:a="http://schemas.openxmlformats.org/drawingml/2006/main" xmlns:r="http://schemas.openxmlformats.org/officeDocument/2006/relationships" xmlns:p="http://schemas.openxmlformats.org/presentationml/2006/main">
   <p:cSld>
     <p:bg>
       <p:bgPr>
         <a:solidFill>
           <a:srgbClr val="E8E6E3"/>
         </a:solidFill>
+        <a:effectLst/>
       </p:bgPr>
     </p:bg>
     <p:spTree>
@@ -5965,12 +5817,12 @@
       </p:grpSpPr>
       <p:sp>
         <p:nvSpPr>
-          <p:cNvPr name="Freeform 2" id="2"/>
+          <p:cNvPr id="2" name="Freeform 2"/>
           <p:cNvSpPr/>
           <p:nvPr/>
         </p:nvSpPr>
         <p:spPr>
-          <a:xfrm flipH="false" flipV="false" rot="0">
+          <a:xfrm>
             <a:off x="0" y="9910777"/>
             <a:ext cx="18288000" cy="376223"/>
           </a:xfrm>
@@ -5979,9 +5831,9 @@
             <a:gdLst/>
             <a:ahLst/>
             <a:cxnLst/>
-            <a:rect r="r" b="b" t="t" l="l"/>
+            <a:rect l="l" t="t" r="r" b="b"/>
             <a:pathLst>
-              <a:path h="376223" w="18288000">
+              <a:path w="18288000" h="376223">
                 <a:moveTo>
                   <a:pt x="0" y="0"/>
                 </a:moveTo>
@@ -6004,19 +5856,19 @@
           <a:blipFill>
             <a:blip r:embed="rId2"/>
             <a:stretch>
-              <a:fillRect l="0" t="-1531929" r="0" b="-1102351"/>
+              <a:fillRect t="-1531929" b="-1102351"/>
             </a:stretch>
           </a:blipFill>
         </p:spPr>
       </p:sp>
       <p:sp>
         <p:nvSpPr>
-          <p:cNvPr name="TextBox 3" id="3"/>
-          <p:cNvSpPr txBox="true"/>
+          <p:cNvPr id="3" name="TextBox 3"/>
+          <p:cNvSpPr txBox="1"/>
           <p:nvPr/>
         </p:nvSpPr>
         <p:spPr>
-          <a:xfrm rot="0">
+          <a:xfrm>
             <a:off x="1181100" y="1455216"/>
             <a:ext cx="16230600" cy="1094740"/>
           </a:xfrm>
@@ -6025,7 +5877,7 @@
           </a:prstGeom>
         </p:spPr>
         <p:txBody>
-          <a:bodyPr anchor="t" rtlCol="false" tIns="0" lIns="0" bIns="0" rIns="0">
+          <a:bodyPr lIns="0" tIns="0" rIns="0" bIns="0" rtlCol="0" anchor="t">
             <a:spAutoFit/>
           </a:bodyPr>
           <a:lstStyle/>
@@ -6052,12 +5904,12 @@
       </p:sp>
       <p:sp>
         <p:nvSpPr>
-          <p:cNvPr name="TextBox 4" id="4"/>
-          <p:cNvSpPr txBox="true"/>
+          <p:cNvPr id="4" name="TextBox 4"/>
+          <p:cNvSpPr txBox="1"/>
           <p:nvPr/>
         </p:nvSpPr>
         <p:spPr>
-          <a:xfrm rot="0">
+          <a:xfrm>
             <a:off x="1475258" y="3502025"/>
             <a:ext cx="15147141" cy="4855210"/>
           </a:xfrm>
@@ -6066,12 +5918,12 @@
           </a:prstGeom>
         </p:spPr>
         <p:txBody>
-          <a:bodyPr anchor="t" rtlCol="false" tIns="0" lIns="0" bIns="0" rIns="0">
+          <a:bodyPr lIns="0" tIns="0" rIns="0" bIns="0" rtlCol="0" anchor="t">
             <a:spAutoFit/>
           </a:bodyPr>
           <a:lstStyle/>
           <a:p>
-            <a:pPr algn="just" marL="669286" indent="-334643" lvl="1">
+            <a:pPr marL="669286" lvl="1" indent="-334643" algn="just">
               <a:lnSpc>
                 <a:spcPts val="4339"/>
               </a:lnSpc>
@@ -6079,7 +5931,7 @@
               <a:buChar char="•"/>
             </a:pPr>
             <a:r>
-              <a:rPr lang="en-US" b="true" sz="3099">
+              <a:rPr lang="en-US" sz="3099" b="1">
                 <a:solidFill>
                   <a:srgbClr val="36211B"/>
                 </a:solidFill>
@@ -6088,23 +5940,11 @@
                 <a:cs typeface="Canva Sans Bold"/>
                 <a:sym typeface="Canva Sans Bold"/>
               </a:rPr>
-              <a:t>The MobileNe</a:t>
-            </a:r>
-            <a:r>
-              <a:rPr lang="en-US" b="true" sz="3099">
-                <a:solidFill>
-                  <a:srgbClr val="36211B"/>
-                </a:solidFill>
-                <a:latin typeface="Canva Sans Bold"/>
-                <a:ea typeface="Canva Sans Bold"/>
-                <a:cs typeface="Canva Sans Bold"/>
-                <a:sym typeface="Canva Sans Bold"/>
-              </a:rPr>
-              <a:t>tV2 model achieved around 85% accuracy in identifying acne, dark spots, and pimples on the validation dataset.</a:t>
-            </a:r>
-          </a:p>
-          <a:p>
-            <a:pPr algn="just" marL="669286" indent="-334643" lvl="1">
+              <a:t>The MobileNetV2 model achieved around 85% accuracy in identifying acne, dark spots, and pimples on the validation dataset.</a:t>
+            </a:r>
+          </a:p>
+          <a:p>
+            <a:pPr marL="669286" lvl="1" indent="-334643" algn="just">
               <a:lnSpc>
                 <a:spcPts val="4339"/>
               </a:lnSpc>
@@ -6112,7 +5952,7 @@
               <a:buChar char="•"/>
             </a:pPr>
             <a:r>
-              <a:rPr lang="en-US" b="true" sz="3099">
+              <a:rPr lang="en-US" sz="3099" b="1">
                 <a:solidFill>
                   <a:srgbClr val="36211B"/>
                 </a:solidFill>
@@ -6121,35 +5961,11 @@
                 <a:cs typeface="Canva Sans Bold"/>
                 <a:sym typeface="Canva Sans Bold"/>
               </a:rPr>
-              <a:t>The system offers real-time, person</a:t>
-            </a:r>
-            <a:r>
-              <a:rPr lang="en-US" b="true" sz="3099">
-                <a:solidFill>
-                  <a:srgbClr val="36211B"/>
-                </a:solidFill>
-                <a:latin typeface="Canva Sans Bold"/>
-                <a:ea typeface="Canva Sans Bold"/>
-                <a:cs typeface="Canva Sans Bold"/>
-                <a:sym typeface="Canva Sans Bold"/>
-              </a:rPr>
-              <a:t>alized ca</a:t>
-            </a:r>
-            <a:r>
-              <a:rPr lang="en-US" b="true" sz="3099">
-                <a:solidFill>
-                  <a:srgbClr val="36211B"/>
-                </a:solidFill>
-                <a:latin typeface="Canva Sans Bold"/>
-                <a:ea typeface="Canva Sans Bold"/>
-                <a:cs typeface="Canva Sans Bold"/>
-                <a:sym typeface="Canva Sans Bold"/>
-              </a:rPr>
-              <a:t>re suggestions based on detected skin conditions.</a:t>
-            </a:r>
-          </a:p>
-          <a:p>
-            <a:pPr algn="just" marL="669286" indent="-334643" lvl="1">
+              <a:t>The system offers real-time, personalized care suggestions based on detected skin conditions.</a:t>
+            </a:r>
+          </a:p>
+          <a:p>
+            <a:pPr marL="669286" lvl="1" indent="-334643" algn="just">
               <a:lnSpc>
                 <a:spcPts val="4339"/>
               </a:lnSpc>
@@ -6157,7 +5973,7 @@
               <a:buChar char="•"/>
             </a:pPr>
             <a:r>
-              <a:rPr lang="en-US" b="true" sz="3099">
+              <a:rPr lang="en-US" sz="3099" b="1">
                 <a:solidFill>
                   <a:srgbClr val="36211B"/>
                 </a:solidFill>
@@ -6166,35 +5982,11 @@
                 <a:cs typeface="Canva Sans Bold"/>
                 <a:sym typeface="Canva Sans Bold"/>
               </a:rPr>
-              <a:t>E</a:t>
-            </a:r>
-            <a:r>
-              <a:rPr lang="en-US" b="true" sz="3099">
-                <a:solidFill>
-                  <a:srgbClr val="36211B"/>
-                </a:solidFill>
-                <a:latin typeface="Canva Sans Bold"/>
-                <a:ea typeface="Canva Sans Bold"/>
-                <a:cs typeface="Canva Sans Bold"/>
-                <a:sym typeface="Canva Sans Bold"/>
-              </a:rPr>
-              <a:t>nables end-to-end accessibility, allowing instant self-assessmen</a:t>
-            </a:r>
-            <a:r>
-              <a:rPr lang="en-US" b="true" sz="3099">
-                <a:solidFill>
-                  <a:srgbClr val="36211B"/>
-                </a:solidFill>
-                <a:latin typeface="Canva Sans Bold"/>
-                <a:ea typeface="Canva Sans Bold"/>
-                <a:cs typeface="Canva Sans Bold"/>
-                <a:sym typeface="Canva Sans Bold"/>
-              </a:rPr>
-              <a:t>t from image upload to result display.</a:t>
-            </a:r>
-          </a:p>
-          <a:p>
-            <a:pPr algn="just" marL="669286" indent="-334643" lvl="1">
+              <a:t>Enables end-to-end accessibility, allowing instant self-assessment from image upload to result display.</a:t>
+            </a:r>
+          </a:p>
+          <a:p>
+            <a:pPr marL="669286" lvl="1" indent="-334643" algn="just">
               <a:lnSpc>
                 <a:spcPts val="4339"/>
               </a:lnSpc>
@@ -6202,7 +5994,7 @@
               <a:buChar char="•"/>
             </a:pPr>
             <a:r>
-              <a:rPr lang="en-US" b="true" sz="3099">
+              <a:rPr lang="en-US" sz="3099" b="1">
                 <a:solidFill>
                   <a:srgbClr val="36211B"/>
                 </a:solidFill>
@@ -6211,19 +6003,7 @@
                 <a:cs typeface="Canva Sans Bold"/>
                 <a:sym typeface="Canva Sans Bold"/>
               </a:rPr>
-              <a:t>Serves as a powerful AI tool b</a:t>
-            </a:r>
-            <a:r>
-              <a:rPr lang="en-US" b="true" sz="3099">
-                <a:solidFill>
-                  <a:srgbClr val="36211B"/>
-                </a:solidFill>
-                <a:latin typeface="Canva Sans Bold"/>
-                <a:ea typeface="Canva Sans Bold"/>
-                <a:cs typeface="Canva Sans Bold"/>
-                <a:sym typeface="Canva Sans Bold"/>
-              </a:rPr>
-              <a:t>ridging the gap to professional care while empowering users.</a:t>
+              <a:t>Serves as a powerful AI tool bridging the gap to professional care while empowering users.</a:t>
             </a:r>
           </a:p>
           <a:p>
@@ -6232,6 +6012,15 @@
                 <a:spcPts val="4339"/>
               </a:lnSpc>
             </a:pPr>
+            <a:endParaRPr lang="en-US" sz="3099" b="1">
+              <a:solidFill>
+                <a:srgbClr val="36211B"/>
+              </a:solidFill>
+              <a:latin typeface="Canva Sans Bold"/>
+              <a:ea typeface="Canva Sans Bold"/>
+              <a:cs typeface="Canva Sans Bold"/>
+              <a:sym typeface="Canva Sans Bold"/>
+            </a:endParaRPr>
           </a:p>
         </p:txBody>
       </p:sp>
@@ -6244,13 +6033,14 @@
 </file>
 
 <file path=ppt/slides/slide2.xml><?xml version="1.0" encoding="utf-8"?>
-<p:sld xmlns:p="http://schemas.openxmlformats.org/presentationml/2006/main" xmlns:a="http://schemas.openxmlformats.org/drawingml/2006/main" xmlns:r="http://schemas.openxmlformats.org/officeDocument/2006/relationships">
+<p:sld xmlns:a="http://schemas.openxmlformats.org/drawingml/2006/main" xmlns:r="http://schemas.openxmlformats.org/officeDocument/2006/relationships" xmlns:p="http://schemas.openxmlformats.org/presentationml/2006/main">
   <p:cSld>
     <p:bg>
       <p:bgPr>
         <a:solidFill>
           <a:srgbClr val="E8E6E3"/>
         </a:solidFill>
+        <a:effectLst/>
       </p:bgPr>
     </p:bg>
     <p:spTree>
@@ -6269,12 +6059,12 @@
       </p:grpSpPr>
       <p:grpSp>
         <p:nvGrpSpPr>
-          <p:cNvPr name="Group 2" id="2"/>
+          <p:cNvPr id="2" name="Group 2"/>
           <p:cNvGrpSpPr/>
           <p:nvPr/>
         </p:nvGrpSpPr>
         <p:grpSpPr>
-          <a:xfrm rot="0">
+          <a:xfrm>
             <a:off x="3396193" y="2134837"/>
             <a:ext cx="6401738" cy="6017327"/>
             <a:chOff x="0" y="0"/>
@@ -6283,12 +6073,12 @@
         </p:grpSpPr>
         <p:sp>
           <p:nvSpPr>
-            <p:cNvPr name="TextBox 3" id="3"/>
-            <p:cNvSpPr txBox="true"/>
+            <p:cNvPr id="3" name="TextBox 3"/>
+            <p:cNvSpPr txBox="1"/>
             <p:nvPr/>
           </p:nvSpPr>
           <p:spPr>
-            <a:xfrm rot="0">
+            <a:xfrm>
               <a:off x="0" y="2741596"/>
               <a:ext cx="8535651" cy="5281507"/>
             </a:xfrm>
@@ -6297,12 +6087,12 @@
             </a:prstGeom>
           </p:spPr>
           <p:txBody>
-            <a:bodyPr anchor="t" rtlCol="false" tIns="0" lIns="0" bIns="0" rIns="0">
+            <a:bodyPr lIns="0" tIns="0" rIns="0" bIns="0" rtlCol="0" anchor="t">
               <a:spAutoFit/>
             </a:bodyPr>
             <a:lstStyle/>
             <a:p>
-              <a:pPr algn="l" marL="820419" indent="-410209" lvl="1">
+              <a:pPr marL="820419" lvl="1" indent="-410209" algn="l">
                 <a:lnSpc>
                   <a:spcPts val="5319"/>
                 </a:lnSpc>
@@ -6313,7 +6103,7 @@
                 <a:buChar char="•"/>
               </a:pPr>
               <a:r>
-                <a:rPr lang="en-US" b="true" sz="3799" spc="-75">
+                <a:rPr lang="en-US" sz="3799" b="1" spc="-75">
                   <a:solidFill>
                     <a:srgbClr val="36211B"/>
                   </a:solidFill>
@@ -6326,7 +6116,7 @@
               </a:r>
             </a:p>
             <a:p>
-              <a:pPr algn="l" marL="820419" indent="-410209" lvl="1">
+              <a:pPr marL="820419" lvl="1" indent="-410209" algn="l">
                 <a:lnSpc>
                   <a:spcPts val="5319"/>
                 </a:lnSpc>
@@ -6337,7 +6127,7 @@
                 <a:buChar char="•"/>
               </a:pPr>
               <a:r>
-                <a:rPr lang="en-US" b="true" sz="3799" spc="-75">
+                <a:rPr lang="en-US" sz="3799" b="1" spc="-75">
                   <a:solidFill>
                     <a:srgbClr val="36211B"/>
                   </a:solidFill>
@@ -6350,7 +6140,7 @@
               </a:r>
             </a:p>
             <a:p>
-              <a:pPr algn="l" marL="820419" indent="-410209" lvl="1">
+              <a:pPr marL="820419" lvl="1" indent="-410209" algn="l">
                 <a:lnSpc>
                   <a:spcPts val="5319"/>
                 </a:lnSpc>
@@ -6361,7 +6151,7 @@
                 <a:buChar char="•"/>
               </a:pPr>
               <a:r>
-                <a:rPr lang="en-US" b="true" sz="3799" spc="-75">
+                <a:rPr lang="en-US" sz="3799" b="1" spc="-75">
                   <a:solidFill>
                     <a:srgbClr val="36211B"/>
                   </a:solidFill>
@@ -6374,7 +6164,7 @@
               </a:r>
             </a:p>
             <a:p>
-              <a:pPr algn="l" marL="820419" indent="-410209" lvl="1">
+              <a:pPr marL="820419" lvl="1" indent="-410209" algn="l">
                 <a:lnSpc>
                   <a:spcPts val="5319"/>
                 </a:lnSpc>
@@ -6385,7 +6175,7 @@
                 <a:buChar char="•"/>
               </a:pPr>
               <a:r>
-                <a:rPr lang="en-US" b="true" sz="3799" spc="-75">
+                <a:rPr lang="en-US" sz="3799" b="1" spc="-75">
                   <a:solidFill>
                     <a:srgbClr val="36211B"/>
                   </a:solidFill>
@@ -6398,7 +6188,7 @@
               </a:r>
             </a:p>
             <a:p>
-              <a:pPr algn="l" marL="820419" indent="-410209" lvl="1">
+              <a:pPr marL="820419" lvl="1" indent="-410209" algn="l">
                 <a:lnSpc>
                   <a:spcPts val="5319"/>
                 </a:lnSpc>
@@ -6409,7 +6199,7 @@
                 <a:buChar char="•"/>
               </a:pPr>
               <a:r>
-                <a:rPr lang="en-US" b="true" sz="3799" spc="-75">
+                <a:rPr lang="en-US" sz="3799" b="1" spc="-75">
                   <a:solidFill>
                     <a:srgbClr val="36211B"/>
                   </a:solidFill>
@@ -6430,17 +6220,26 @@
                   <a:spcPct val="0"/>
                 </a:spcBef>
               </a:pPr>
+              <a:endParaRPr lang="en-US" sz="3799" b="1" spc="-75">
+                <a:solidFill>
+                  <a:srgbClr val="36211B"/>
+                </a:solidFill>
+                <a:latin typeface="Canva Sans Bold"/>
+                <a:ea typeface="Canva Sans Bold"/>
+                <a:cs typeface="Canva Sans Bold"/>
+                <a:sym typeface="Canva Sans Bold"/>
+              </a:endParaRPr>
             </a:p>
           </p:txBody>
         </p:sp>
         <p:sp>
           <p:nvSpPr>
-            <p:cNvPr name="TextBox 4" id="4"/>
-            <p:cNvSpPr txBox="true"/>
+            <p:cNvPr id="4" name="TextBox 4"/>
+            <p:cNvSpPr txBox="1"/>
             <p:nvPr/>
           </p:nvSpPr>
           <p:spPr>
-            <a:xfrm rot="0">
+            <a:xfrm>
               <a:off x="0" y="190500"/>
               <a:ext cx="8535651" cy="1731432"/>
             </a:xfrm>
@@ -6449,18 +6248,18 @@
             </a:prstGeom>
           </p:spPr>
           <p:txBody>
-            <a:bodyPr anchor="t" rtlCol="false" tIns="0" lIns="0" bIns="0" rIns="0">
+            <a:bodyPr lIns="0" tIns="0" rIns="0" bIns="0" rtlCol="0" anchor="t">
               <a:spAutoFit/>
             </a:bodyPr>
             <a:lstStyle/>
             <a:p>
-              <a:pPr algn="l" marL="0" indent="0" lvl="0">
+              <a:pPr marL="0" lvl="0" indent="0" algn="l">
                 <a:lnSpc>
                   <a:spcPts val="9499"/>
                 </a:lnSpc>
               </a:pPr>
               <a:r>
-                <a:rPr lang="en-US" sz="9499" i="true" spc="-379">
+                <a:rPr lang="en-US" sz="9499" i="1" spc="-379">
                   <a:solidFill>
                     <a:srgbClr val="36211B"/>
                   </a:solidFill>
@@ -6477,12 +6276,12 @@
       </p:grpSp>
       <p:sp>
         <p:nvSpPr>
-          <p:cNvPr name="Freeform 5" id="5"/>
+          <p:cNvPr id="5" name="Freeform 5"/>
           <p:cNvSpPr/>
           <p:nvPr/>
         </p:nvSpPr>
         <p:spPr>
-          <a:xfrm flipH="false" flipV="false" rot="0">
+          <a:xfrm>
             <a:off x="1266626" y="3777249"/>
             <a:ext cx="1367991" cy="2732501"/>
           </a:xfrm>
@@ -6491,9 +6290,9 @@
             <a:gdLst/>
             <a:ahLst/>
             <a:cxnLst/>
-            <a:rect r="r" b="b" t="t" l="l"/>
+            <a:rect l="l" t="t" r="r" b="b"/>
             <a:pathLst>
-              <a:path h="2732501" w="1367991">
+              <a:path w="1367991" h="2732501">
                 <a:moveTo>
                   <a:pt x="0" y="0"/>
                 </a:moveTo>
@@ -6514,27 +6313,27 @@
             </a:pathLst>
           </a:custGeom>
           <a:blipFill>
-            <a:blip r:embed="rId2">
+            <a:blip>
               <a:extLst>
                 <a:ext uri="{96DAC541-7B7A-43D3-8B79-37D633B846F1}">
-                  <asvg:svgBlip xmlns:asvg="http://schemas.microsoft.com/office/drawing/2016/SVG/main" r:embed="rId3"/>
+                  <asvg:svgBlip xmlns:asvg="http://schemas.microsoft.com/office/drawing/2016/SVG/main" r:embed="rId2"/>
                 </a:ext>
               </a:extLst>
             </a:blip>
             <a:stretch>
-              <a:fillRect l="0" t="0" r="0" b="0"/>
+              <a:fillRect/>
             </a:stretch>
           </a:blipFill>
         </p:spPr>
       </p:sp>
       <p:sp>
         <p:nvSpPr>
-          <p:cNvPr name="TextBox 6" id="6"/>
-          <p:cNvSpPr txBox="true"/>
+          <p:cNvPr id="6" name="TextBox 6"/>
+          <p:cNvSpPr txBox="1"/>
           <p:nvPr/>
         </p:nvSpPr>
         <p:spPr>
-          <a:xfrm rot="0">
+          <a:xfrm>
             <a:off x="9531499" y="3998898"/>
             <a:ext cx="6401738" cy="3980180"/>
           </a:xfrm>
@@ -6543,12 +6342,12 @@
           </a:prstGeom>
         </p:spPr>
         <p:txBody>
-          <a:bodyPr anchor="t" rtlCol="false" tIns="0" lIns="0" bIns="0" rIns="0">
+          <a:bodyPr lIns="0" tIns="0" rIns="0" bIns="0" rtlCol="0" anchor="t">
             <a:spAutoFit/>
           </a:bodyPr>
           <a:lstStyle/>
           <a:p>
-            <a:pPr algn="l" marL="820419" indent="-410209" lvl="1">
+            <a:pPr marL="820419" lvl="1" indent="-410209" algn="l">
               <a:lnSpc>
                 <a:spcPts val="5319"/>
               </a:lnSpc>
@@ -6556,7 +6355,7 @@
               <a:buChar char="•"/>
             </a:pPr>
             <a:r>
-              <a:rPr lang="en-US" b="true" sz="3799" spc="-75">
+              <a:rPr lang="en-US" sz="3799" b="1" spc="-75">
                 <a:solidFill>
                   <a:srgbClr val="36211B"/>
                 </a:solidFill>
@@ -6569,7 +6368,7 @@
             </a:r>
           </a:p>
           <a:p>
-            <a:pPr algn="l" marL="820419" indent="-410209" lvl="1">
+            <a:pPr marL="820419" lvl="1" indent="-410209" algn="l">
               <a:lnSpc>
                 <a:spcPts val="5319"/>
               </a:lnSpc>
@@ -6577,7 +6376,7 @@
               <a:buChar char="•"/>
             </a:pPr>
             <a:r>
-              <a:rPr lang="en-US" b="true" sz="3799" spc="-75">
+              <a:rPr lang="en-US" sz="3799" b="1" spc="-75">
                 <a:solidFill>
                   <a:srgbClr val="36211B"/>
                 </a:solidFill>
@@ -6590,7 +6389,7 @@
             </a:r>
           </a:p>
           <a:p>
-            <a:pPr algn="l" marL="820419" indent="-410209" lvl="1">
+            <a:pPr marL="820419" lvl="1" indent="-410209" algn="l">
               <a:lnSpc>
                 <a:spcPts val="5319"/>
               </a:lnSpc>
@@ -6601,7 +6400,7 @@
               <a:buChar char="•"/>
             </a:pPr>
             <a:r>
-              <a:rPr lang="en-US" b="true" sz="3799" spc="-75">
+              <a:rPr lang="en-US" sz="3799" b="1" spc="-75">
                 <a:solidFill>
                   <a:srgbClr val="36211B"/>
                 </a:solidFill>
@@ -6614,7 +6413,7 @@
             </a:r>
           </a:p>
           <a:p>
-            <a:pPr algn="l" marL="820419" indent="-410209" lvl="1">
+            <a:pPr marL="820419" lvl="1" indent="-410209" algn="l">
               <a:lnSpc>
                 <a:spcPts val="5319"/>
               </a:lnSpc>
@@ -6625,7 +6424,7 @@
               <a:buChar char="•"/>
             </a:pPr>
             <a:r>
-              <a:rPr lang="en-US" b="true" sz="3799" spc="-75">
+              <a:rPr lang="en-US" sz="3799" b="1" spc="-75">
                 <a:solidFill>
                   <a:srgbClr val="36211B"/>
                 </a:solidFill>
@@ -6638,7 +6437,7 @@
             </a:r>
           </a:p>
           <a:p>
-            <a:pPr algn="l" marL="820419" indent="-410209" lvl="1">
+            <a:pPr marL="820419" lvl="1" indent="-410209" algn="l">
               <a:lnSpc>
                 <a:spcPts val="5319"/>
               </a:lnSpc>
@@ -6649,7 +6448,7 @@
               <a:buChar char="•"/>
             </a:pPr>
             <a:r>
-              <a:rPr lang="en-US" b="true" sz="3799" spc="-75">
+              <a:rPr lang="en-US" sz="3799" b="1" spc="-75">
                 <a:solidFill>
                   <a:srgbClr val="36211B"/>
                 </a:solidFill>
@@ -6662,7 +6461,7 @@
             </a:r>
           </a:p>
           <a:p>
-            <a:pPr algn="l" marL="820419" indent="-410209" lvl="1">
+            <a:pPr marL="820419" lvl="1" indent="-410209" algn="l">
               <a:lnSpc>
                 <a:spcPts val="5319"/>
               </a:lnSpc>
@@ -6673,7 +6472,7 @@
               <a:buChar char="•"/>
             </a:pPr>
             <a:r>
-              <a:rPr lang="en-US" b="true" sz="3799" spc="-75">
+              <a:rPr lang="en-US" sz="3799" b="1" spc="-75">
                 <a:solidFill>
                   <a:srgbClr val="36211B"/>
                 </a:solidFill>
@@ -6696,13 +6495,14 @@
 </file>
 
 <file path=ppt/slides/slide20.xml><?xml version="1.0" encoding="utf-8"?>
-<p:sld xmlns:p="http://schemas.openxmlformats.org/presentationml/2006/main" xmlns:a="http://schemas.openxmlformats.org/drawingml/2006/main" xmlns:r="http://schemas.openxmlformats.org/officeDocument/2006/relationships">
+<p:sld xmlns:a="http://schemas.openxmlformats.org/drawingml/2006/main" xmlns:r="http://schemas.openxmlformats.org/officeDocument/2006/relationships" xmlns:p="http://schemas.openxmlformats.org/presentationml/2006/main">
   <p:cSld>
     <p:bg>
       <p:bgPr>
         <a:solidFill>
           <a:srgbClr val="E8E6E3"/>
         </a:solidFill>
+        <a:effectLst/>
       </p:bgPr>
     </p:bg>
     <p:spTree>
@@ -6721,12 +6521,12 @@
       </p:grpSpPr>
       <p:sp>
         <p:nvSpPr>
-          <p:cNvPr name="Freeform 2" id="2"/>
+          <p:cNvPr id="2" name="Freeform 2"/>
           <p:cNvSpPr/>
           <p:nvPr/>
         </p:nvSpPr>
         <p:spPr>
-          <a:xfrm flipH="false" flipV="false" rot="0">
+          <a:xfrm>
             <a:off x="0" y="9910777"/>
             <a:ext cx="18288000" cy="376223"/>
           </a:xfrm>
@@ -6735,9 +6535,9 @@
             <a:gdLst/>
             <a:ahLst/>
             <a:cxnLst/>
-            <a:rect r="r" b="b" t="t" l="l"/>
+            <a:rect l="l" t="t" r="r" b="b"/>
             <a:pathLst>
-              <a:path h="376223" w="18288000">
+              <a:path w="18288000" h="376223">
                 <a:moveTo>
                   <a:pt x="0" y="0"/>
                 </a:moveTo>
@@ -6760,19 +6560,19 @@
           <a:blipFill>
             <a:blip r:embed="rId2"/>
             <a:stretch>
-              <a:fillRect l="0" t="-1531929" r="0" b="-1102351"/>
+              <a:fillRect t="-1531929" b="-1102351"/>
             </a:stretch>
           </a:blipFill>
         </p:spPr>
       </p:sp>
       <p:sp>
         <p:nvSpPr>
-          <p:cNvPr name="TextBox 3" id="3"/>
-          <p:cNvSpPr txBox="true"/>
+          <p:cNvPr id="3" name="TextBox 3"/>
+          <p:cNvSpPr txBox="1"/>
           <p:nvPr/>
         </p:nvSpPr>
         <p:spPr>
-          <a:xfrm rot="0">
+          <a:xfrm>
             <a:off x="1181100" y="1455216"/>
             <a:ext cx="16230600" cy="1094740"/>
           </a:xfrm>
@@ -6781,7 +6581,7 @@
           </a:prstGeom>
         </p:spPr>
         <p:txBody>
-          <a:bodyPr anchor="t" rtlCol="false" tIns="0" lIns="0" bIns="0" rIns="0">
+          <a:bodyPr lIns="0" tIns="0" rIns="0" bIns="0" rtlCol="0" anchor="t">
             <a:spAutoFit/>
           </a:bodyPr>
           <a:lstStyle/>
@@ -6808,12 +6608,12 @@
       </p:sp>
       <p:sp>
         <p:nvSpPr>
-          <p:cNvPr name="TextBox 4" id="4"/>
-          <p:cNvSpPr txBox="true"/>
+          <p:cNvPr id="4" name="TextBox 4"/>
+          <p:cNvSpPr txBox="1"/>
           <p:nvPr/>
         </p:nvSpPr>
         <p:spPr>
-          <a:xfrm rot="0">
+          <a:xfrm>
             <a:off x="1722830" y="3042299"/>
             <a:ext cx="15147141" cy="5934710"/>
           </a:xfrm>
@@ -6822,7 +6622,7 @@
           </a:prstGeom>
         </p:spPr>
         <p:txBody>
-          <a:bodyPr anchor="t" rtlCol="false" tIns="0" lIns="0" bIns="0" rIns="0">
+          <a:bodyPr lIns="0" tIns="0" rIns="0" bIns="0" rtlCol="0" anchor="t">
             <a:spAutoFit/>
           </a:bodyPr>
           <a:lstStyle/>
@@ -6833,7 +6633,7 @@
               </a:lnSpc>
             </a:pPr>
             <a:r>
-              <a:rPr lang="en-US" b="true" sz="2599">
+              <a:rPr lang="en-US" sz="2599" b="1">
                 <a:solidFill>
                   <a:srgbClr val="36211B"/>
                 </a:solidFill>
@@ -6842,19 +6642,7 @@
                 <a:cs typeface="Canva Sans Bold"/>
                 <a:sym typeface="Canva Sans Bold"/>
               </a:rPr>
-              <a:t>[1] Zagrouba, E., &amp; Barhoumi, W. (2005). ”A preliminary system for skin lesion segmen</a:t>
-            </a:r>
-            <a:r>
-              <a:rPr lang="en-US" b="true" sz="2599">
-                <a:solidFill>
-                  <a:srgbClr val="36211B"/>
-                </a:solidFill>
-                <a:latin typeface="Canva Sans Bold"/>
-                <a:ea typeface="Canva Sans Bold"/>
-                <a:cs typeface="Canva Sans Bold"/>
-                <a:sym typeface="Canva Sans Bold"/>
-              </a:rPr>
-              <a:t>tation using texture analysis,” 3rd International Conference: Sciences of Electronic, Technologies of Information and Telecommunications (SETIT).</a:t>
+              <a:t>[1] Zagrouba, E., &amp; Barhoumi, W. (2005). ”A preliminary system for skin lesion segmentation using texture analysis,” 3rd International Conference: Sciences of Electronic, Technologies of Information and Telecommunications (SETIT).</a:t>
             </a:r>
           </a:p>
           <a:p>
@@ -6864,7 +6652,7 @@
               </a:lnSpc>
             </a:pPr>
             <a:r>
-              <a:rPr lang="en-US" b="true" sz="2599">
+              <a:rPr lang="en-US" sz="2599" b="1">
                 <a:solidFill>
                   <a:srgbClr val="36211B"/>
                 </a:solidFill>
@@ -6883,7 +6671,7 @@
               </a:lnSpc>
             </a:pPr>
             <a:r>
-              <a:rPr lang="en-US" b="true" sz="2599">
+              <a:rPr lang="en-US" sz="2599" b="1">
                 <a:solidFill>
                   <a:srgbClr val="36211B"/>
                 </a:solidFill>
@@ -6902,7 +6690,7 @@
               </a:lnSpc>
             </a:pPr>
             <a:r>
-              <a:rPr lang="en-US" b="true" sz="2599">
+              <a:rPr lang="en-US" sz="2599" b="1">
                 <a:solidFill>
                   <a:srgbClr val="36211B"/>
                 </a:solidFill>
@@ -6911,19 +6699,7 @@
                 <a:cs typeface="Canva Sans Bold"/>
                 <a:sym typeface="Canva Sans Bold"/>
               </a:rPr>
-              <a:t>[4] Howard, A. G., Zhu, M., Chen, B., et al. (2017). “MobileNets: Efficient con volutional neural networks for mobile vision applications,” arXiv preprin</a:t>
-            </a:r>
-            <a:r>
-              <a:rPr lang="en-US" b="true" sz="2599">
-                <a:solidFill>
-                  <a:srgbClr val="36211B"/>
-                </a:solidFill>
-                <a:latin typeface="Canva Sans Bold"/>
-                <a:ea typeface="Canva Sans Bold"/>
-                <a:cs typeface="Canva Sans Bold"/>
-                <a:sym typeface="Canva Sans Bold"/>
-              </a:rPr>
-              <a:t>t arXiv:1704.04861. </a:t>
+              <a:t>[4] Howard, A. G., Zhu, M., Chen, B., et al. (2017). “MobileNets: Efficient con volutional neural networks for mobile vision applications,” arXiv preprint arXiv:1704.04861. </a:t>
             </a:r>
           </a:p>
           <a:p>
@@ -6933,7 +6709,7 @@
               </a:lnSpc>
             </a:pPr>
             <a:r>
-              <a:rPr lang="en-US" b="true" sz="2599">
+              <a:rPr lang="en-US" sz="2599" b="1">
                 <a:solidFill>
                   <a:srgbClr val="36211B"/>
                 </a:solidFill>
@@ -6956,7 +6732,7 @@
 </file>
 
 <file path=ppt/slides/slide21.xml><?xml version="1.0" encoding="utf-8"?>
-<p:sld xmlns:p="http://schemas.openxmlformats.org/presentationml/2006/main" xmlns:a="http://schemas.openxmlformats.org/drawingml/2006/main" xmlns:r="http://schemas.openxmlformats.org/officeDocument/2006/relationships">
+<p:sld xmlns:a="http://schemas.openxmlformats.org/drawingml/2006/main" xmlns:r="http://schemas.openxmlformats.org/officeDocument/2006/relationships" xmlns:p="http://schemas.openxmlformats.org/presentationml/2006/main">
   <p:cSld>
     <p:spTree>
       <p:nvGrpSpPr>
@@ -6974,12 +6750,12 @@
       </p:grpSpPr>
       <p:sp>
         <p:nvSpPr>
-          <p:cNvPr name="Freeform 2" id="2"/>
+          <p:cNvPr id="2" name="Freeform 2"/>
           <p:cNvSpPr/>
           <p:nvPr/>
         </p:nvSpPr>
         <p:spPr>
-          <a:xfrm flipH="false" flipV="false" rot="0">
+          <a:xfrm>
             <a:off x="0" y="0"/>
             <a:ext cx="18288000" cy="10287000"/>
           </a:xfrm>
@@ -6988,9 +6764,9 @@
             <a:gdLst/>
             <a:ahLst/>
             <a:cxnLst/>
-            <a:rect r="r" b="b" t="t" l="l"/>
+            <a:rect l="l" t="t" r="r" b="b"/>
             <a:pathLst>
-              <a:path h="10287000" w="18288000">
+              <a:path w="18288000" h="10287000">
                 <a:moveTo>
                   <a:pt x="0" y="0"/>
                 </a:moveTo>
@@ -7011,27 +6787,27 @@
             </a:pathLst>
           </a:custGeom>
           <a:blipFill>
-            <a:blip r:embed="rId2">
+            <a:blip>
               <a:extLst>
                 <a:ext uri="{96DAC541-7B7A-43D3-8B79-37D633B846F1}">
-                  <asvg:svgBlip xmlns:asvg="http://schemas.microsoft.com/office/drawing/2016/SVG/main" r:embed="rId3"/>
+                  <asvg:svgBlip xmlns:asvg="http://schemas.microsoft.com/office/drawing/2016/SVG/main" r:embed="rId2"/>
                 </a:ext>
               </a:extLst>
             </a:blip>
             <a:stretch>
-              <a:fillRect l="0" t="0" r="0" b="0"/>
+              <a:fillRect/>
             </a:stretch>
           </a:blipFill>
         </p:spPr>
       </p:sp>
       <p:grpSp>
         <p:nvGrpSpPr>
-          <p:cNvPr name="Group 3" id="3"/>
+          <p:cNvPr id="3" name="Group 3"/>
           <p:cNvGrpSpPr/>
           <p:nvPr/>
         </p:nvGrpSpPr>
         <p:grpSpPr>
-          <a:xfrm rot="0">
+          <a:xfrm>
             <a:off x="0" y="3029214"/>
             <a:ext cx="18288000" cy="6158912"/>
             <a:chOff x="0" y="0"/>
@@ -7040,12 +6816,12 @@
         </p:grpSpPr>
         <p:sp>
           <p:nvSpPr>
-            <p:cNvPr name="Freeform 4" id="4"/>
+            <p:cNvPr id="4" name="Freeform 4"/>
             <p:cNvSpPr/>
             <p:nvPr/>
           </p:nvSpPr>
           <p:spPr>
-            <a:xfrm flipH="false" flipV="false" rot="0">
+            <a:xfrm>
               <a:off x="0" y="0"/>
               <a:ext cx="24384000" cy="8211820"/>
             </a:xfrm>
@@ -7054,9 +6830,9 @@
               <a:gdLst/>
               <a:ahLst/>
               <a:cxnLst/>
-              <a:rect r="r" b="b" t="t" l="l"/>
+              <a:rect l="l" t="t" r="r" b="b"/>
               <a:pathLst>
-                <a:path h="8211820" w="24384000">
+                <a:path w="24384000" h="8211820">
                   <a:moveTo>
                     <a:pt x="0" y="0"/>
                   </a:moveTo>
@@ -7073,7 +6849,7 @@
                 </a:path>
               </a:pathLst>
             </a:custGeom>
-            <a:gradFill rotWithShape="true">
+            <a:gradFill rotWithShape="1">
               <a:gsLst>
                 <a:gs pos="0">
                   <a:srgbClr val="DFDBD5">
@@ -7093,12 +6869,12 @@
       </p:grpSp>
       <p:sp>
         <p:nvSpPr>
-          <p:cNvPr name="Freeform 5" id="5"/>
+          <p:cNvPr id="5" name="Freeform 5"/>
           <p:cNvSpPr/>
           <p:nvPr/>
         </p:nvSpPr>
         <p:spPr>
-          <a:xfrm flipH="false" flipV="false" rot="0">
+          <a:xfrm>
             <a:off x="0" y="9189720"/>
             <a:ext cx="18288000" cy="1114425"/>
           </a:xfrm>
@@ -7107,9 +6883,9 @@
             <a:gdLst/>
             <a:ahLst/>
             <a:cxnLst/>
-            <a:rect r="r" b="b" t="t" l="l"/>
+            <a:rect l="l" t="t" r="r" b="b"/>
             <a:pathLst>
-              <a:path h="1114425" w="18288000">
+              <a:path w="18288000" h="1114425">
                 <a:moveTo>
                   <a:pt x="0" y="0"/>
                 </a:moveTo>
@@ -7130,16 +6906,16 @@
             </a:pathLst>
           </a:custGeom>
           <a:blipFill>
-            <a:blip r:embed="rId4"/>
+            <a:blip r:embed="rId3"/>
             <a:stretch>
-              <a:fillRect l="0" t="-1538" r="0" b="1537"/>
+              <a:fillRect t="-1538" b="1537"/>
             </a:stretch>
           </a:blipFill>
         </p:spPr>
       </p:sp>
       <p:sp>
         <p:nvSpPr>
-          <p:cNvPr name="AutoShape 6" id="6"/>
+          <p:cNvPr id="6" name="AutoShape 6"/>
           <p:cNvSpPr/>
           <p:nvPr/>
         </p:nvSpPr>
@@ -7151,21 +6927,21 @@
           <a:prstGeom prst="line">
             <a:avLst/>
           </a:prstGeom>
-          <a:ln cap="rnd" w="9525">
+          <a:ln w="9525" cap="rnd">
             <a:solidFill>
               <a:srgbClr val="000001">
                 <a:alpha val="19608"/>
               </a:srgbClr>
             </a:solidFill>
             <a:prstDash val="solid"/>
-            <a:headEnd type="none" len="sm" w="sm"/>
-            <a:tailEnd type="none" len="sm" w="sm"/>
+            <a:headEnd type="none" w="sm" len="sm"/>
+            <a:tailEnd type="none" w="sm" len="sm"/>
           </a:ln>
         </p:spPr>
       </p:sp>
       <p:sp>
         <p:nvSpPr>
-          <p:cNvPr name="AutoShape 7" id="7"/>
+          <p:cNvPr id="7" name="AutoShape 7"/>
           <p:cNvSpPr/>
           <p:nvPr/>
         </p:nvSpPr>
@@ -7177,24 +6953,24 @@
           <a:prstGeom prst="line">
             <a:avLst/>
           </a:prstGeom>
-          <a:ln cap="rnd" w="28575">
+          <a:ln w="28575" cap="rnd">
             <a:solidFill>
               <a:srgbClr val="B71E42"/>
             </a:solidFill>
             <a:prstDash val="solid"/>
-            <a:headEnd type="none" len="sm" w="sm"/>
-            <a:tailEnd type="none" len="sm" w="sm"/>
+            <a:headEnd type="none" w="sm" len="sm"/>
+            <a:tailEnd type="none" w="sm" len="sm"/>
           </a:ln>
         </p:spPr>
       </p:sp>
       <p:grpSp>
         <p:nvGrpSpPr>
-          <p:cNvPr name="Group 8" id="8"/>
+          <p:cNvPr id="8" name="Group 8"/>
           <p:cNvGrpSpPr/>
           <p:nvPr/>
         </p:nvGrpSpPr>
         <p:grpSpPr>
-          <a:xfrm rot="0">
+          <a:xfrm>
             <a:off x="5026596" y="4119715"/>
             <a:ext cx="8234808" cy="1573852"/>
             <a:chOff x="0" y="0"/>
@@ -7203,12 +6979,12 @@
         </p:grpSpPr>
         <p:sp>
           <p:nvSpPr>
-            <p:cNvPr name="Freeform 9" id="9"/>
+            <p:cNvPr id="9" name="Freeform 9"/>
             <p:cNvSpPr/>
             <p:nvPr/>
           </p:nvSpPr>
           <p:spPr>
-            <a:xfrm flipH="false" flipV="false" rot="0">
+            <a:xfrm>
               <a:off x="0" y="0"/>
               <a:ext cx="10979744" cy="2098470"/>
             </a:xfrm>
@@ -7217,9 +6993,9 @@
               <a:gdLst/>
               <a:ahLst/>
               <a:cxnLst/>
-              <a:rect r="r" b="b" t="t" l="l"/>
+              <a:rect l="l" t="t" r="r" b="b"/>
               <a:pathLst>
-                <a:path h="2098470" w="10979744">
+                <a:path w="10979744" h="2098470">
                   <a:moveTo>
                     <a:pt x="0" y="0"/>
                   </a:moveTo>
@@ -7245,8 +7021,8 @@
         </p:sp>
         <p:sp>
           <p:nvSpPr>
-            <p:cNvPr name="TextBox 10" id="10"/>
-            <p:cNvSpPr txBox="true"/>
+            <p:cNvPr id="10" name="TextBox 10"/>
+            <p:cNvSpPr txBox="1"/>
             <p:nvPr/>
           </p:nvSpPr>
           <p:spPr>
@@ -7259,7 +7035,7 @@
             </a:prstGeom>
           </p:spPr>
           <p:txBody>
-            <a:bodyPr anchor="t" rtlCol="false" tIns="0" lIns="0" bIns="0" rIns="0"/>
+            <a:bodyPr lIns="0" tIns="0" rIns="0" bIns="0" rtlCol="0" anchor="t"/>
             <a:lstStyle/>
             <a:p>
               <a:pPr algn="l">
@@ -7292,13 +7068,14 @@
 </file>
 
 <file path=ppt/slides/slide3.xml><?xml version="1.0" encoding="utf-8"?>
-<p:sld xmlns:p="http://schemas.openxmlformats.org/presentationml/2006/main" xmlns:a="http://schemas.openxmlformats.org/drawingml/2006/main" xmlns:r="http://schemas.openxmlformats.org/officeDocument/2006/relationships">
+<p:sld xmlns:a="http://schemas.openxmlformats.org/drawingml/2006/main" xmlns:r="http://schemas.openxmlformats.org/officeDocument/2006/relationships" xmlns:p="http://schemas.openxmlformats.org/presentationml/2006/main">
   <p:cSld>
     <p:bg>
       <p:bgPr>
         <a:solidFill>
           <a:srgbClr val="E8E6E3"/>
         </a:solidFill>
+        <a:effectLst/>
       </p:bgPr>
     </p:bg>
     <p:spTree>
@@ -7317,12 +7094,12 @@
       </p:grpSpPr>
       <p:grpSp>
         <p:nvGrpSpPr>
-          <p:cNvPr name="Group 2" id="2"/>
+          <p:cNvPr id="2" name="Group 2"/>
           <p:cNvGrpSpPr/>
           <p:nvPr/>
         </p:nvGrpSpPr>
         <p:grpSpPr>
-          <a:xfrm rot="0">
+          <a:xfrm>
             <a:off x="3396193" y="1916396"/>
             <a:ext cx="12741423" cy="6454208"/>
             <a:chOff x="0" y="0"/>
@@ -7331,12 +7108,12 @@
         </p:grpSpPr>
         <p:sp>
           <p:nvSpPr>
-            <p:cNvPr name="TextBox 3" id="3"/>
-            <p:cNvSpPr txBox="true"/>
+            <p:cNvPr id="3" name="TextBox 3"/>
+            <p:cNvSpPr txBox="1"/>
             <p:nvPr/>
           </p:nvSpPr>
           <p:spPr>
-            <a:xfrm rot="0">
+            <a:xfrm>
               <a:off x="0" y="2699688"/>
               <a:ext cx="16988563" cy="5905923"/>
             </a:xfrm>
@@ -7345,12 +7122,12 @@
             </a:prstGeom>
           </p:spPr>
           <p:txBody>
-            <a:bodyPr anchor="t" rtlCol="false" tIns="0" lIns="0" bIns="0" rIns="0">
+            <a:bodyPr lIns="0" tIns="0" rIns="0" bIns="0" rtlCol="0" anchor="t">
               <a:spAutoFit/>
             </a:bodyPr>
             <a:lstStyle/>
             <a:p>
-              <a:pPr algn="l" marL="604524" indent="-302262" lvl="1">
+              <a:pPr marL="604524" lvl="1" indent="-302262" algn="l">
                 <a:lnSpc>
                   <a:spcPts val="3920"/>
                 </a:lnSpc>
@@ -7361,7 +7138,7 @@
                 <a:buChar char="•"/>
               </a:pPr>
               <a:r>
-                <a:rPr lang="en-US" b="true" sz="2800" spc="-56">
+                <a:rPr lang="en-US" sz="2800" b="1" spc="-56">
                   <a:solidFill>
                     <a:srgbClr val="000000"/>
                   </a:solidFill>
@@ -7374,7 +7151,7 @@
               </a:r>
             </a:p>
             <a:p>
-              <a:pPr algn="l" marL="604524" indent="-302262" lvl="1">
+              <a:pPr marL="604524" lvl="1" indent="-302262" algn="l">
                 <a:lnSpc>
                   <a:spcPts val="3920"/>
                 </a:lnSpc>
@@ -7385,7 +7162,7 @@
                 <a:buChar char="•"/>
               </a:pPr>
               <a:r>
-                <a:rPr lang="en-US" b="true" sz="2800" spc="-56">
+                <a:rPr lang="en-US" sz="2800" b="1" spc="-56">
                   <a:solidFill>
                     <a:srgbClr val="000000"/>
                   </a:solidFill>
@@ -7398,7 +7175,7 @@
               </a:r>
             </a:p>
             <a:p>
-              <a:pPr algn="l" marL="604524" indent="-302262" lvl="1">
+              <a:pPr marL="604524" lvl="1" indent="-302262" algn="l">
                 <a:lnSpc>
                   <a:spcPts val="3920"/>
                 </a:lnSpc>
@@ -7409,7 +7186,7 @@
                 <a:buChar char="•"/>
               </a:pPr>
               <a:r>
-                <a:rPr lang="en-US" b="true" sz="2800" spc="-56">
+                <a:rPr lang="en-US" sz="2800" b="1" spc="-56">
                   <a:solidFill>
                     <a:srgbClr val="000000"/>
                   </a:solidFill>
@@ -7425,12 +7202,12 @@
         </p:sp>
         <p:sp>
           <p:nvSpPr>
-            <p:cNvPr name="TextBox 4" id="4"/>
-            <p:cNvSpPr txBox="true"/>
+            <p:cNvPr id="4" name="TextBox 4"/>
+            <p:cNvSpPr txBox="1"/>
             <p:nvPr/>
           </p:nvSpPr>
           <p:spPr>
-            <a:xfrm rot="0">
+            <a:xfrm>
               <a:off x="0" y="171450"/>
               <a:ext cx="16988563" cy="1689524"/>
             </a:xfrm>
@@ -7439,18 +7216,18 @@
             </a:prstGeom>
           </p:spPr>
           <p:txBody>
-            <a:bodyPr anchor="t" rtlCol="false" tIns="0" lIns="0" bIns="0" rIns="0">
+            <a:bodyPr lIns="0" tIns="0" rIns="0" bIns="0" rtlCol="0" anchor="t">
               <a:spAutoFit/>
             </a:bodyPr>
             <a:lstStyle/>
             <a:p>
-              <a:pPr algn="l" marL="0" indent="0" lvl="0">
+              <a:pPr marL="0" lvl="0" indent="0" algn="l">
                 <a:lnSpc>
                   <a:spcPts val="9200"/>
                 </a:lnSpc>
               </a:pPr>
               <a:r>
-                <a:rPr lang="en-US" b="true" sz="9200">
+                <a:rPr lang="en-US" sz="9200" b="1">
                   <a:solidFill>
                     <a:srgbClr val="000000"/>
                   </a:solidFill>
@@ -7467,12 +7244,12 @@
       </p:grpSp>
       <p:sp>
         <p:nvSpPr>
-          <p:cNvPr name="Freeform 5" id="5"/>
+          <p:cNvPr id="5" name="Freeform 5"/>
           <p:cNvSpPr/>
           <p:nvPr/>
         </p:nvSpPr>
         <p:spPr>
-          <a:xfrm flipH="false" flipV="false" rot="0">
+          <a:xfrm>
             <a:off x="1266626" y="3777249"/>
             <a:ext cx="1367991" cy="2732501"/>
           </a:xfrm>
@@ -7481,9 +7258,9 @@
             <a:gdLst/>
             <a:ahLst/>
             <a:cxnLst/>
-            <a:rect r="r" b="b" t="t" l="l"/>
+            <a:rect l="l" t="t" r="r" b="b"/>
             <a:pathLst>
-              <a:path h="2732501" w="1367991">
+              <a:path w="1367991" h="2732501">
                 <a:moveTo>
                   <a:pt x="0" y="0"/>
                 </a:moveTo>
@@ -7504,15 +7281,15 @@
             </a:pathLst>
           </a:custGeom>
           <a:blipFill>
-            <a:blip r:embed="rId2">
+            <a:blip>
               <a:extLst>
                 <a:ext uri="{96DAC541-7B7A-43D3-8B79-37D633B846F1}">
-                  <asvg:svgBlip xmlns:asvg="http://schemas.microsoft.com/office/drawing/2016/SVG/main" r:embed="rId3"/>
+                  <asvg:svgBlip xmlns:asvg="http://schemas.microsoft.com/office/drawing/2016/SVG/main" r:embed="rId2"/>
                 </a:ext>
               </a:extLst>
             </a:blip>
             <a:stretch>
-              <a:fillRect l="0" t="0" r="0" b="0"/>
+              <a:fillRect/>
             </a:stretch>
           </a:blipFill>
         </p:spPr>
@@ -7526,13 +7303,14 @@
 </file>
 
 <file path=ppt/slides/slide4.xml><?xml version="1.0" encoding="utf-8"?>
-<p:sld xmlns:p="http://schemas.openxmlformats.org/presentationml/2006/main" xmlns:a="http://schemas.openxmlformats.org/drawingml/2006/main" xmlns:r="http://schemas.openxmlformats.org/officeDocument/2006/relationships">
+<p:sld xmlns:a="http://schemas.openxmlformats.org/drawingml/2006/main" xmlns:r="http://schemas.openxmlformats.org/officeDocument/2006/relationships" xmlns:p="http://schemas.openxmlformats.org/presentationml/2006/main">
   <p:cSld>
     <p:bg>
       <p:bgPr>
         <a:solidFill>
           <a:srgbClr val="E8E6E3"/>
         </a:solidFill>
+        <a:effectLst/>
       </p:bgPr>
     </p:bg>
     <p:spTree>
@@ -7551,12 +7329,12 @@
       </p:grpSpPr>
       <p:sp>
         <p:nvSpPr>
-          <p:cNvPr name="Freeform 2" id="2"/>
+          <p:cNvPr id="2" name="Freeform 2"/>
           <p:cNvSpPr/>
           <p:nvPr/>
         </p:nvSpPr>
         <p:spPr>
-          <a:xfrm flipH="false" flipV="false" rot="0">
+          <a:xfrm>
             <a:off x="0" y="0"/>
             <a:ext cx="18288000" cy="376223"/>
           </a:xfrm>
@@ -7565,9 +7343,9 @@
             <a:gdLst/>
             <a:ahLst/>
             <a:cxnLst/>
-            <a:rect r="r" b="b" t="t" l="l"/>
+            <a:rect l="l" t="t" r="r" b="b"/>
             <a:pathLst>
-              <a:path h="376223" w="18288000">
+              <a:path w="18288000" h="376223">
                 <a:moveTo>
                   <a:pt x="0" y="0"/>
                 </a:moveTo>
@@ -7590,19 +7368,19 @@
           <a:blipFill>
             <a:blip r:embed="rId2"/>
             <a:stretch>
-              <a:fillRect l="0" t="-1531929" r="0" b="-1102351"/>
+              <a:fillRect t="-1531929" b="-1102351"/>
             </a:stretch>
           </a:blipFill>
         </p:spPr>
       </p:sp>
       <p:sp>
         <p:nvSpPr>
-          <p:cNvPr name="TextBox 3" id="3"/>
-          <p:cNvSpPr txBox="true"/>
+          <p:cNvPr id="3" name="TextBox 3"/>
+          <p:cNvSpPr txBox="1"/>
           <p:nvPr/>
         </p:nvSpPr>
         <p:spPr>
-          <a:xfrm rot="0">
+          <a:xfrm>
             <a:off x="1028700" y="3921769"/>
             <a:ext cx="4477275" cy="622935"/>
           </a:xfrm>
@@ -7611,7 +7389,7 @@
           </a:prstGeom>
         </p:spPr>
         <p:txBody>
-          <a:bodyPr anchor="t" rtlCol="false" tIns="0" lIns="0" bIns="0" rIns="0">
+          <a:bodyPr lIns="0" tIns="0" rIns="0" bIns="0" rtlCol="0" anchor="t">
             <a:spAutoFit/>
           </a:bodyPr>
           <a:lstStyle/>
@@ -7638,12 +7416,12 @@
       </p:sp>
       <p:sp>
         <p:nvSpPr>
-          <p:cNvPr name="TextBox 4" id="4"/>
-          <p:cNvSpPr txBox="true"/>
+          <p:cNvPr id="4" name="TextBox 4"/>
+          <p:cNvSpPr txBox="1"/>
           <p:nvPr/>
         </p:nvSpPr>
         <p:spPr>
-          <a:xfrm rot="0">
+          <a:xfrm>
             <a:off x="1028700" y="5621029"/>
             <a:ext cx="4477275" cy="2910840"/>
           </a:xfrm>
@@ -7652,7 +7430,7 @@
           </a:prstGeom>
         </p:spPr>
         <p:txBody>
-          <a:bodyPr anchor="t" rtlCol="false" tIns="0" lIns="0" bIns="0" rIns="0">
+          <a:bodyPr lIns="0" tIns="0" rIns="0" bIns="0" rtlCol="0" anchor="t">
             <a:spAutoFit/>
           </a:bodyPr>
           <a:lstStyle/>
@@ -7679,12 +7457,12 @@
       </p:sp>
       <p:sp>
         <p:nvSpPr>
-          <p:cNvPr name="TextBox 5" id="5"/>
-          <p:cNvSpPr txBox="true"/>
+          <p:cNvPr id="5" name="TextBox 5"/>
+          <p:cNvSpPr txBox="1"/>
           <p:nvPr/>
         </p:nvSpPr>
         <p:spPr>
-          <a:xfrm rot="0">
+          <a:xfrm>
             <a:off x="6926445" y="3921769"/>
             <a:ext cx="4888943" cy="622935"/>
           </a:xfrm>
@@ -7693,7 +7471,7 @@
           </a:prstGeom>
         </p:spPr>
         <p:txBody>
-          <a:bodyPr anchor="t" rtlCol="false" tIns="0" lIns="0" bIns="0" rIns="0">
+          <a:bodyPr lIns="0" tIns="0" rIns="0" bIns="0" rtlCol="0" anchor="t">
             <a:spAutoFit/>
           </a:bodyPr>
           <a:lstStyle/>
@@ -7720,12 +7498,12 @@
       </p:sp>
       <p:sp>
         <p:nvSpPr>
-          <p:cNvPr name="TextBox 6" id="6"/>
-          <p:cNvSpPr txBox="true"/>
+          <p:cNvPr id="6" name="TextBox 6"/>
+          <p:cNvSpPr txBox="1"/>
           <p:nvPr/>
         </p:nvSpPr>
         <p:spPr>
-          <a:xfrm rot="0">
+          <a:xfrm>
             <a:off x="6926445" y="5621029"/>
             <a:ext cx="4477275" cy="2491740"/>
           </a:xfrm>
@@ -7734,7 +7512,7 @@
           </a:prstGeom>
         </p:spPr>
         <p:txBody>
-          <a:bodyPr anchor="t" rtlCol="false" tIns="0" lIns="0" bIns="0" rIns="0">
+          <a:bodyPr lIns="0" tIns="0" rIns="0" bIns="0" rtlCol="0" anchor="t">
             <a:spAutoFit/>
           </a:bodyPr>
           <a:lstStyle/>
@@ -7761,12 +7539,12 @@
       </p:sp>
       <p:sp>
         <p:nvSpPr>
-          <p:cNvPr name="TextBox 7" id="7"/>
-          <p:cNvSpPr txBox="true"/>
+          <p:cNvPr id="7" name="TextBox 7"/>
+          <p:cNvSpPr txBox="1"/>
           <p:nvPr/>
         </p:nvSpPr>
         <p:spPr>
-          <a:xfrm rot="0">
+          <a:xfrm>
             <a:off x="12782025" y="3921769"/>
             <a:ext cx="4477275" cy="1261110"/>
           </a:xfrm>
@@ -7775,7 +7553,7 @@
           </a:prstGeom>
         </p:spPr>
         <p:txBody>
-          <a:bodyPr anchor="t" rtlCol="false" tIns="0" lIns="0" bIns="0" rIns="0">
+          <a:bodyPr lIns="0" tIns="0" rIns="0" bIns="0" rtlCol="0" anchor="t">
             <a:spAutoFit/>
           </a:bodyPr>
           <a:lstStyle/>
@@ -7802,12 +7580,12 @@
       </p:sp>
       <p:sp>
         <p:nvSpPr>
-          <p:cNvPr name="TextBox 8" id="8"/>
-          <p:cNvSpPr txBox="true"/>
+          <p:cNvPr id="8" name="TextBox 8"/>
+          <p:cNvSpPr txBox="1"/>
           <p:nvPr/>
         </p:nvSpPr>
         <p:spPr>
-          <a:xfrm rot="0">
+          <a:xfrm>
             <a:off x="12782025" y="5621029"/>
             <a:ext cx="4477275" cy="2491740"/>
           </a:xfrm>
@@ -7816,7 +7594,7 @@
           </a:prstGeom>
         </p:spPr>
         <p:txBody>
-          <a:bodyPr anchor="t" rtlCol="false" tIns="0" lIns="0" bIns="0" rIns="0">
+          <a:bodyPr lIns="0" tIns="0" rIns="0" bIns="0" rtlCol="0" anchor="t">
             <a:spAutoFit/>
           </a:bodyPr>
           <a:lstStyle/>
@@ -7843,12 +7621,12 @@
       </p:sp>
       <p:sp>
         <p:nvSpPr>
-          <p:cNvPr name="TextBox 9" id="9"/>
-          <p:cNvSpPr txBox="true"/>
+          <p:cNvPr id="9" name="TextBox 9"/>
+          <p:cNvSpPr txBox="1"/>
           <p:nvPr/>
         </p:nvSpPr>
         <p:spPr>
-          <a:xfrm rot="0">
+          <a:xfrm>
             <a:off x="1028700" y="3206755"/>
             <a:ext cx="398364" cy="405765"/>
           </a:xfrm>
@@ -7857,7 +7635,7 @@
           </a:prstGeom>
         </p:spPr>
         <p:txBody>
-          <a:bodyPr anchor="t" rtlCol="false" tIns="0" lIns="0" bIns="0" rIns="0">
+          <a:bodyPr lIns="0" tIns="0" rIns="0" bIns="0" rtlCol="0" anchor="t">
             <a:spAutoFit/>
           </a:bodyPr>
           <a:lstStyle/>
@@ -7884,12 +7662,12 @@
       </p:sp>
       <p:sp>
         <p:nvSpPr>
-          <p:cNvPr name="TextBox 10" id="10"/>
-          <p:cNvSpPr txBox="true"/>
+          <p:cNvPr id="10" name="TextBox 10"/>
+          <p:cNvSpPr txBox="1"/>
           <p:nvPr/>
         </p:nvSpPr>
         <p:spPr>
-          <a:xfrm rot="0">
+          <a:xfrm>
             <a:off x="6926445" y="3206755"/>
             <a:ext cx="398364" cy="405765"/>
           </a:xfrm>
@@ -7898,7 +7676,7 @@
           </a:prstGeom>
         </p:spPr>
         <p:txBody>
-          <a:bodyPr anchor="t" rtlCol="false" tIns="0" lIns="0" bIns="0" rIns="0">
+          <a:bodyPr lIns="0" tIns="0" rIns="0" bIns="0" rtlCol="0" anchor="t">
             <a:spAutoFit/>
           </a:bodyPr>
           <a:lstStyle/>
@@ -7925,12 +7703,12 @@
       </p:sp>
       <p:sp>
         <p:nvSpPr>
-          <p:cNvPr name="TextBox 11" id="11"/>
-          <p:cNvSpPr txBox="true"/>
+          <p:cNvPr id="11" name="TextBox 11"/>
+          <p:cNvSpPr txBox="1"/>
           <p:nvPr/>
         </p:nvSpPr>
         <p:spPr>
-          <a:xfrm rot="0">
+          <a:xfrm>
             <a:off x="12782025" y="3206755"/>
             <a:ext cx="398364" cy="405765"/>
           </a:xfrm>
@@ -7939,7 +7717,7 @@
           </a:prstGeom>
         </p:spPr>
         <p:txBody>
-          <a:bodyPr anchor="t" rtlCol="false" tIns="0" lIns="0" bIns="0" rIns="0">
+          <a:bodyPr lIns="0" tIns="0" rIns="0" bIns="0" rtlCol="0" anchor="t">
             <a:spAutoFit/>
           </a:bodyPr>
           <a:lstStyle/>
@@ -7966,21 +7744,21 @@
       </p:sp>
       <p:sp>
         <p:nvSpPr>
-          <p:cNvPr name="TextBox 12" id="12"/>
-          <p:cNvSpPr txBox="true"/>
+          <p:cNvPr id="12" name="TextBox 12"/>
+          <p:cNvSpPr txBox="1"/>
           <p:nvPr/>
         </p:nvSpPr>
         <p:spPr>
-          <a:xfrm rot="0">
-            <a:off x="6098679" y="1306835"/>
-            <a:ext cx="6090642" cy="1566544"/>
+          <a:xfrm>
+            <a:off x="6098678" y="1306835"/>
+            <a:ext cx="7845921" cy="1566544"/>
           </a:xfrm>
           <a:prstGeom prst="rect">
             <a:avLst/>
           </a:prstGeom>
         </p:spPr>
         <p:txBody>
-          <a:bodyPr anchor="t" rtlCol="false" tIns="0" lIns="0" bIns="0" rIns="0">
+          <a:bodyPr wrap="square" lIns="0" tIns="0" rIns="0" bIns="0" rtlCol="0" anchor="t">
             <a:spAutoFit/>
           </a:bodyPr>
           <a:lstStyle/>
@@ -7991,7 +7769,7 @@
               </a:lnSpc>
             </a:pPr>
             <a:r>
-              <a:rPr lang="en-US" sz="9200" b="true">
+              <a:rPr lang="en-US" sz="9200" b="1" dirty="0">
                 <a:solidFill>
                   <a:srgbClr val="36211B"/>
                 </a:solidFill>
@@ -8000,19 +7778,7 @@
                 <a:cs typeface="Canva Sans Bold"/>
                 <a:sym typeface="Canva Sans Bold"/>
               </a:rPr>
-              <a:t>Obj</a:t>
-            </a:r>
-            <a:r>
-              <a:rPr lang="en-US" b="true" sz="9200">
-                <a:solidFill>
-                  <a:srgbClr val="36211B"/>
-                </a:solidFill>
-                <a:latin typeface="Canva Sans Bold"/>
-                <a:ea typeface="Canva Sans Bold"/>
-                <a:cs typeface="Canva Sans Bold"/>
-                <a:sym typeface="Canva Sans Bold"/>
-              </a:rPr>
-              <a:t>ectives</a:t>
+              <a:t>Objectives</a:t>
             </a:r>
           </a:p>
         </p:txBody>
@@ -8026,13 +7792,14 @@
 </file>
 
 <file path=ppt/slides/slide5.xml><?xml version="1.0" encoding="utf-8"?>
-<p:sld xmlns:p="http://schemas.openxmlformats.org/presentationml/2006/main" xmlns:a="http://schemas.openxmlformats.org/drawingml/2006/main" xmlns:r="http://schemas.openxmlformats.org/officeDocument/2006/relationships">
+<p:sld xmlns:a="http://schemas.openxmlformats.org/drawingml/2006/main" xmlns:r="http://schemas.openxmlformats.org/officeDocument/2006/relationships" xmlns:p="http://schemas.openxmlformats.org/presentationml/2006/main">
   <p:cSld>
     <p:bg>
       <p:bgPr>
         <a:solidFill>
           <a:srgbClr val="E8E6E3"/>
         </a:solidFill>
+        <a:effectLst/>
       </p:bgPr>
     </p:bg>
     <p:spTree>
@@ -8051,12 +7818,12 @@
       </p:grpSpPr>
       <p:sp>
         <p:nvSpPr>
-          <p:cNvPr name="Freeform 2" id="2"/>
+          <p:cNvPr id="2" name="Freeform 2"/>
           <p:cNvSpPr/>
           <p:nvPr/>
         </p:nvSpPr>
         <p:spPr>
-          <a:xfrm flipH="false" flipV="false" rot="0">
+          <a:xfrm>
             <a:off x="12806512" y="0"/>
             <a:ext cx="5481488" cy="10287000"/>
           </a:xfrm>
@@ -8065,9 +7832,9 @@
             <a:gdLst/>
             <a:ahLst/>
             <a:cxnLst/>
-            <a:rect r="r" b="b" t="t" l="l"/>
+            <a:rect l="l" t="t" r="r" b="b"/>
             <a:pathLst>
-              <a:path h="10287000" w="5481488">
+              <a:path w="5481488" h="10287000">
                 <a:moveTo>
                   <a:pt x="0" y="0"/>
                 </a:moveTo>
@@ -8090,19 +7857,19 @@
           <a:blipFill>
             <a:blip r:embed="rId2"/>
             <a:stretch>
-              <a:fillRect l="-25072" t="0" r="-39" b="0"/>
+              <a:fillRect l="-25072" r="-39"/>
             </a:stretch>
           </a:blipFill>
         </p:spPr>
       </p:sp>
       <p:sp>
         <p:nvSpPr>
-          <p:cNvPr name="Freeform 3" id="3"/>
+          <p:cNvPr id="3" name="Freeform 3"/>
           <p:cNvSpPr/>
           <p:nvPr/>
         </p:nvSpPr>
         <p:spPr>
-          <a:xfrm flipH="false" flipV="false" rot="0">
+          <a:xfrm>
             <a:off x="0" y="0"/>
             <a:ext cx="18288000" cy="376223"/>
           </a:xfrm>
@@ -8111,9 +7878,9 @@
             <a:gdLst/>
             <a:ahLst/>
             <a:cxnLst/>
-            <a:rect r="r" b="b" t="t" l="l"/>
+            <a:rect l="l" t="t" r="r" b="b"/>
             <a:pathLst>
-              <a:path h="376223" w="18288000">
+              <a:path w="18288000" h="376223">
                 <a:moveTo>
                   <a:pt x="0" y="0"/>
                 </a:moveTo>
@@ -8136,19 +7903,19 @@
           <a:blipFill>
             <a:blip r:embed="rId3"/>
             <a:stretch>
-              <a:fillRect l="0" t="-1531929" r="0" b="-1102351"/>
+              <a:fillRect t="-1531929" b="-1102351"/>
             </a:stretch>
           </a:blipFill>
         </p:spPr>
       </p:sp>
       <p:sp>
         <p:nvSpPr>
-          <p:cNvPr name="TextBox 4" id="4"/>
-          <p:cNvSpPr txBox="true"/>
+          <p:cNvPr id="4" name="TextBox 4"/>
+          <p:cNvSpPr txBox="1"/>
           <p:nvPr/>
         </p:nvSpPr>
         <p:spPr>
-          <a:xfrm rot="0">
+          <a:xfrm>
             <a:off x="1028700" y="2473642"/>
             <a:ext cx="11566948" cy="7520940"/>
           </a:xfrm>
@@ -8157,7 +7924,7 @@
           </a:prstGeom>
         </p:spPr>
         <p:txBody>
-          <a:bodyPr anchor="t" rtlCol="false" tIns="0" lIns="0" bIns="0" rIns="0">
+          <a:bodyPr lIns="0" tIns="0" rIns="0" bIns="0" rtlCol="0" anchor="t">
             <a:spAutoFit/>
           </a:bodyPr>
           <a:lstStyle/>
@@ -8168,7 +7935,7 @@
               </a:lnSpc>
             </a:pPr>
             <a:r>
-              <a:rPr lang="en-US" b="true" sz="2400" spc="-48">
+              <a:rPr lang="en-US" sz="2400" b="1" spc="-48">
                 <a:solidFill>
                   <a:srgbClr val="36211B"/>
                 </a:solidFill>
@@ -8196,19 +7963,7 @@
                 <a:cs typeface="Canva Sans"/>
                 <a:sym typeface="Canva Sans"/>
               </a:rPr>
-              <a:t>Researc</a:t>
-            </a:r>
-            <a:r>
-              <a:rPr lang="en-US" sz="2400" spc="-48">
-                <a:solidFill>
-                  <a:srgbClr val="36211B"/>
-                </a:solidFill>
-                <a:latin typeface="Canva Sans"/>
-                <a:ea typeface="Canva Sans"/>
-                <a:cs typeface="Canva Sans"/>
-                <a:sym typeface="Canva Sans"/>
-              </a:rPr>
-              <a:t>h demonstrated that a deep convolutional neural network can classify skin cancer with a level of competence comparable to dermatologists. This validates the use of CNNs for skin condition analysis, forming the basis of our project.</a:t>
+              <a:t>Research demonstrated that a deep convolutional neural network can classify skin cancer with a level of competence comparable to dermatologists. This validates the use of CNNs for skin condition analysis, forming the basis of our project.</a:t>
             </a:r>
           </a:p>
           <a:p>
@@ -8217,6 +7972,15 @@
                 <a:spcPts val="3359"/>
               </a:lnSpc>
             </a:pPr>
+            <a:endParaRPr lang="en-US" sz="2400" spc="-48">
+              <a:solidFill>
+                <a:srgbClr val="36211B"/>
+              </a:solidFill>
+              <a:latin typeface="Canva Sans"/>
+              <a:ea typeface="Canva Sans"/>
+              <a:cs typeface="Canva Sans"/>
+              <a:sym typeface="Canva Sans"/>
+            </a:endParaRPr>
           </a:p>
           <a:p>
             <a:pPr algn="l">
@@ -8225,7 +7989,7 @@
               </a:lnSpc>
             </a:pPr>
             <a:r>
-              <a:rPr lang="en-US" b="true" sz="2400" spc="-48">
+              <a:rPr lang="en-US" sz="2400" b="1" spc="-48">
                 <a:solidFill>
                   <a:srgbClr val="36211B"/>
                 </a:solidFill>
@@ -8262,6 +8026,15 @@
                 <a:spcPts val="3359"/>
               </a:lnSpc>
             </a:pPr>
+            <a:endParaRPr lang="en-US" sz="2400" spc="-48">
+              <a:solidFill>
+                <a:srgbClr val="36211B"/>
+              </a:solidFill>
+              <a:latin typeface="Canva Sans"/>
+              <a:ea typeface="Canva Sans"/>
+              <a:cs typeface="Canva Sans"/>
+              <a:sym typeface="Canva Sans"/>
+            </a:endParaRPr>
           </a:p>
           <a:p>
             <a:pPr algn="l">
@@ -8270,7 +8043,7 @@
               </a:lnSpc>
             </a:pPr>
             <a:r>
-              <a:rPr lang="en-US" b="true" sz="2400" spc="-48">
+              <a:rPr lang="en-US" sz="2400" b="1" spc="-48">
                 <a:solidFill>
                   <a:srgbClr val="36211B"/>
                 </a:solidFill>
@@ -8307,17 +8080,26 @@
                 <a:spcPts val="3359"/>
               </a:lnSpc>
             </a:pPr>
-          </a:p>
-        </p:txBody>
-      </p:sp>
-      <p:sp>
-        <p:nvSpPr>
-          <p:cNvPr name="TextBox 5" id="5"/>
-          <p:cNvSpPr txBox="true"/>
+            <a:endParaRPr lang="en-US" sz="2400" spc="-48">
+              <a:solidFill>
+                <a:srgbClr val="36211B"/>
+              </a:solidFill>
+              <a:latin typeface="Canva Sans"/>
+              <a:ea typeface="Canva Sans"/>
+              <a:cs typeface="Canva Sans"/>
+              <a:sym typeface="Canva Sans"/>
+            </a:endParaRPr>
+          </a:p>
+        </p:txBody>
+      </p:sp>
+      <p:sp>
+        <p:nvSpPr>
+          <p:cNvPr id="5" name="TextBox 5"/>
+          <p:cNvSpPr txBox="1"/>
           <p:nvPr/>
         </p:nvSpPr>
         <p:spPr>
-          <a:xfrm rot="0">
+          <a:xfrm>
             <a:off x="15160864" y="8862060"/>
             <a:ext cx="2098436" cy="396240"/>
           </a:xfrm>
@@ -8326,7 +8108,7 @@
           </a:prstGeom>
         </p:spPr>
         <p:txBody>
-          <a:bodyPr anchor="t" rtlCol="false" tIns="0" lIns="0" bIns="0" rIns="0">
+          <a:bodyPr lIns="0" tIns="0" rIns="0" bIns="0" rtlCol="0" anchor="t">
             <a:spAutoFit/>
           </a:bodyPr>
           <a:lstStyle/>
@@ -8353,12 +8135,12 @@
       </p:sp>
       <p:sp>
         <p:nvSpPr>
-          <p:cNvPr name="TextBox 6" id="6"/>
-          <p:cNvSpPr txBox="true"/>
+          <p:cNvPr id="6" name="TextBox 6"/>
+          <p:cNvSpPr txBox="1"/>
           <p:nvPr/>
         </p:nvSpPr>
         <p:spPr>
-          <a:xfrm rot="0">
+          <a:xfrm>
             <a:off x="790730" y="573723"/>
             <a:ext cx="9994463" cy="1543048"/>
           </a:xfrm>
@@ -8367,7 +8149,7 @@
           </a:prstGeom>
         </p:spPr>
         <p:txBody>
-          <a:bodyPr anchor="t" rtlCol="false" tIns="0" lIns="0" bIns="0" rIns="0">
+          <a:bodyPr lIns="0" tIns="0" rIns="0" bIns="0" rtlCol="0" anchor="t">
             <a:spAutoFit/>
           </a:bodyPr>
           <a:lstStyle/>
@@ -8378,7 +8160,7 @@
               </a:lnSpc>
             </a:pPr>
             <a:r>
-              <a:rPr lang="en-US" b="true" sz="9000">
+              <a:rPr lang="en-US" sz="9000" b="1">
                 <a:solidFill>
                   <a:srgbClr val="000000"/>
                 </a:solidFill>
@@ -8387,19 +8169,7 @@
                 <a:cs typeface="IBM Plex Serif Bold"/>
                 <a:sym typeface="IBM Plex Serif Bold"/>
               </a:rPr>
-              <a:t>Liter</a:t>
-            </a:r>
-            <a:r>
-              <a:rPr lang="en-US" b="true" sz="9000">
-                <a:solidFill>
-                  <a:srgbClr val="000000"/>
-                </a:solidFill>
-                <a:latin typeface="IBM Plex Serif Bold"/>
-                <a:ea typeface="IBM Plex Serif Bold"/>
-                <a:cs typeface="IBM Plex Serif Bold"/>
-                <a:sym typeface="IBM Plex Serif Bold"/>
-              </a:rPr>
-              <a:t>ature Survey</a:t>
+              <a:t>Literature Survey</a:t>
             </a:r>
           </a:p>
         </p:txBody>
@@ -8413,13 +8183,14 @@
 </file>
 
 <file path=ppt/slides/slide6.xml><?xml version="1.0" encoding="utf-8"?>
-<p:sld xmlns:p="http://schemas.openxmlformats.org/presentationml/2006/main" xmlns:a="http://schemas.openxmlformats.org/drawingml/2006/main" xmlns:r="http://schemas.openxmlformats.org/officeDocument/2006/relationships">
+<p:sld xmlns:a="http://schemas.openxmlformats.org/drawingml/2006/main" xmlns:r="http://schemas.openxmlformats.org/officeDocument/2006/relationships" xmlns:p="http://schemas.openxmlformats.org/presentationml/2006/main">
   <p:cSld>
     <p:bg>
       <p:bgPr>
         <a:solidFill>
           <a:srgbClr val="E8E6E3"/>
         </a:solidFill>
+        <a:effectLst/>
       </p:bgPr>
     </p:bg>
     <p:spTree>
@@ -8438,12 +8209,12 @@
       </p:grpSpPr>
       <p:sp>
         <p:nvSpPr>
-          <p:cNvPr name="Freeform 2" id="2"/>
+          <p:cNvPr id="2" name="Freeform 2"/>
           <p:cNvSpPr/>
           <p:nvPr/>
         </p:nvSpPr>
         <p:spPr>
-          <a:xfrm flipH="false" flipV="false" rot="0">
+          <a:xfrm>
             <a:off x="0" y="0"/>
             <a:ext cx="18288000" cy="376223"/>
           </a:xfrm>
@@ -8452,9 +8223,9 @@
             <a:gdLst/>
             <a:ahLst/>
             <a:cxnLst/>
-            <a:rect r="r" b="b" t="t" l="l"/>
+            <a:rect l="l" t="t" r="r" b="b"/>
             <a:pathLst>
-              <a:path h="376223" w="18288000">
+              <a:path w="18288000" h="376223">
                 <a:moveTo>
                   <a:pt x="0" y="0"/>
                 </a:moveTo>
@@ -8477,19 +8248,19 @@
           <a:blipFill>
             <a:blip r:embed="rId2"/>
             <a:stretch>
-              <a:fillRect l="0" t="-1531929" r="0" b="-1102351"/>
+              <a:fillRect t="-1531929" b="-1102351"/>
             </a:stretch>
           </a:blipFill>
         </p:spPr>
       </p:sp>
       <p:sp>
         <p:nvSpPr>
-          <p:cNvPr name="TextBox 3" id="3"/>
-          <p:cNvSpPr txBox="true"/>
+          <p:cNvPr id="3" name="TextBox 3"/>
+          <p:cNvSpPr txBox="1"/>
           <p:nvPr/>
         </p:nvSpPr>
         <p:spPr>
-          <a:xfrm rot="0">
+          <a:xfrm>
             <a:off x="1385479" y="847725"/>
             <a:ext cx="11024058" cy="1609091"/>
           </a:xfrm>
@@ -8498,7 +8269,7 @@
           </a:prstGeom>
         </p:spPr>
         <p:txBody>
-          <a:bodyPr anchor="t" rtlCol="false" tIns="0" lIns="0" bIns="0" rIns="0">
+          <a:bodyPr lIns="0" tIns="0" rIns="0" bIns="0" rtlCol="0" anchor="t">
             <a:spAutoFit/>
           </a:bodyPr>
           <a:lstStyle/>
@@ -8525,12 +8296,12 @@
       </p:sp>
       <p:sp>
         <p:nvSpPr>
-          <p:cNvPr name="TextBox 4" id="4"/>
-          <p:cNvSpPr txBox="true"/>
+          <p:cNvPr id="4" name="TextBox 4"/>
+          <p:cNvSpPr txBox="1"/>
           <p:nvPr/>
         </p:nvSpPr>
         <p:spPr>
-          <a:xfrm rot="0">
+          <a:xfrm>
             <a:off x="2687555" y="2866390"/>
             <a:ext cx="13848874" cy="6391910"/>
           </a:xfrm>
@@ -8539,12 +8310,12 @@
           </a:prstGeom>
         </p:spPr>
         <p:txBody>
-          <a:bodyPr anchor="t" rtlCol="false" tIns="0" lIns="0" bIns="0" rIns="0">
+          <a:bodyPr lIns="0" tIns="0" rIns="0" bIns="0" rtlCol="0" anchor="t">
             <a:spAutoFit/>
           </a:bodyPr>
           <a:lstStyle/>
           <a:p>
-            <a:pPr algn="l" marL="561339" indent="-280669" lvl="1">
+            <a:pPr marL="561339" lvl="1" indent="-280669" algn="l">
               <a:lnSpc>
                 <a:spcPts val="3639"/>
               </a:lnSpc>
@@ -8552,7 +8323,7 @@
               <a:buChar char="•"/>
             </a:pPr>
             <a:r>
-              <a:rPr lang="en-US" b="true" sz="2599">
+              <a:rPr lang="en-US" sz="2599" b="1">
                 <a:solidFill>
                   <a:srgbClr val="36211B"/>
                 </a:solidFill>
@@ -8561,23 +8332,11 @@
                 <a:cs typeface="Canva Sans Bold"/>
                 <a:sym typeface="Canva Sans Bold"/>
               </a:rPr>
-              <a:t>Fronten</a:t>
-            </a:r>
-            <a:r>
-              <a:rPr lang="en-US" b="true" sz="2599">
-                <a:solidFill>
-                  <a:srgbClr val="36211B"/>
-                </a:solidFill>
-                <a:latin typeface="Canva Sans Bold"/>
-                <a:ea typeface="Canva Sans Bold"/>
-                <a:cs typeface="Canva Sans Bold"/>
-                <a:sym typeface="Canva Sans Bold"/>
-              </a:rPr>
-              <a:t>d:</a:t>
-            </a:r>
-          </a:p>
-          <a:p>
-            <a:pPr algn="l" marL="1122678" indent="-374226" lvl="2">
+              <a:t>Frontend:</a:t>
+            </a:r>
+          </a:p>
+          <a:p>
+            <a:pPr marL="1122678" lvl="2" indent="-374226" algn="l">
               <a:lnSpc>
                 <a:spcPts val="3639"/>
               </a:lnSpc>
@@ -8585,7 +8344,7 @@
               <a:buChar char="⚬"/>
             </a:pPr>
             <a:r>
-              <a:rPr lang="en-US" b="true" sz="2599">
+              <a:rPr lang="en-US" sz="2599" b="1">
                 <a:solidFill>
                   <a:srgbClr val="36211B"/>
                 </a:solidFill>
@@ -8598,7 +8357,7 @@
             </a:r>
           </a:p>
           <a:p>
-            <a:pPr algn="l" marL="1122678" indent="-374226" lvl="2">
+            <a:pPr marL="1122678" lvl="2" indent="-374226" algn="l">
               <a:lnSpc>
                 <a:spcPts val="3639"/>
               </a:lnSpc>
@@ -8606,7 +8365,7 @@
               <a:buChar char="⚬"/>
             </a:pPr>
             <a:r>
-              <a:rPr lang="en-US" b="true" sz="2599">
+              <a:rPr lang="en-US" sz="2599" b="1">
                 <a:solidFill>
                   <a:srgbClr val="36211B"/>
                 </a:solidFill>
@@ -8619,7 +8378,7 @@
             </a:r>
           </a:p>
           <a:p>
-            <a:pPr algn="l" marL="561339" indent="-280669" lvl="1">
+            <a:pPr marL="561339" lvl="1" indent="-280669" algn="l">
               <a:lnSpc>
                 <a:spcPts val="3639"/>
               </a:lnSpc>
@@ -8627,7 +8386,7 @@
               <a:buChar char="•"/>
             </a:pPr>
             <a:r>
-              <a:rPr lang="en-US" b="true" sz="2599">
+              <a:rPr lang="en-US" sz="2599" b="1">
                 <a:solidFill>
                   <a:srgbClr val="36211B"/>
                 </a:solidFill>
@@ -8640,7 +8399,7 @@
             </a:r>
           </a:p>
           <a:p>
-            <a:pPr algn="l" marL="1122678" indent="-374226" lvl="2">
+            <a:pPr marL="1122678" lvl="2" indent="-374226" algn="l">
               <a:lnSpc>
                 <a:spcPts val="3639"/>
               </a:lnSpc>
@@ -8648,7 +8407,7 @@
               <a:buChar char="⚬"/>
             </a:pPr>
             <a:r>
-              <a:rPr lang="en-US" b="true" sz="2599">
+              <a:rPr lang="en-US" sz="2599" b="1">
                 <a:solidFill>
                   <a:srgbClr val="36211B"/>
                 </a:solidFill>
@@ -8661,7 +8420,7 @@
             </a:r>
           </a:p>
           <a:p>
-            <a:pPr algn="l" marL="1122678" indent="-374226" lvl="2">
+            <a:pPr marL="1122678" lvl="2" indent="-374226" algn="l">
               <a:lnSpc>
                 <a:spcPts val="3639"/>
               </a:lnSpc>
@@ -8669,7 +8428,7 @@
               <a:buChar char="⚬"/>
             </a:pPr>
             <a:r>
-              <a:rPr lang="en-US" b="true" sz="2599">
+              <a:rPr lang="en-US" sz="2599" b="1">
                 <a:solidFill>
                   <a:srgbClr val="36211B"/>
                 </a:solidFill>
@@ -8682,7 +8441,7 @@
             </a:r>
           </a:p>
           <a:p>
-            <a:pPr algn="l" marL="561339" indent="-280669" lvl="1">
+            <a:pPr marL="561339" lvl="1" indent="-280669" algn="l">
               <a:lnSpc>
                 <a:spcPts val="3639"/>
               </a:lnSpc>
@@ -8690,7 +8449,7 @@
               <a:buChar char="•"/>
             </a:pPr>
             <a:r>
-              <a:rPr lang="en-US" b="true" sz="2599">
+              <a:rPr lang="en-US" sz="2599" b="1">
                 <a:solidFill>
                   <a:srgbClr val="36211B"/>
                 </a:solidFill>
@@ -8703,7 +8462,7 @@
             </a:r>
           </a:p>
           <a:p>
-            <a:pPr algn="l" marL="1122678" indent="-374226" lvl="2">
+            <a:pPr marL="1122678" lvl="2" indent="-374226" algn="l">
               <a:lnSpc>
                 <a:spcPts val="3639"/>
               </a:lnSpc>
@@ -8711,7 +8470,7 @@
               <a:buChar char="⚬"/>
             </a:pPr>
             <a:r>
-              <a:rPr lang="en-US" b="true" sz="2599">
+              <a:rPr lang="en-US" sz="2599" b="1">
                 <a:solidFill>
                   <a:srgbClr val="36211B"/>
                 </a:solidFill>
@@ -8724,7 +8483,7 @@
             </a:r>
           </a:p>
           <a:p>
-            <a:pPr algn="l" marL="561339" indent="-280669" lvl="1">
+            <a:pPr marL="561339" lvl="1" indent="-280669" algn="l">
               <a:lnSpc>
                 <a:spcPts val="3639"/>
               </a:lnSpc>
@@ -8732,7 +8491,7 @@
               <a:buChar char="•"/>
             </a:pPr>
             <a:r>
-              <a:rPr lang="en-US" b="true" sz="2599">
+              <a:rPr lang="en-US" sz="2599" b="1">
                 <a:solidFill>
                   <a:srgbClr val="36211B"/>
                 </a:solidFill>
@@ -8745,7 +8504,7 @@
             </a:r>
           </a:p>
           <a:p>
-            <a:pPr algn="l" marL="1122678" indent="-374226" lvl="2">
+            <a:pPr marL="1122678" lvl="2" indent="-374226" algn="l">
               <a:lnSpc>
                 <a:spcPts val="3639"/>
               </a:lnSpc>
@@ -8753,7 +8512,7 @@
               <a:buChar char="⚬"/>
             </a:pPr>
             <a:r>
-              <a:rPr lang="en-US" b="true" sz="2599">
+              <a:rPr lang="en-US" sz="2599" b="1">
                 <a:solidFill>
                   <a:srgbClr val="36211B"/>
                 </a:solidFill>
@@ -8766,7 +8525,7 @@
             </a:r>
           </a:p>
           <a:p>
-            <a:pPr algn="l" marL="1122678" indent="-374226" lvl="2">
+            <a:pPr marL="1122678" lvl="2" indent="-374226" algn="l">
               <a:lnSpc>
                 <a:spcPts val="3639"/>
               </a:lnSpc>
@@ -8774,7 +8533,7 @@
               <a:buChar char="⚬"/>
             </a:pPr>
             <a:r>
-              <a:rPr lang="en-US" b="true" sz="2599">
+              <a:rPr lang="en-US" sz="2599" b="1">
                 <a:solidFill>
                   <a:srgbClr val="36211B"/>
                 </a:solidFill>
@@ -8787,7 +8546,7 @@
             </a:r>
           </a:p>
           <a:p>
-            <a:pPr algn="l" marL="1122678" indent="-374226" lvl="2">
+            <a:pPr marL="1122678" lvl="2" indent="-374226" algn="l">
               <a:lnSpc>
                 <a:spcPts val="3639"/>
               </a:lnSpc>
@@ -8795,7 +8554,7 @@
               <a:buChar char="⚬"/>
             </a:pPr>
             <a:r>
-              <a:rPr lang="en-US" b="true" sz="2599">
+              <a:rPr lang="en-US" sz="2599" b="1">
                 <a:solidFill>
                   <a:srgbClr val="36211B"/>
                 </a:solidFill>
@@ -8813,6 +8572,15 @@
                 <a:spcPts val="3639"/>
               </a:lnSpc>
             </a:pPr>
+            <a:endParaRPr lang="en-US" sz="2599" b="1">
+              <a:solidFill>
+                <a:srgbClr val="36211B"/>
+              </a:solidFill>
+              <a:latin typeface="Canva Sans Bold"/>
+              <a:ea typeface="Canva Sans Bold"/>
+              <a:cs typeface="Canva Sans Bold"/>
+              <a:sym typeface="Canva Sans Bold"/>
+            </a:endParaRPr>
           </a:p>
           <a:p>
             <a:pPr algn="l">
@@ -8820,6 +8588,15 @@
                 <a:spcPts val="3639"/>
               </a:lnSpc>
             </a:pPr>
+            <a:endParaRPr lang="en-US" sz="2599" b="1">
+              <a:solidFill>
+                <a:srgbClr val="36211B"/>
+              </a:solidFill>
+              <a:latin typeface="Canva Sans Bold"/>
+              <a:ea typeface="Canva Sans Bold"/>
+              <a:cs typeface="Canva Sans Bold"/>
+              <a:sym typeface="Canva Sans Bold"/>
+            </a:endParaRPr>
           </a:p>
         </p:txBody>
       </p:sp>
@@ -8832,13 +8609,14 @@
 </file>
 
 <file path=ppt/slides/slide7.xml><?xml version="1.0" encoding="utf-8"?>
-<p:sld xmlns:p="http://schemas.openxmlformats.org/presentationml/2006/main" xmlns:a="http://schemas.openxmlformats.org/drawingml/2006/main" xmlns:r="http://schemas.openxmlformats.org/officeDocument/2006/relationships">
+<p:sld xmlns:a="http://schemas.openxmlformats.org/drawingml/2006/main" xmlns:r="http://schemas.openxmlformats.org/officeDocument/2006/relationships" xmlns:p="http://schemas.openxmlformats.org/presentationml/2006/main">
   <p:cSld>
     <p:bg>
       <p:bgPr>
         <a:solidFill>
           <a:srgbClr val="E8E6E3"/>
         </a:solidFill>
+        <a:effectLst/>
       </p:bgPr>
     </p:bg>
     <p:spTree>
@@ -8857,12 +8635,12 @@
       </p:grpSpPr>
       <p:sp>
         <p:nvSpPr>
-          <p:cNvPr name="Freeform 2" id="2"/>
+          <p:cNvPr id="2" name="Freeform 2"/>
           <p:cNvSpPr/>
           <p:nvPr/>
         </p:nvSpPr>
         <p:spPr>
-          <a:xfrm flipH="false" flipV="false" rot="0">
+          <a:xfrm>
             <a:off x="0" y="0"/>
             <a:ext cx="18288000" cy="376223"/>
           </a:xfrm>
@@ -8871,9 +8649,9 @@
             <a:gdLst/>
             <a:ahLst/>
             <a:cxnLst/>
-            <a:rect r="r" b="b" t="t" l="l"/>
+            <a:rect l="l" t="t" r="r" b="b"/>
             <a:pathLst>
-              <a:path h="376223" w="18288000">
+              <a:path w="18288000" h="376223">
                 <a:moveTo>
                   <a:pt x="0" y="0"/>
                 </a:moveTo>
@@ -8896,19 +8674,19 @@
           <a:blipFill>
             <a:blip r:embed="rId2"/>
             <a:stretch>
-              <a:fillRect l="0" t="-1531929" r="0" b="-1102351"/>
+              <a:fillRect t="-1531929" b="-1102351"/>
             </a:stretch>
           </a:blipFill>
         </p:spPr>
       </p:sp>
       <p:sp>
         <p:nvSpPr>
-          <p:cNvPr name="TextBox 3" id="3"/>
-          <p:cNvSpPr txBox="true"/>
+          <p:cNvPr id="3" name="TextBox 3"/>
+          <p:cNvSpPr txBox="1"/>
           <p:nvPr/>
         </p:nvSpPr>
         <p:spPr>
-          <a:xfrm rot="0">
+          <a:xfrm>
             <a:off x="1028700" y="2911570"/>
             <a:ext cx="7415452" cy="5848350"/>
           </a:xfrm>
@@ -8917,7 +8695,7 @@
           </a:prstGeom>
         </p:spPr>
         <p:txBody>
-          <a:bodyPr anchor="t" rtlCol="false" tIns="0" lIns="0" bIns="0" rIns="0">
+          <a:bodyPr lIns="0" tIns="0" rIns="0" bIns="0" rtlCol="0" anchor="t">
             <a:spAutoFit/>
           </a:bodyPr>
           <a:lstStyle/>
@@ -8941,7 +8719,7 @@
             </a:r>
           </a:p>
           <a:p>
-            <a:pPr algn="l" marL="647703" indent="-323852" lvl="1">
+            <a:pPr marL="647703" lvl="1" indent="-323852" algn="l">
               <a:lnSpc>
                 <a:spcPts val="4200"/>
               </a:lnSpc>
@@ -8962,7 +8740,7 @@
             </a:r>
           </a:p>
           <a:p>
-            <a:pPr algn="l" marL="647703" indent="-323852" lvl="1">
+            <a:pPr marL="647703" lvl="1" indent="-323852" algn="l">
               <a:lnSpc>
                 <a:spcPts val="4200"/>
               </a:lnSpc>
@@ -8983,7 +8761,7 @@
             </a:r>
           </a:p>
           <a:p>
-            <a:pPr algn="l" marL="647703" indent="-323852" lvl="1">
+            <a:pPr marL="647703" lvl="1" indent="-323852" algn="l">
               <a:lnSpc>
                 <a:spcPts val="4200"/>
               </a:lnSpc>
@@ -9009,17 +8787,26 @@
                 <a:spcPts val="4200"/>
               </a:lnSpc>
             </a:pPr>
-          </a:p>
-        </p:txBody>
-      </p:sp>
-      <p:sp>
-        <p:nvSpPr>
-          <p:cNvPr name="TextBox 4" id="4"/>
-          <p:cNvSpPr txBox="true"/>
+            <a:endParaRPr lang="en-US" sz="3000" spc="-120">
+              <a:solidFill>
+                <a:srgbClr val="36211B"/>
+              </a:solidFill>
+              <a:latin typeface="IBM Plex Serif"/>
+              <a:ea typeface="IBM Plex Serif"/>
+              <a:cs typeface="IBM Plex Serif"/>
+              <a:sym typeface="IBM Plex Serif"/>
+            </a:endParaRPr>
+          </a:p>
+        </p:txBody>
+      </p:sp>
+      <p:sp>
+        <p:nvSpPr>
+          <p:cNvPr id="4" name="TextBox 4"/>
+          <p:cNvSpPr txBox="1"/>
           <p:nvPr/>
         </p:nvSpPr>
         <p:spPr>
-          <a:xfrm rot="0">
+          <a:xfrm>
             <a:off x="15160864" y="8862060"/>
             <a:ext cx="2098436" cy="396240"/>
           </a:xfrm>
@@ -9028,7 +8815,7 @@
           </a:prstGeom>
         </p:spPr>
         <p:txBody>
-          <a:bodyPr anchor="t" rtlCol="false" tIns="0" lIns="0" bIns="0" rIns="0">
+          <a:bodyPr lIns="0" tIns="0" rIns="0" bIns="0" rtlCol="0" anchor="t">
             <a:spAutoFit/>
           </a:bodyPr>
           <a:lstStyle/>
@@ -9055,12 +8842,12 @@
       </p:sp>
       <p:sp>
         <p:nvSpPr>
-          <p:cNvPr name="TextBox 5" id="5"/>
-          <p:cNvSpPr txBox="true"/>
+          <p:cNvPr id="5" name="TextBox 5"/>
+          <p:cNvSpPr txBox="1"/>
           <p:nvPr/>
         </p:nvSpPr>
         <p:spPr>
-          <a:xfrm rot="0">
+          <a:xfrm>
             <a:off x="451128" y="679270"/>
             <a:ext cx="10983159" cy="1543048"/>
           </a:xfrm>
@@ -9069,7 +8856,7 @@
           </a:prstGeom>
         </p:spPr>
         <p:txBody>
-          <a:bodyPr anchor="t" rtlCol="false" tIns="0" lIns="0" bIns="0" rIns="0">
+          <a:bodyPr lIns="0" tIns="0" rIns="0" bIns="0" rtlCol="0" anchor="t">
             <a:spAutoFit/>
           </a:bodyPr>
           <a:lstStyle/>
@@ -9089,31 +8876,19 @@
                 <a:cs typeface="IBM Plex Serif"/>
                 <a:sym typeface="IBM Plex Serif"/>
               </a:rPr>
-              <a:t>System</a:t>
-            </a:r>
-            <a:r>
-              <a:rPr lang="en-US" sz="9000">
-                <a:solidFill>
-                  <a:srgbClr val="000000"/>
-                </a:solidFill>
-                <a:latin typeface="IBM Plex Serif"/>
-                <a:ea typeface="IBM Plex Serif"/>
-                <a:cs typeface="IBM Plex Serif"/>
-                <a:sym typeface="IBM Plex Serif"/>
-              </a:rPr>
-              <a:t> Architecture</a:t>
+              <a:t>System Architecture</a:t>
             </a:r>
           </a:p>
         </p:txBody>
       </p:sp>
       <p:grpSp>
         <p:nvGrpSpPr>
-          <p:cNvPr name="Group 6" id="6"/>
+          <p:cNvPr id="6" name="Group 6"/>
           <p:cNvGrpSpPr/>
           <p:nvPr/>
         </p:nvGrpSpPr>
         <p:grpSpPr>
-          <a:xfrm rot="0">
+          <a:xfrm>
             <a:off x="8825103" y="2968720"/>
             <a:ext cx="9005377" cy="5375391"/>
             <a:chOff x="0" y="0"/>
@@ -9122,12 +8897,12 @@
         </p:grpSpPr>
         <p:sp>
           <p:nvSpPr>
-            <p:cNvPr name="Freeform 7" id="7"/>
+            <p:cNvPr id="7" name="Freeform 7"/>
             <p:cNvSpPr/>
             <p:nvPr/>
           </p:nvSpPr>
           <p:spPr>
-            <a:xfrm flipH="false" flipV="false" rot="0">
+            <a:xfrm>
               <a:off x="0" y="0"/>
               <a:ext cx="1361681" cy="812800"/>
             </a:xfrm>
@@ -9136,9 +8911,9 @@
               <a:gdLst/>
               <a:ahLst/>
               <a:cxnLst/>
-              <a:rect r="r" b="b" t="t" l="l"/>
+              <a:rect l="l" t="t" r="r" b="b"/>
               <a:pathLst>
-                <a:path h="812800" w="1361681">
+                <a:path w="1361681" h="812800">
                   <a:moveTo>
                     <a:pt x="0" y="0"/>
                   </a:moveTo>
@@ -9158,7 +8933,7 @@
             <a:blipFill>
               <a:blip r:embed="rId3"/>
               <a:stretch>
-                <a:fillRect l="0" t="-5808" r="0" b="-5808"/>
+                <a:fillRect t="-5808" b="-5808"/>
               </a:stretch>
             </a:blipFill>
           </p:spPr>
@@ -9173,13 +8948,14 @@
 </file>
 
 <file path=ppt/slides/slide8.xml><?xml version="1.0" encoding="utf-8"?>
-<p:sld xmlns:p="http://schemas.openxmlformats.org/presentationml/2006/main" xmlns:a="http://schemas.openxmlformats.org/drawingml/2006/main">
+<p:sld xmlns:a="http://schemas.openxmlformats.org/drawingml/2006/main" xmlns:r="http://schemas.openxmlformats.org/officeDocument/2006/relationships" xmlns:p="http://schemas.openxmlformats.org/presentationml/2006/main">
   <p:cSld>
     <p:bg>
       <p:bgPr>
         <a:solidFill>
           <a:srgbClr val="E8E6E3"/>
         </a:solidFill>
+        <a:effectLst/>
       </p:bgPr>
     </p:bg>
     <p:spTree>
@@ -9198,12 +8974,12 @@
       </p:grpSpPr>
       <p:grpSp>
         <p:nvGrpSpPr>
-          <p:cNvPr name="Group 2" id="2"/>
+          <p:cNvPr id="2" name="Group 2"/>
           <p:cNvGrpSpPr/>
           <p:nvPr/>
         </p:nvGrpSpPr>
         <p:grpSpPr>
-          <a:xfrm rot="0">
+          <a:xfrm>
             <a:off x="1647825" y="2057400"/>
             <a:ext cx="5201573" cy="5960980"/>
             <a:chOff x="0" y="0"/>
@@ -9212,12 +8988,12 @@
         </p:grpSpPr>
         <p:sp>
           <p:nvSpPr>
-            <p:cNvPr name="TextBox 3" id="3"/>
-            <p:cNvSpPr txBox="true"/>
+            <p:cNvPr id="3" name="TextBox 3"/>
+            <p:cNvSpPr txBox="1"/>
             <p:nvPr/>
           </p:nvSpPr>
           <p:spPr>
-            <a:xfrm rot="0">
+            <a:xfrm>
               <a:off x="0" y="0"/>
               <a:ext cx="6935430" cy="1295400"/>
             </a:xfrm>
@@ -9226,12 +9002,12 @@
             </a:prstGeom>
           </p:spPr>
           <p:txBody>
-            <a:bodyPr anchor="t" rtlCol="false" tIns="0" lIns="0" bIns="0" rIns="0">
+            <a:bodyPr lIns="0" tIns="0" rIns="0" bIns="0" rtlCol="0" anchor="t">
               <a:spAutoFit/>
             </a:bodyPr>
             <a:lstStyle/>
             <a:p>
-              <a:pPr algn="l" marL="0" indent="0" lvl="0">
+              <a:pPr marL="0" lvl="0" indent="0" algn="l">
                 <a:lnSpc>
                   <a:spcPts val="7650"/>
                 </a:lnSpc>
@@ -9253,12 +9029,12 @@
         </p:sp>
         <p:sp>
           <p:nvSpPr>
-            <p:cNvPr name="TextBox 4" id="4"/>
-            <p:cNvSpPr txBox="true"/>
+            <p:cNvPr id="4" name="TextBox 4"/>
+            <p:cNvSpPr txBox="1"/>
             <p:nvPr/>
           </p:nvSpPr>
           <p:spPr>
-            <a:xfrm rot="0">
+            <a:xfrm>
               <a:off x="0" y="1839274"/>
               <a:ext cx="6935430" cy="6108700"/>
             </a:xfrm>
@@ -9267,12 +9043,12 @@
             </a:prstGeom>
           </p:spPr>
           <p:txBody>
-            <a:bodyPr anchor="t" rtlCol="false" tIns="0" lIns="0" bIns="0" rIns="0">
+            <a:bodyPr lIns="0" tIns="0" rIns="0" bIns="0" rtlCol="0" anchor="t">
               <a:spAutoFit/>
             </a:bodyPr>
             <a:lstStyle/>
             <a:p>
-              <a:pPr algn="just" marL="0" indent="0" lvl="0">
+              <a:pPr marL="0" lvl="0" indent="0" algn="just">
                 <a:lnSpc>
                   <a:spcPts val="2836"/>
                 </a:lnSpc>
@@ -9295,12 +9071,12 @@
       </p:grpSp>
       <p:grpSp>
         <p:nvGrpSpPr>
-          <p:cNvPr name="Group 5" id="5"/>
+          <p:cNvPr id="5" name="Group 5"/>
           <p:cNvGrpSpPr/>
           <p:nvPr/>
         </p:nvGrpSpPr>
         <p:grpSpPr>
-          <a:xfrm rot="0">
+          <a:xfrm>
             <a:off x="9343102" y="2057400"/>
             <a:ext cx="7297073" cy="533400"/>
             <a:chOff x="0" y="0"/>
@@ -9309,12 +9085,12 @@
         </p:grpSpPr>
         <p:sp>
           <p:nvSpPr>
-            <p:cNvPr name="TextBox 6" id="6"/>
-            <p:cNvSpPr txBox="true"/>
+            <p:cNvPr id="6" name="TextBox 6"/>
+            <p:cNvSpPr txBox="1"/>
             <p:nvPr/>
           </p:nvSpPr>
           <p:spPr>
-            <a:xfrm rot="0">
+            <a:xfrm>
               <a:off x="1397000" y="58208"/>
               <a:ext cx="8332430" cy="601738"/>
             </a:xfrm>
@@ -9323,12 +9099,12 @@
             </a:prstGeom>
           </p:spPr>
           <p:txBody>
-            <a:bodyPr anchor="t" rtlCol="false" tIns="0" lIns="0" bIns="0" rIns="0">
+            <a:bodyPr lIns="0" tIns="0" rIns="0" bIns="0" rtlCol="0" anchor="t">
               <a:spAutoFit/>
             </a:bodyPr>
             <a:lstStyle/>
             <a:p>
-              <a:pPr algn="l" marL="0" indent="0" lvl="0">
+              <a:pPr marL="0" lvl="0" indent="0" algn="l">
                 <a:lnSpc>
                   <a:spcPts val="3868"/>
                 </a:lnSpc>
@@ -9350,12 +9126,12 @@
         </p:sp>
         <p:sp>
           <p:nvSpPr>
-            <p:cNvPr name="TextBox 7" id="7"/>
-            <p:cNvSpPr txBox="true"/>
+            <p:cNvPr id="7" name="TextBox 7"/>
+            <p:cNvSpPr txBox="1"/>
             <p:nvPr/>
           </p:nvSpPr>
           <p:spPr>
-            <a:xfrm rot="0">
+            <a:xfrm>
               <a:off x="0" y="-9525"/>
               <a:ext cx="890230" cy="720725"/>
             </a:xfrm>
@@ -9364,7 +9140,7 @@
             </a:prstGeom>
           </p:spPr>
           <p:txBody>
-            <a:bodyPr anchor="t" rtlCol="false" tIns="0" lIns="0" bIns="0" rIns="0">
+            <a:bodyPr lIns="0" tIns="0" rIns="0" bIns="0" rtlCol="0" anchor="t">
               <a:spAutoFit/>
             </a:bodyPr>
             <a:lstStyle/>
@@ -9392,12 +9168,12 @@
       </p:grpSp>
       <p:grpSp>
         <p:nvGrpSpPr>
-          <p:cNvPr name="Group 8" id="8"/>
+          <p:cNvPr id="8" name="Group 8"/>
           <p:cNvGrpSpPr/>
           <p:nvPr/>
         </p:nvGrpSpPr>
         <p:grpSpPr>
-          <a:xfrm rot="0">
+          <a:xfrm>
             <a:off x="9343102" y="3185160"/>
             <a:ext cx="7297073" cy="533400"/>
             <a:chOff x="0" y="0"/>
@@ -9406,12 +9182,12 @@
         </p:grpSpPr>
         <p:sp>
           <p:nvSpPr>
-            <p:cNvPr name="TextBox 9" id="9"/>
-            <p:cNvSpPr txBox="true"/>
+            <p:cNvPr id="9" name="TextBox 9"/>
+            <p:cNvSpPr txBox="1"/>
             <p:nvPr/>
           </p:nvSpPr>
           <p:spPr>
-            <a:xfrm rot="0">
+            <a:xfrm>
               <a:off x="1397000" y="58208"/>
               <a:ext cx="8332430" cy="601738"/>
             </a:xfrm>
@@ -9420,12 +9196,12 @@
             </a:prstGeom>
           </p:spPr>
           <p:txBody>
-            <a:bodyPr anchor="t" rtlCol="false" tIns="0" lIns="0" bIns="0" rIns="0">
+            <a:bodyPr lIns="0" tIns="0" rIns="0" bIns="0" rtlCol="0" anchor="t">
               <a:spAutoFit/>
             </a:bodyPr>
             <a:lstStyle/>
             <a:p>
-              <a:pPr algn="l" marL="0" indent="0" lvl="0">
+              <a:pPr marL="0" lvl="0" indent="0" algn="l">
                 <a:lnSpc>
                   <a:spcPts val="3868"/>
                 </a:lnSpc>
@@ -9447,12 +9223,12 @@
         </p:sp>
         <p:sp>
           <p:nvSpPr>
-            <p:cNvPr name="TextBox 10" id="10"/>
-            <p:cNvSpPr txBox="true"/>
+            <p:cNvPr id="10" name="TextBox 10"/>
+            <p:cNvSpPr txBox="1"/>
             <p:nvPr/>
           </p:nvSpPr>
           <p:spPr>
-            <a:xfrm rot="0">
+            <a:xfrm>
               <a:off x="0" y="-9525"/>
               <a:ext cx="890230" cy="720725"/>
             </a:xfrm>
@@ -9461,7 +9237,7 @@
             </a:prstGeom>
           </p:spPr>
           <p:txBody>
-            <a:bodyPr anchor="t" rtlCol="false" tIns="0" lIns="0" bIns="0" rIns="0">
+            <a:bodyPr lIns="0" tIns="0" rIns="0" bIns="0" rtlCol="0" anchor="t">
               <a:spAutoFit/>
             </a:bodyPr>
             <a:lstStyle/>
@@ -9489,12 +9265,12 @@
       </p:grpSp>
       <p:grpSp>
         <p:nvGrpSpPr>
-          <p:cNvPr name="Group 11" id="11"/>
+          <p:cNvPr id="11" name="Group 11"/>
           <p:cNvGrpSpPr/>
           <p:nvPr/>
         </p:nvGrpSpPr>
         <p:grpSpPr>
-          <a:xfrm rot="0">
+          <a:xfrm>
             <a:off x="9343102" y="4312920"/>
             <a:ext cx="7297073" cy="533400"/>
             <a:chOff x="0" y="0"/>
@@ -9503,12 +9279,12 @@
         </p:grpSpPr>
         <p:sp>
           <p:nvSpPr>
-            <p:cNvPr name="TextBox 12" id="12"/>
-            <p:cNvSpPr txBox="true"/>
+            <p:cNvPr id="12" name="TextBox 12"/>
+            <p:cNvSpPr txBox="1"/>
             <p:nvPr/>
           </p:nvSpPr>
           <p:spPr>
-            <a:xfrm rot="0">
+            <a:xfrm>
               <a:off x="1397000" y="58208"/>
               <a:ext cx="8332430" cy="601738"/>
             </a:xfrm>
@@ -9517,12 +9293,12 @@
             </a:prstGeom>
           </p:spPr>
           <p:txBody>
-            <a:bodyPr anchor="t" rtlCol="false" tIns="0" lIns="0" bIns="0" rIns="0">
+            <a:bodyPr lIns="0" tIns="0" rIns="0" bIns="0" rtlCol="0" anchor="t">
               <a:spAutoFit/>
             </a:bodyPr>
             <a:lstStyle/>
             <a:p>
-              <a:pPr algn="l" marL="0" indent="0" lvl="0">
+              <a:pPr marL="0" lvl="0" indent="0" algn="l">
                 <a:lnSpc>
                   <a:spcPts val="3868"/>
                 </a:lnSpc>
@@ -9544,12 +9320,12 @@
         </p:sp>
         <p:sp>
           <p:nvSpPr>
-            <p:cNvPr name="TextBox 13" id="13"/>
-            <p:cNvSpPr txBox="true"/>
+            <p:cNvPr id="13" name="TextBox 13"/>
+            <p:cNvSpPr txBox="1"/>
             <p:nvPr/>
           </p:nvSpPr>
           <p:spPr>
-            <a:xfrm rot="0">
+            <a:xfrm>
               <a:off x="0" y="-9525"/>
               <a:ext cx="890230" cy="720725"/>
             </a:xfrm>
@@ -9558,7 +9334,7 @@
             </a:prstGeom>
           </p:spPr>
           <p:txBody>
-            <a:bodyPr anchor="t" rtlCol="false" tIns="0" lIns="0" bIns="0" rIns="0">
+            <a:bodyPr lIns="0" tIns="0" rIns="0" bIns="0" rtlCol="0" anchor="t">
               <a:spAutoFit/>
             </a:bodyPr>
             <a:lstStyle/>
@@ -9586,12 +9362,12 @@
       </p:grpSp>
       <p:grpSp>
         <p:nvGrpSpPr>
-          <p:cNvPr name="Group 14" id="14"/>
+          <p:cNvPr id="14" name="Group 14"/>
           <p:cNvGrpSpPr/>
           <p:nvPr/>
         </p:nvGrpSpPr>
         <p:grpSpPr>
-          <a:xfrm rot="0">
+          <a:xfrm>
             <a:off x="9343102" y="5440680"/>
             <a:ext cx="7297073" cy="533400"/>
             <a:chOff x="0" y="0"/>
@@ -9600,12 +9376,12 @@
         </p:grpSpPr>
         <p:sp>
           <p:nvSpPr>
-            <p:cNvPr name="TextBox 15" id="15"/>
-            <p:cNvSpPr txBox="true"/>
+            <p:cNvPr id="15" name="TextBox 15"/>
+            <p:cNvSpPr txBox="1"/>
             <p:nvPr/>
           </p:nvSpPr>
           <p:spPr>
-            <a:xfrm rot="0">
+            <a:xfrm>
               <a:off x="1397000" y="58208"/>
               <a:ext cx="8332430" cy="601738"/>
             </a:xfrm>
@@ -9614,12 +9390,12 @@
             </a:prstGeom>
           </p:spPr>
           <p:txBody>
-            <a:bodyPr anchor="t" rtlCol="false" tIns="0" lIns="0" bIns="0" rIns="0">
+            <a:bodyPr lIns="0" tIns="0" rIns="0" bIns="0" rtlCol="0" anchor="t">
               <a:spAutoFit/>
             </a:bodyPr>
             <a:lstStyle/>
             <a:p>
-              <a:pPr algn="l" marL="0" indent="0" lvl="0">
+              <a:pPr marL="0" lvl="0" indent="0" algn="l">
                 <a:lnSpc>
                   <a:spcPts val="3868"/>
                 </a:lnSpc>
@@ -9641,12 +9417,12 @@
         </p:sp>
         <p:sp>
           <p:nvSpPr>
-            <p:cNvPr name="TextBox 16" id="16"/>
-            <p:cNvSpPr txBox="true"/>
+            <p:cNvPr id="16" name="TextBox 16"/>
+            <p:cNvSpPr txBox="1"/>
             <p:nvPr/>
           </p:nvSpPr>
           <p:spPr>
-            <a:xfrm rot="0">
+            <a:xfrm>
               <a:off x="0" y="-9525"/>
               <a:ext cx="890230" cy="720725"/>
             </a:xfrm>
@@ -9655,7 +9431,7 @@
             </a:prstGeom>
           </p:spPr>
           <p:txBody>
-            <a:bodyPr anchor="t" rtlCol="false" tIns="0" lIns="0" bIns="0" rIns="0">
+            <a:bodyPr lIns="0" tIns="0" rIns="0" bIns="0" rtlCol="0" anchor="t">
               <a:spAutoFit/>
             </a:bodyPr>
             <a:lstStyle/>
@@ -9683,12 +9459,12 @@
       </p:grpSp>
       <p:grpSp>
         <p:nvGrpSpPr>
-          <p:cNvPr name="Group 17" id="17"/>
+          <p:cNvPr id="17" name="Group 17"/>
           <p:cNvGrpSpPr/>
           <p:nvPr/>
         </p:nvGrpSpPr>
         <p:grpSpPr>
-          <a:xfrm rot="0">
+          <a:xfrm>
             <a:off x="9343102" y="6568440"/>
             <a:ext cx="7297073" cy="533400"/>
             <a:chOff x="0" y="0"/>
@@ -9697,12 +9473,12 @@
         </p:grpSpPr>
         <p:sp>
           <p:nvSpPr>
-            <p:cNvPr name="TextBox 18" id="18"/>
-            <p:cNvSpPr txBox="true"/>
+            <p:cNvPr id="18" name="TextBox 18"/>
+            <p:cNvSpPr txBox="1"/>
             <p:nvPr/>
           </p:nvSpPr>
           <p:spPr>
-            <a:xfrm rot="0">
+            <a:xfrm>
               <a:off x="1397000" y="58208"/>
               <a:ext cx="8332430" cy="601738"/>
             </a:xfrm>
@@ -9711,12 +9487,12 @@
             </a:prstGeom>
           </p:spPr>
           <p:txBody>
-            <a:bodyPr anchor="t" rtlCol="false" tIns="0" lIns="0" bIns="0" rIns="0">
+            <a:bodyPr lIns="0" tIns="0" rIns="0" bIns="0" rtlCol="0" anchor="t">
               <a:spAutoFit/>
             </a:bodyPr>
             <a:lstStyle/>
             <a:p>
-              <a:pPr algn="l" marL="0" indent="0" lvl="0">
+              <a:pPr marL="0" lvl="0" indent="0" algn="l">
                 <a:lnSpc>
                   <a:spcPts val="3868"/>
                 </a:lnSpc>
@@ -9738,12 +9514,12 @@
         </p:sp>
         <p:sp>
           <p:nvSpPr>
-            <p:cNvPr name="TextBox 19" id="19"/>
-            <p:cNvSpPr txBox="true"/>
+            <p:cNvPr id="19" name="TextBox 19"/>
+            <p:cNvSpPr txBox="1"/>
             <p:nvPr/>
           </p:nvSpPr>
           <p:spPr>
-            <a:xfrm rot="0">
+            <a:xfrm>
               <a:off x="0" y="-9525"/>
               <a:ext cx="890230" cy="720725"/>
             </a:xfrm>
@@ -9752,7 +9528,7 @@
             </a:prstGeom>
           </p:spPr>
           <p:txBody>
-            <a:bodyPr anchor="t" rtlCol="false" tIns="0" lIns="0" bIns="0" rIns="0">
+            <a:bodyPr lIns="0" tIns="0" rIns="0" bIns="0" rtlCol="0" anchor="t">
               <a:spAutoFit/>
             </a:bodyPr>
             <a:lstStyle/>
@@ -9780,12 +9556,12 @@
       </p:grpSp>
       <p:grpSp>
         <p:nvGrpSpPr>
-          <p:cNvPr name="Group 20" id="20"/>
+          <p:cNvPr id="20" name="Group 20"/>
           <p:cNvGrpSpPr/>
           <p:nvPr/>
         </p:nvGrpSpPr>
         <p:grpSpPr>
-          <a:xfrm rot="0">
+          <a:xfrm>
             <a:off x="9343102" y="7696200"/>
             <a:ext cx="7297073" cy="533400"/>
             <a:chOff x="0" y="0"/>
@@ -9794,12 +9570,12 @@
         </p:grpSpPr>
         <p:sp>
           <p:nvSpPr>
-            <p:cNvPr name="TextBox 21" id="21"/>
-            <p:cNvSpPr txBox="true"/>
+            <p:cNvPr id="21" name="TextBox 21"/>
+            <p:cNvSpPr txBox="1"/>
             <p:nvPr/>
           </p:nvSpPr>
           <p:spPr>
-            <a:xfrm rot="0">
+            <a:xfrm>
               <a:off x="1397000" y="58208"/>
               <a:ext cx="8332430" cy="601738"/>
             </a:xfrm>
@@ -9808,12 +9584,12 @@
             </a:prstGeom>
           </p:spPr>
           <p:txBody>
-            <a:bodyPr anchor="t" rtlCol="false" tIns="0" lIns="0" bIns="0" rIns="0">
+            <a:bodyPr lIns="0" tIns="0" rIns="0" bIns="0" rtlCol="0" anchor="t">
               <a:spAutoFit/>
             </a:bodyPr>
             <a:lstStyle/>
             <a:p>
-              <a:pPr algn="l" marL="0" indent="0" lvl="0">
+              <a:pPr marL="0" lvl="0" indent="0" algn="l">
                 <a:lnSpc>
                   <a:spcPts val="3868"/>
                 </a:lnSpc>
@@ -9835,12 +9611,12 @@
         </p:sp>
         <p:sp>
           <p:nvSpPr>
-            <p:cNvPr name="TextBox 22" id="22"/>
-            <p:cNvSpPr txBox="true"/>
+            <p:cNvPr id="22" name="TextBox 22"/>
+            <p:cNvSpPr txBox="1"/>
             <p:nvPr/>
           </p:nvSpPr>
           <p:spPr>
-            <a:xfrm rot="0">
+            <a:xfrm>
               <a:off x="0" y="-9525"/>
               <a:ext cx="890230" cy="720725"/>
             </a:xfrm>
@@ -9849,7 +9625,7 @@
             </a:prstGeom>
           </p:spPr>
           <p:txBody>
-            <a:bodyPr anchor="t" rtlCol="false" tIns="0" lIns="0" bIns="0" rIns="0">
+            <a:bodyPr lIns="0" tIns="0" rIns="0" bIns="0" rtlCol="0" anchor="t">
               <a:spAutoFit/>
             </a:bodyPr>
             <a:lstStyle/>
@@ -9884,13 +9660,14 @@
 </file>
 
 <file path=ppt/slides/slide9.xml><?xml version="1.0" encoding="utf-8"?>
-<p:sld xmlns:p="http://schemas.openxmlformats.org/presentationml/2006/main" xmlns:a="http://schemas.openxmlformats.org/drawingml/2006/main" xmlns:r="http://schemas.openxmlformats.org/officeDocument/2006/relationships">
+<p:sld xmlns:a="http://schemas.openxmlformats.org/drawingml/2006/main" xmlns:r="http://schemas.openxmlformats.org/officeDocument/2006/relationships" xmlns:p="http://schemas.openxmlformats.org/presentationml/2006/main">
   <p:cSld>
     <p:bg>
       <p:bgPr>
         <a:solidFill>
           <a:srgbClr val="E8E6E3"/>
         </a:solidFill>
+        <a:effectLst/>
       </p:bgPr>
     </p:bg>
     <p:spTree>
@@ -9909,12 +9686,12 @@
       </p:grpSpPr>
       <p:sp>
         <p:nvSpPr>
-          <p:cNvPr name="Freeform 2" id="2"/>
+          <p:cNvPr id="2" name="Freeform 2"/>
           <p:cNvSpPr/>
           <p:nvPr/>
         </p:nvSpPr>
         <p:spPr>
-          <a:xfrm flipH="false" flipV="false" rot="0">
+          <a:xfrm>
             <a:off x="0" y="9910777"/>
             <a:ext cx="18288000" cy="376223"/>
           </a:xfrm>
@@ -9923,9 +9700,9 @@
             <a:gdLst/>
             <a:ahLst/>
             <a:cxnLst/>
-            <a:rect r="r" b="b" t="t" l="l"/>
+            <a:rect l="l" t="t" r="r" b="b"/>
             <a:pathLst>
-              <a:path h="376223" w="18288000">
+              <a:path w="18288000" h="376223">
                 <a:moveTo>
                   <a:pt x="0" y="0"/>
                 </a:moveTo>
@@ -9948,19 +9725,19 @@
           <a:blipFill>
             <a:blip r:embed="rId2"/>
             <a:stretch>
-              <a:fillRect l="0" t="-1531929" r="0" b="-1102351"/>
+              <a:fillRect t="-1531929" b="-1102351"/>
             </a:stretch>
           </a:blipFill>
         </p:spPr>
       </p:sp>
       <p:sp>
         <p:nvSpPr>
-          <p:cNvPr name="Freeform 3" id="3"/>
+          <p:cNvPr id="3" name="Freeform 3"/>
           <p:cNvSpPr/>
           <p:nvPr/>
         </p:nvSpPr>
         <p:spPr>
-          <a:xfrm flipH="false" flipV="false" rot="0">
+          <a:xfrm>
             <a:off x="5786707" y="1989951"/>
             <a:ext cx="8560410" cy="7477620"/>
           </a:xfrm>
@@ -9969,9 +9746,9 @@
             <a:gdLst/>
             <a:ahLst/>
             <a:cxnLst/>
-            <a:rect r="r" b="b" t="t" l="l"/>
+            <a:rect l="l" t="t" r="r" b="b"/>
             <a:pathLst>
-              <a:path h="7477620" w="8560410">
+              <a:path w="8560410" h="7477620">
                 <a:moveTo>
                   <a:pt x="0" y="0"/>
                 </a:moveTo>
@@ -9994,19 +9771,19 @@
           <a:blipFill>
             <a:blip r:embed="rId3"/>
             <a:stretch>
-              <a:fillRect l="0" t="0" r="0" b="0"/>
+              <a:fillRect/>
             </a:stretch>
           </a:blipFill>
         </p:spPr>
       </p:sp>
       <p:sp>
         <p:nvSpPr>
-          <p:cNvPr name="TextBox 4" id="4"/>
-          <p:cNvSpPr txBox="true"/>
+          <p:cNvPr id="4" name="TextBox 4"/>
+          <p:cNvSpPr txBox="1"/>
           <p:nvPr/>
         </p:nvSpPr>
         <p:spPr>
-          <a:xfrm rot="0">
+          <a:xfrm>
             <a:off x="8180902" y="349264"/>
             <a:ext cx="3772019" cy="904537"/>
           </a:xfrm>
@@ -10015,7 +9792,7 @@
           </a:prstGeom>
         </p:spPr>
         <p:txBody>
-          <a:bodyPr anchor="t" rtlCol="false" tIns="0" lIns="0" bIns="0" rIns="0">
+          <a:bodyPr lIns="0" tIns="0" rIns="0" bIns="0" rtlCol="0" anchor="t">
             <a:spAutoFit/>
           </a:bodyPr>
           <a:lstStyle/>
